--- a/psychologicalReview/figures/actionParadigmFigures.pptx
+++ b/psychologicalReview/figures/actionParadigmFigures.pptx
@@ -2,7 +2,7 @@
 <file path=ppt/presentation.xml><?xml version="1.0" encoding="utf-8"?>
 <p:presentation xmlns:a="http://schemas.openxmlformats.org/drawingml/2006/main" xmlns:r="http://schemas.openxmlformats.org/officeDocument/2006/relationships" xmlns:p="http://schemas.openxmlformats.org/presentationml/2006/main" saveSubsetFonts="1">
   <p:sldMasterIdLst>
-    <p:sldMasterId id="2147483720" r:id="rId1"/>
+    <p:sldMasterId id="2147483732" r:id="rId1"/>
   </p:sldMasterIdLst>
   <p:notesMasterIdLst>
     <p:notesMasterId r:id="rId4"/>
@@ -11,7 +11,7 @@
     <p:sldId id="258" r:id="rId2"/>
     <p:sldId id="259" r:id="rId3"/>
   </p:sldIdLst>
-  <p:sldSz cx="25199975" cy="18000663"/>
+  <p:sldSz cx="50399950" cy="18000663"/>
   <p:notesSz cx="6858000" cy="9144000"/>
   <p:defaultTextStyle>
     <a:defPPr>
@@ -198,7 +198,7 @@
           <a:p>
             <a:fld id="{E16BCF61-F42E-4834-BCD0-9EC4CEE09EFA}" type="datetimeFigureOut">
               <a:rPr lang="en-US" smtClean="0"/>
-              <a:t>6/6/2026</a:t>
+              <a:t>6/11/2026</a:t>
             </a:fld>
             <a:endParaRPr lang="en-US"/>
           </a:p>
@@ -216,8 +216,8 @@
         </p:nvSpPr>
         <p:spPr>
           <a:xfrm>
-            <a:off x="1268413" y="1143000"/>
-            <a:ext cx="4321175" cy="3086100"/>
+            <a:off x="-890588" y="1143000"/>
+            <a:ext cx="8639176" cy="3086100"/>
           </a:xfrm>
           <a:prstGeom prst="rect">
             <a:avLst/>
@@ -494,8 +494,8 @@
         </p:nvSpPr>
         <p:spPr>
           <a:xfrm>
-            <a:off x="1268413" y="1143000"/>
-            <a:ext cx="4321175" cy="3086100"/>
+            <a:off x="-890588" y="1143000"/>
+            <a:ext cx="8639176" cy="3086100"/>
           </a:xfrm>
         </p:spPr>
       </p:sp>
@@ -595,8 +595,8 @@
         </p:nvSpPr>
         <p:spPr>
           <a:xfrm>
-            <a:off x="1268413" y="1143000"/>
-            <a:ext cx="4321175" cy="3086100"/>
+            <a:off x="-890588" y="1143000"/>
+            <a:ext cx="8639176" cy="3086100"/>
           </a:xfrm>
         </p:spPr>
       </p:sp>
@@ -696,8 +696,8 @@
         </p:nvSpPr>
         <p:spPr>
           <a:xfrm>
-            <a:off x="1889998" y="2945943"/>
-            <a:ext cx="21419979" cy="6266897"/>
+            <a:off x="6299994" y="2945943"/>
+            <a:ext cx="37799963" cy="6266897"/>
           </a:xfrm>
         </p:spPr>
         <p:txBody>
@@ -728,8 +728,8 @@
         </p:nvSpPr>
         <p:spPr>
           <a:xfrm>
-            <a:off x="3149997" y="9454516"/>
-            <a:ext cx="18899981" cy="4345992"/>
+            <a:off x="6299994" y="9454516"/>
+            <a:ext cx="37799963" cy="4345992"/>
           </a:xfrm>
         </p:spPr>
         <p:txBody>
@@ -798,7 +798,7 @@
           <a:p>
             <a:fld id="{95168CD7-63E8-421D-92A5-1A28A922945B}" type="datetimeFigureOut">
               <a:rPr lang="en-US" smtClean="0"/>
-              <a:t>6/6/2026</a:t>
+              <a:t>6/11/2026</a:t>
             </a:fld>
             <a:endParaRPr lang="en-US"/>
           </a:p>
@@ -849,7 +849,7 @@
     </p:spTree>
     <p:extLst>
       <p:ext uri="{BB962C8B-B14F-4D97-AF65-F5344CB8AC3E}">
-        <p14:creationId xmlns:p14="http://schemas.microsoft.com/office/powerpoint/2010/main" val="541223561"/>
+        <p14:creationId xmlns:p14="http://schemas.microsoft.com/office/powerpoint/2010/main" val="142443192"/>
       </p:ext>
     </p:extLst>
   </p:cSld>
@@ -968,7 +968,7 @@
           <a:p>
             <a:fld id="{95168CD7-63E8-421D-92A5-1A28A922945B}" type="datetimeFigureOut">
               <a:rPr lang="en-US" smtClean="0"/>
-              <a:t>6/6/2026</a:t>
+              <a:t>6/11/2026</a:t>
             </a:fld>
             <a:endParaRPr lang="en-US"/>
           </a:p>
@@ -1019,7 +1019,7 @@
     </p:spTree>
     <p:extLst>
       <p:ext uri="{BB962C8B-B14F-4D97-AF65-F5344CB8AC3E}">
-        <p14:creationId xmlns:p14="http://schemas.microsoft.com/office/powerpoint/2010/main" val="3151632321"/>
+        <p14:creationId xmlns:p14="http://schemas.microsoft.com/office/powerpoint/2010/main" val="1225952788"/>
       </p:ext>
     </p:extLst>
   </p:cSld>
@@ -1058,8 +1058,8 @@
         </p:nvSpPr>
         <p:spPr>
           <a:xfrm>
-            <a:off x="18033733" y="958369"/>
-            <a:ext cx="5433745" cy="15254730"/>
+            <a:off x="36067464" y="958369"/>
+            <a:ext cx="10867489" cy="15254730"/>
           </a:xfrm>
         </p:spPr>
         <p:txBody>
@@ -1086,8 +1086,8 @@
         </p:nvSpPr>
         <p:spPr>
           <a:xfrm>
-            <a:off x="1732500" y="958369"/>
-            <a:ext cx="15986234" cy="15254730"/>
+            <a:off x="3464997" y="958369"/>
+            <a:ext cx="31972468" cy="15254730"/>
           </a:xfrm>
         </p:spPr>
         <p:txBody>
@@ -1148,7 +1148,7 @@
           <a:p>
             <a:fld id="{95168CD7-63E8-421D-92A5-1A28A922945B}" type="datetimeFigureOut">
               <a:rPr lang="en-US" smtClean="0"/>
-              <a:t>6/6/2026</a:t>
+              <a:t>6/11/2026</a:t>
             </a:fld>
             <a:endParaRPr lang="en-US"/>
           </a:p>
@@ -1199,7 +1199,7 @@
     </p:spTree>
     <p:extLst>
       <p:ext uri="{BB962C8B-B14F-4D97-AF65-F5344CB8AC3E}">
-        <p14:creationId xmlns:p14="http://schemas.microsoft.com/office/powerpoint/2010/main" val="913469011"/>
+        <p14:creationId xmlns:p14="http://schemas.microsoft.com/office/powerpoint/2010/main" val="1046195921"/>
       </p:ext>
     </p:extLst>
   </p:cSld>
@@ -1318,7 +1318,7 @@
           <a:p>
             <a:fld id="{95168CD7-63E8-421D-92A5-1A28A922945B}" type="datetimeFigureOut">
               <a:rPr lang="en-US" smtClean="0"/>
-              <a:t>6/6/2026</a:t>
+              <a:t>6/11/2026</a:t>
             </a:fld>
             <a:endParaRPr lang="en-US"/>
           </a:p>
@@ -1369,7 +1369,7 @@
     </p:spTree>
     <p:extLst>
       <p:ext uri="{BB962C8B-B14F-4D97-AF65-F5344CB8AC3E}">
-        <p14:creationId xmlns:p14="http://schemas.microsoft.com/office/powerpoint/2010/main" val="57945827"/>
+        <p14:creationId xmlns:p14="http://schemas.microsoft.com/office/powerpoint/2010/main" val="3567204877"/>
       </p:ext>
     </p:extLst>
   </p:cSld>
@@ -1408,8 +1408,8 @@
         </p:nvSpPr>
         <p:spPr>
           <a:xfrm>
-            <a:off x="1719375" y="4487671"/>
-            <a:ext cx="21734978" cy="7487774"/>
+            <a:off x="3438747" y="4487668"/>
+            <a:ext cx="43469957" cy="7487774"/>
           </a:xfrm>
         </p:spPr>
         <p:txBody>
@@ -1440,8 +1440,8 @@
         </p:nvSpPr>
         <p:spPr>
           <a:xfrm>
-            <a:off x="1719375" y="12046282"/>
-            <a:ext cx="21734978" cy="3937644"/>
+            <a:off x="3438747" y="12046280"/>
+            <a:ext cx="43469957" cy="3937644"/>
           </a:xfrm>
         </p:spPr>
         <p:txBody>
@@ -1564,7 +1564,7 @@
           <a:p>
             <a:fld id="{95168CD7-63E8-421D-92A5-1A28A922945B}" type="datetimeFigureOut">
               <a:rPr lang="en-US" smtClean="0"/>
-              <a:t>6/6/2026</a:t>
+              <a:t>6/11/2026</a:t>
             </a:fld>
             <a:endParaRPr lang="en-US"/>
           </a:p>
@@ -1615,7 +1615,7 @@
     </p:spTree>
     <p:extLst>
       <p:ext uri="{BB962C8B-B14F-4D97-AF65-F5344CB8AC3E}">
-        <p14:creationId xmlns:p14="http://schemas.microsoft.com/office/powerpoint/2010/main" val="417023709"/>
+        <p14:creationId xmlns:p14="http://schemas.microsoft.com/office/powerpoint/2010/main" val="665347160"/>
       </p:ext>
     </p:extLst>
   </p:cSld>
@@ -1677,8 +1677,8 @@
         </p:nvSpPr>
         <p:spPr>
           <a:xfrm>
-            <a:off x="1732498" y="4791843"/>
-            <a:ext cx="10709989" cy="11421255"/>
+            <a:off x="3464996" y="4791843"/>
+            <a:ext cx="21419979" cy="11421255"/>
           </a:xfrm>
         </p:spPr>
         <p:txBody>
@@ -1734,8 +1734,8 @@
         </p:nvSpPr>
         <p:spPr>
           <a:xfrm>
-            <a:off x="12757488" y="4791843"/>
-            <a:ext cx="10709989" cy="11421255"/>
+            <a:off x="25514975" y="4791843"/>
+            <a:ext cx="21419979" cy="11421255"/>
           </a:xfrm>
         </p:spPr>
         <p:txBody>
@@ -1796,7 +1796,7 @@
           <a:p>
             <a:fld id="{95168CD7-63E8-421D-92A5-1A28A922945B}" type="datetimeFigureOut">
               <a:rPr lang="en-US" smtClean="0"/>
-              <a:t>6/6/2026</a:t>
+              <a:t>6/11/2026</a:t>
             </a:fld>
             <a:endParaRPr lang="en-US"/>
           </a:p>
@@ -1847,7 +1847,7 @@
     </p:spTree>
     <p:extLst>
       <p:ext uri="{BB962C8B-B14F-4D97-AF65-F5344CB8AC3E}">
-        <p14:creationId xmlns:p14="http://schemas.microsoft.com/office/powerpoint/2010/main" val="400376558"/>
+        <p14:creationId xmlns:p14="http://schemas.microsoft.com/office/powerpoint/2010/main" val="3913504183"/>
       </p:ext>
     </p:extLst>
   </p:cSld>
@@ -1886,8 +1886,8 @@
         </p:nvSpPr>
         <p:spPr>
           <a:xfrm>
-            <a:off x="1735781" y="958373"/>
-            <a:ext cx="21734978" cy="3479296"/>
+            <a:off x="3471561" y="958370"/>
+            <a:ext cx="43469957" cy="3479296"/>
           </a:xfrm>
         </p:spPr>
         <p:txBody>
@@ -1914,8 +1914,8 @@
         </p:nvSpPr>
         <p:spPr>
           <a:xfrm>
-            <a:off x="1735783" y="4412664"/>
-            <a:ext cx="10660769" cy="2162578"/>
+            <a:off x="3471563" y="4412664"/>
+            <a:ext cx="21321539" cy="2162578"/>
           </a:xfrm>
         </p:spPr>
         <p:txBody>
@@ -1979,8 +1979,8 @@
         </p:nvSpPr>
         <p:spPr>
           <a:xfrm>
-            <a:off x="1735783" y="6575242"/>
-            <a:ext cx="10660769" cy="9671191"/>
+            <a:off x="3471563" y="6575242"/>
+            <a:ext cx="21321539" cy="9671191"/>
           </a:xfrm>
         </p:spPr>
         <p:txBody>
@@ -2036,8 +2036,8 @@
         </p:nvSpPr>
         <p:spPr>
           <a:xfrm>
-            <a:off x="12757489" y="4412664"/>
-            <a:ext cx="10713272" cy="2162578"/>
+            <a:off x="25514975" y="4412664"/>
+            <a:ext cx="21426543" cy="2162578"/>
           </a:xfrm>
         </p:spPr>
         <p:txBody>
@@ -2101,8 +2101,8 @@
         </p:nvSpPr>
         <p:spPr>
           <a:xfrm>
-            <a:off x="12757489" y="6575242"/>
-            <a:ext cx="10713272" cy="9671191"/>
+            <a:off x="25514975" y="6575242"/>
+            <a:ext cx="21426543" cy="9671191"/>
           </a:xfrm>
         </p:spPr>
         <p:txBody>
@@ -2163,7 +2163,7 @@
           <a:p>
             <a:fld id="{95168CD7-63E8-421D-92A5-1A28A922945B}" type="datetimeFigureOut">
               <a:rPr lang="en-US" smtClean="0"/>
-              <a:t>6/6/2026</a:t>
+              <a:t>6/11/2026</a:t>
             </a:fld>
             <a:endParaRPr lang="en-US"/>
           </a:p>
@@ -2214,7 +2214,7 @@
     </p:spTree>
     <p:extLst>
       <p:ext uri="{BB962C8B-B14F-4D97-AF65-F5344CB8AC3E}">
-        <p14:creationId xmlns:p14="http://schemas.microsoft.com/office/powerpoint/2010/main" val="3924163483"/>
+        <p14:creationId xmlns:p14="http://schemas.microsoft.com/office/powerpoint/2010/main" val="3729433524"/>
       </p:ext>
     </p:extLst>
   </p:cSld>
@@ -2281,7 +2281,7 @@
           <a:p>
             <a:fld id="{95168CD7-63E8-421D-92A5-1A28A922945B}" type="datetimeFigureOut">
               <a:rPr lang="en-US" smtClean="0"/>
-              <a:t>6/6/2026</a:t>
+              <a:t>6/11/2026</a:t>
             </a:fld>
             <a:endParaRPr lang="en-US"/>
           </a:p>
@@ -2332,7 +2332,7 @@
     </p:spTree>
     <p:extLst>
       <p:ext uri="{BB962C8B-B14F-4D97-AF65-F5344CB8AC3E}">
-        <p14:creationId xmlns:p14="http://schemas.microsoft.com/office/powerpoint/2010/main" val="3313589227"/>
+        <p14:creationId xmlns:p14="http://schemas.microsoft.com/office/powerpoint/2010/main" val="3857748551"/>
       </p:ext>
     </p:extLst>
   </p:cSld>
@@ -2376,7 +2376,7 @@
           <a:p>
             <a:fld id="{95168CD7-63E8-421D-92A5-1A28A922945B}" type="datetimeFigureOut">
               <a:rPr lang="en-US" smtClean="0"/>
-              <a:t>6/6/2026</a:t>
+              <a:t>6/11/2026</a:t>
             </a:fld>
             <a:endParaRPr lang="en-US"/>
           </a:p>
@@ -2427,7 +2427,7 @@
     </p:spTree>
     <p:extLst>
       <p:ext uri="{BB962C8B-B14F-4D97-AF65-F5344CB8AC3E}">
-        <p14:creationId xmlns:p14="http://schemas.microsoft.com/office/powerpoint/2010/main" val="1006379106"/>
+        <p14:creationId xmlns:p14="http://schemas.microsoft.com/office/powerpoint/2010/main" val="3705601653"/>
       </p:ext>
     </p:extLst>
   </p:cSld>
@@ -2466,8 +2466,8 @@
         </p:nvSpPr>
         <p:spPr>
           <a:xfrm>
-            <a:off x="1735780" y="1200044"/>
-            <a:ext cx="8127648" cy="4200155"/>
+            <a:off x="3471563" y="1200044"/>
+            <a:ext cx="16255294" cy="4200155"/>
           </a:xfrm>
         </p:spPr>
         <p:txBody>
@@ -2498,8 +2498,8 @@
         </p:nvSpPr>
         <p:spPr>
           <a:xfrm>
-            <a:off x="10713272" y="2591766"/>
-            <a:ext cx="12757487" cy="12792138"/>
+            <a:off x="21426543" y="2591763"/>
+            <a:ext cx="25514975" cy="12792138"/>
           </a:xfrm>
         </p:spPr>
         <p:txBody>
@@ -2583,8 +2583,8 @@
         </p:nvSpPr>
         <p:spPr>
           <a:xfrm>
-            <a:off x="1735780" y="5400199"/>
-            <a:ext cx="8127648" cy="10004536"/>
+            <a:off x="3471563" y="5400199"/>
+            <a:ext cx="16255294" cy="10004536"/>
           </a:xfrm>
         </p:spPr>
         <p:txBody>
@@ -2653,7 +2653,7 @@
           <a:p>
             <a:fld id="{95168CD7-63E8-421D-92A5-1A28A922945B}" type="datetimeFigureOut">
               <a:rPr lang="en-US" smtClean="0"/>
-              <a:t>6/6/2026</a:t>
+              <a:t>6/11/2026</a:t>
             </a:fld>
             <a:endParaRPr lang="en-US"/>
           </a:p>
@@ -2704,7 +2704,7 @@
     </p:spTree>
     <p:extLst>
       <p:ext uri="{BB962C8B-B14F-4D97-AF65-F5344CB8AC3E}">
-        <p14:creationId xmlns:p14="http://schemas.microsoft.com/office/powerpoint/2010/main" val="2185671409"/>
+        <p14:creationId xmlns:p14="http://schemas.microsoft.com/office/powerpoint/2010/main" val="4083422465"/>
       </p:ext>
     </p:extLst>
   </p:cSld>
@@ -2743,8 +2743,8 @@
         </p:nvSpPr>
         <p:spPr>
           <a:xfrm>
-            <a:off x="1735780" y="1200044"/>
-            <a:ext cx="8127648" cy="4200155"/>
+            <a:off x="3471563" y="1200044"/>
+            <a:ext cx="16255294" cy="4200155"/>
           </a:xfrm>
         </p:spPr>
         <p:txBody>
@@ -2775,8 +2775,8 @@
         </p:nvSpPr>
         <p:spPr>
           <a:xfrm>
-            <a:off x="10713272" y="2591766"/>
-            <a:ext cx="12757487" cy="12792138"/>
+            <a:off x="21426543" y="2591763"/>
+            <a:ext cx="25514975" cy="12792138"/>
           </a:xfrm>
         </p:spPr>
         <p:txBody>
@@ -2840,8 +2840,8 @@
         </p:nvSpPr>
         <p:spPr>
           <a:xfrm>
-            <a:off x="1735780" y="5400199"/>
-            <a:ext cx="8127648" cy="10004536"/>
+            <a:off x="3471563" y="5400199"/>
+            <a:ext cx="16255294" cy="10004536"/>
           </a:xfrm>
         </p:spPr>
         <p:txBody>
@@ -2910,7 +2910,7 @@
           <a:p>
             <a:fld id="{95168CD7-63E8-421D-92A5-1A28A922945B}" type="datetimeFigureOut">
               <a:rPr lang="en-US" smtClean="0"/>
-              <a:t>6/6/2026</a:t>
+              <a:t>6/11/2026</a:t>
             </a:fld>
             <a:endParaRPr lang="en-US"/>
           </a:p>
@@ -2961,7 +2961,7 @@
     </p:spTree>
     <p:extLst>
       <p:ext uri="{BB962C8B-B14F-4D97-AF65-F5344CB8AC3E}">
-        <p14:creationId xmlns:p14="http://schemas.microsoft.com/office/powerpoint/2010/main" val="1368202982"/>
+        <p14:creationId xmlns:p14="http://schemas.microsoft.com/office/powerpoint/2010/main" val="1399510955"/>
       </p:ext>
     </p:extLst>
   </p:cSld>
@@ -3005,8 +3005,8 @@
         </p:nvSpPr>
         <p:spPr>
           <a:xfrm>
-            <a:off x="1732499" y="958373"/>
-            <a:ext cx="21734978" cy="3479296"/>
+            <a:off x="3464997" y="958370"/>
+            <a:ext cx="43469957" cy="3479296"/>
           </a:xfrm>
           <a:prstGeom prst="rect">
             <a:avLst/>
@@ -3038,8 +3038,8 @@
         </p:nvSpPr>
         <p:spPr>
           <a:xfrm>
-            <a:off x="1732499" y="4791843"/>
-            <a:ext cx="21734978" cy="11421255"/>
+            <a:off x="3464997" y="4791843"/>
+            <a:ext cx="43469957" cy="11421255"/>
           </a:xfrm>
           <a:prstGeom prst="rect">
             <a:avLst/>
@@ -3100,8 +3100,8 @@
         </p:nvSpPr>
         <p:spPr>
           <a:xfrm>
-            <a:off x="1732498" y="16683952"/>
-            <a:ext cx="5669994" cy="958369"/>
+            <a:off x="3464996" y="16683949"/>
+            <a:ext cx="11339989" cy="958369"/>
           </a:xfrm>
           <a:prstGeom prst="rect">
             <a:avLst/>
@@ -3123,7 +3123,7 @@
           <a:p>
             <a:fld id="{95168CD7-63E8-421D-92A5-1A28A922945B}" type="datetimeFigureOut">
               <a:rPr lang="en-US" smtClean="0"/>
-              <a:t>6/6/2026</a:t>
+              <a:t>6/11/2026</a:t>
             </a:fld>
             <a:endParaRPr lang="en-US"/>
           </a:p>
@@ -3141,8 +3141,8 @@
         </p:nvSpPr>
         <p:spPr>
           <a:xfrm>
-            <a:off x="8347492" y="16683952"/>
-            <a:ext cx="8504992" cy="958369"/>
+            <a:off x="16694984" y="16683949"/>
+            <a:ext cx="17009983" cy="958369"/>
           </a:xfrm>
           <a:prstGeom prst="rect">
             <a:avLst/>
@@ -3178,8 +3178,8 @@
         </p:nvSpPr>
         <p:spPr>
           <a:xfrm>
-            <a:off x="17797483" y="16683952"/>
-            <a:ext cx="5669994" cy="958369"/>
+            <a:off x="35594965" y="16683949"/>
+            <a:ext cx="11339989" cy="958369"/>
           </a:xfrm>
           <a:prstGeom prst="rect">
             <a:avLst/>
@@ -3210,23 +3210,23 @@
     </p:spTree>
     <p:extLst>
       <p:ext uri="{BB962C8B-B14F-4D97-AF65-F5344CB8AC3E}">
-        <p14:creationId xmlns:p14="http://schemas.microsoft.com/office/powerpoint/2010/main" val="3466209532"/>
+        <p14:creationId xmlns:p14="http://schemas.microsoft.com/office/powerpoint/2010/main" val="4045878434"/>
       </p:ext>
     </p:extLst>
   </p:cSld>
   <p:clrMap bg1="lt1" tx1="dk1" bg2="lt2" tx2="dk2" accent1="accent1" accent2="accent2" accent3="accent3" accent4="accent4" accent5="accent5" accent6="accent6" hlink="hlink" folHlink="folHlink"/>
   <p:sldLayoutIdLst>
-    <p:sldLayoutId id="2147483721" r:id="rId1"/>
-    <p:sldLayoutId id="2147483722" r:id="rId2"/>
-    <p:sldLayoutId id="2147483723" r:id="rId3"/>
-    <p:sldLayoutId id="2147483724" r:id="rId4"/>
-    <p:sldLayoutId id="2147483725" r:id="rId5"/>
-    <p:sldLayoutId id="2147483726" r:id="rId6"/>
-    <p:sldLayoutId id="2147483727" r:id="rId7"/>
-    <p:sldLayoutId id="2147483728" r:id="rId8"/>
-    <p:sldLayoutId id="2147483729" r:id="rId9"/>
-    <p:sldLayoutId id="2147483730" r:id="rId10"/>
-    <p:sldLayoutId id="2147483731" r:id="rId11"/>
+    <p:sldLayoutId id="2147483733" r:id="rId1"/>
+    <p:sldLayoutId id="2147483734" r:id="rId2"/>
+    <p:sldLayoutId id="2147483735" r:id="rId3"/>
+    <p:sldLayoutId id="2147483736" r:id="rId4"/>
+    <p:sldLayoutId id="2147483737" r:id="rId5"/>
+    <p:sldLayoutId id="2147483738" r:id="rId6"/>
+    <p:sldLayoutId id="2147483739" r:id="rId7"/>
+    <p:sldLayoutId id="2147483740" r:id="rId8"/>
+    <p:sldLayoutId id="2147483741" r:id="rId9"/>
+    <p:sldLayoutId id="2147483742" r:id="rId10"/>
+    <p:sldLayoutId id="2147483743" r:id="rId11"/>
   </p:sldLayoutIdLst>
   <p:txStyles>
     <p:titleStyle>
@@ -3542,7 +3542,7 @@
         </p:nvGrpSpPr>
         <p:grpSpPr>
           <a:xfrm>
-            <a:off x="4607796" y="8648858"/>
+            <a:off x="17207785" y="8648859"/>
             <a:ext cx="4991999" cy="1558309"/>
             <a:chOff x="2498104" y="1876424"/>
             <a:chExt cx="4991999" cy="1558309"/>
@@ -3730,7 +3730,7 @@
         </p:nvCxnSpPr>
         <p:spPr>
           <a:xfrm>
-            <a:off x="2486948" y="5032504"/>
+            <a:off x="15086936" y="5032504"/>
             <a:ext cx="9366342" cy="0"/>
           </a:xfrm>
           <a:prstGeom prst="line">
@@ -3771,7 +3771,7 @@
         </p:nvSpPr>
         <p:spPr>
           <a:xfrm>
-            <a:off x="9586284" y="4448040"/>
+            <a:off x="22186272" y="4448040"/>
             <a:ext cx="565608" cy="565608"/>
           </a:xfrm>
           <a:prstGeom prst="ellipse">
@@ -3825,7 +3825,7 @@
         </p:nvSpPr>
         <p:spPr>
           <a:xfrm>
-            <a:off x="2920389" y="4161311"/>
+            <a:off x="15520378" y="4161312"/>
             <a:ext cx="852341" cy="852341"/>
           </a:xfrm>
           <a:prstGeom prst="ellipse">
@@ -3879,7 +3879,7 @@
         </p:nvSpPr>
         <p:spPr>
           <a:xfrm>
-            <a:off x="9371332" y="4118110"/>
+            <a:off x="21971321" y="4118111"/>
             <a:ext cx="996879" cy="895541"/>
           </a:xfrm>
           <a:prstGeom prst="ellipse">
@@ -3936,7 +3936,7 @@
         </p:nvCxnSpPr>
         <p:spPr>
           <a:xfrm flipH="1">
-            <a:off x="9869091" y="4118110"/>
+            <a:off x="22469080" y="4118111"/>
             <a:ext cx="681" cy="329933"/>
           </a:xfrm>
           <a:prstGeom prst="straightConnector1">
@@ -3981,7 +3981,7 @@
         </p:nvCxnSpPr>
         <p:spPr>
           <a:xfrm>
-            <a:off x="9444545" y="4344344"/>
+            <a:off x="22044534" y="4344345"/>
             <a:ext cx="207549" cy="175177"/>
           </a:xfrm>
           <a:prstGeom prst="straightConnector1">
@@ -4026,7 +4026,7 @@
         </p:nvCxnSpPr>
         <p:spPr>
           <a:xfrm flipV="1">
-            <a:off x="10106882" y="4419760"/>
+            <a:off x="22706871" y="4419761"/>
             <a:ext cx="250541" cy="141407"/>
           </a:xfrm>
           <a:prstGeom prst="straightConnector1">
@@ -4069,7 +4069,7 @@
         </p:nvSpPr>
         <p:spPr>
           <a:xfrm>
-            <a:off x="2772404" y="3816463"/>
+            <a:off x="15372393" y="3816463"/>
             <a:ext cx="1131217" cy="1189726"/>
           </a:xfrm>
           <a:prstGeom prst="ellipse">
@@ -4124,7 +4124,7 @@
         </p:nvCxnSpPr>
         <p:spPr>
           <a:xfrm flipH="1">
-            <a:off x="3337671" y="3830592"/>
+            <a:off x="15937660" y="3830593"/>
             <a:ext cx="681" cy="329933"/>
           </a:xfrm>
           <a:prstGeom prst="straightConnector1">
@@ -4169,7 +4169,7 @@
         </p:nvCxnSpPr>
         <p:spPr>
           <a:xfrm>
-            <a:off x="2854117" y="4099256"/>
+            <a:off x="15454106" y="4099257"/>
             <a:ext cx="207549" cy="175177"/>
           </a:xfrm>
           <a:prstGeom prst="straightConnector1">
@@ -4214,7 +4214,7 @@
         </p:nvCxnSpPr>
         <p:spPr>
           <a:xfrm flipV="1">
-            <a:off x="3577077" y="4080400"/>
+            <a:off x="16177066" y="4080401"/>
             <a:ext cx="250541" cy="141407"/>
           </a:xfrm>
           <a:prstGeom prst="straightConnector1">
@@ -4257,7 +4257,7 @@
         </p:nvSpPr>
         <p:spPr>
           <a:xfrm>
-            <a:off x="9861947" y="6936713"/>
+            <a:off x="22461935" y="6936713"/>
             <a:ext cx="565608" cy="565608"/>
           </a:xfrm>
           <a:prstGeom prst="ellipse">
@@ -4311,7 +4311,7 @@
         </p:nvSpPr>
         <p:spPr>
           <a:xfrm>
-            <a:off x="3048388" y="15756300"/>
+            <a:off x="15648377" y="15756301"/>
             <a:ext cx="852341" cy="852341"/>
           </a:xfrm>
           <a:prstGeom prst="ellipse">
@@ -4367,7 +4367,7 @@
         </p:nvCxnSpPr>
         <p:spPr>
           <a:xfrm>
-            <a:off x="8788952" y="7073310"/>
+            <a:off x="21388941" y="7073310"/>
             <a:ext cx="840921" cy="0"/>
           </a:xfrm>
           <a:prstGeom prst="straightConnector1">
@@ -4412,7 +4412,7 @@
         </p:nvCxnSpPr>
         <p:spPr>
           <a:xfrm flipH="1">
-            <a:off x="8825056" y="7315357"/>
+            <a:off x="21425045" y="7315357"/>
             <a:ext cx="850169" cy="0"/>
           </a:xfrm>
           <a:prstGeom prst="straightConnector1">
@@ -4455,7 +4455,7 @@
         </p:nvGrpSpPr>
         <p:grpSpPr>
           <a:xfrm>
-            <a:off x="4608862" y="5634737"/>
+            <a:off x="17208851" y="5634738"/>
             <a:ext cx="4991999" cy="1558309"/>
             <a:chOff x="2498104" y="1876424"/>
             <a:chExt cx="4991999" cy="1558309"/>
@@ -4641,7 +4641,7 @@
         </p:nvSpPr>
         <p:spPr>
           <a:xfrm>
-            <a:off x="8031814" y="6942869"/>
+            <a:off x="20631802" y="6942869"/>
             <a:ext cx="565608" cy="565608"/>
           </a:xfrm>
           <a:prstGeom prst="ellipse">
@@ -4694,7 +4694,7 @@
         </p:nvSpPr>
         <p:spPr>
           <a:xfrm>
-            <a:off x="6539326" y="5977186"/>
+            <a:off x="19139315" y="5977186"/>
             <a:ext cx="896323" cy="1536568"/>
           </a:xfrm>
           <a:prstGeom prst="rect">
@@ -4750,7 +4750,7 @@
         </p:nvCxnSpPr>
         <p:spPr>
           <a:xfrm>
-            <a:off x="2422449" y="7519030"/>
+            <a:off x="15022437" y="7519030"/>
             <a:ext cx="9366342" cy="0"/>
           </a:xfrm>
           <a:prstGeom prst="line">
@@ -4791,7 +4791,7 @@
         </p:nvSpPr>
         <p:spPr>
           <a:xfrm>
-            <a:off x="9860881" y="9950834"/>
+            <a:off x="22460869" y="9950834"/>
             <a:ext cx="565608" cy="565608"/>
           </a:xfrm>
           <a:prstGeom prst="ellipse">
@@ -4845,7 +4845,7 @@
         </p:nvSpPr>
         <p:spPr>
           <a:xfrm>
-            <a:off x="6695243" y="8385434"/>
+            <a:off x="19295231" y="8385434"/>
             <a:ext cx="565608" cy="565608"/>
           </a:xfrm>
           <a:prstGeom prst="ellipse">
@@ -4900,7 +4900,7 @@
         </p:nvCxnSpPr>
         <p:spPr>
           <a:xfrm>
-            <a:off x="2421383" y="10533151"/>
+            <a:off x="15021371" y="10533151"/>
             <a:ext cx="9366342" cy="0"/>
           </a:xfrm>
           <a:prstGeom prst="line">
@@ -4941,7 +4941,7 @@
         </p:nvSpPr>
         <p:spPr>
           <a:xfrm>
-            <a:off x="9877995" y="12973072"/>
+            <a:off x="22477983" y="12973072"/>
             <a:ext cx="565608" cy="565608"/>
           </a:xfrm>
           <a:prstGeom prst="ellipse">
@@ -4997,7 +4997,7 @@
         </p:nvCxnSpPr>
         <p:spPr>
           <a:xfrm>
-            <a:off x="8805000" y="13109669"/>
+            <a:off x="21404989" y="13109669"/>
             <a:ext cx="840921" cy="0"/>
           </a:xfrm>
           <a:prstGeom prst="straightConnector1">
@@ -5042,7 +5042,7 @@
         </p:nvCxnSpPr>
         <p:spPr>
           <a:xfrm flipH="1">
-            <a:off x="8841104" y="13351716"/>
+            <a:off x="21441093" y="13351716"/>
             <a:ext cx="850169" cy="0"/>
           </a:xfrm>
           <a:prstGeom prst="straightConnector1">
@@ -5085,7 +5085,7 @@
         </p:nvGrpSpPr>
         <p:grpSpPr>
           <a:xfrm>
-            <a:off x="4624910" y="11671096"/>
+            <a:off x="17224899" y="11671097"/>
             <a:ext cx="4991999" cy="1558309"/>
             <a:chOff x="2498104" y="1876424"/>
             <a:chExt cx="4991999" cy="1558309"/>
@@ -5271,7 +5271,7 @@
         </p:nvSpPr>
         <p:spPr>
           <a:xfrm>
-            <a:off x="5422669" y="12949619"/>
+            <a:off x="18022657" y="12949619"/>
             <a:ext cx="565608" cy="565608"/>
           </a:xfrm>
           <a:prstGeom prst="ellipse">
@@ -5326,7 +5326,7 @@
         </p:nvCxnSpPr>
         <p:spPr>
           <a:xfrm>
-            <a:off x="2438497" y="13555389"/>
+            <a:off x="15038485" y="13555389"/>
             <a:ext cx="9366342" cy="0"/>
           </a:xfrm>
           <a:prstGeom prst="line">
@@ -5367,7 +5367,7 @@
         </p:nvSpPr>
         <p:spPr>
           <a:xfrm>
-            <a:off x="9877995" y="16051880"/>
+            <a:off x="22477983" y="16051880"/>
             <a:ext cx="565608" cy="565608"/>
           </a:xfrm>
           <a:prstGeom prst="ellipse">
@@ -5421,7 +5421,7 @@
         </p:nvSpPr>
         <p:spPr>
           <a:xfrm>
-            <a:off x="3043285" y="12685060"/>
+            <a:off x="15643274" y="12685061"/>
             <a:ext cx="852341" cy="852341"/>
           </a:xfrm>
           <a:prstGeom prst="ellipse">
@@ -5477,7 +5477,7 @@
         </p:nvCxnSpPr>
         <p:spPr>
           <a:xfrm>
-            <a:off x="8805000" y="16188477"/>
+            <a:off x="21404989" y="16188477"/>
             <a:ext cx="840921" cy="0"/>
           </a:xfrm>
           <a:prstGeom prst="straightConnector1">
@@ -5522,7 +5522,7 @@
         </p:nvCxnSpPr>
         <p:spPr>
           <a:xfrm flipH="1">
-            <a:off x="8841104" y="16430524"/>
+            <a:off x="21441093" y="16430524"/>
             <a:ext cx="850169" cy="0"/>
           </a:xfrm>
           <a:prstGeom prst="straightConnector1">
@@ -5565,7 +5565,7 @@
         </p:nvGrpSpPr>
         <p:grpSpPr>
           <a:xfrm>
-            <a:off x="4624910" y="14749904"/>
+            <a:off x="17224899" y="14749905"/>
             <a:ext cx="4991999" cy="1558309"/>
             <a:chOff x="2498104" y="1876424"/>
             <a:chExt cx="4991999" cy="1558309"/>
@@ -5751,7 +5751,7 @@
         </p:nvSpPr>
         <p:spPr>
           <a:xfrm>
-            <a:off x="4015937" y="16031524"/>
+            <a:off x="16615925" y="16031524"/>
             <a:ext cx="565608" cy="565608"/>
           </a:xfrm>
           <a:prstGeom prst="ellipse">
@@ -5806,7 +5806,7 @@
         </p:nvCxnSpPr>
         <p:spPr>
           <a:xfrm>
-            <a:off x="2438497" y="16634197"/>
+            <a:off x="15038485" y="16634197"/>
             <a:ext cx="9366342" cy="0"/>
           </a:xfrm>
           <a:prstGeom prst="line">
@@ -5847,7 +5847,7 @@
         </p:nvSpPr>
         <p:spPr>
           <a:xfrm>
-            <a:off x="3036462" y="9663359"/>
+            <a:off x="15636451" y="9663360"/>
             <a:ext cx="852341" cy="852341"/>
           </a:xfrm>
           <a:prstGeom prst="ellipse">
@@ -5901,7 +5901,7 @@
         </p:nvSpPr>
         <p:spPr>
           <a:xfrm>
-            <a:off x="3003766" y="6646984"/>
+            <a:off x="15603755" y="6646985"/>
             <a:ext cx="852341" cy="852341"/>
           </a:xfrm>
           <a:prstGeom prst="ellipse">
@@ -5955,7 +5955,7 @@
         </p:nvGrpSpPr>
         <p:grpSpPr>
           <a:xfrm>
-            <a:off x="15959065" y="11009415"/>
+            <a:off x="28559054" y="11009416"/>
             <a:ext cx="4991999" cy="1558309"/>
             <a:chOff x="2498104" y="1876424"/>
             <a:chExt cx="4991999" cy="1558309"/>
@@ -6143,7 +6143,7 @@
         </p:nvCxnSpPr>
         <p:spPr>
           <a:xfrm>
-            <a:off x="14159145" y="7494862"/>
+            <a:off x="26759133" y="7494862"/>
             <a:ext cx="7934422" cy="0"/>
           </a:xfrm>
           <a:prstGeom prst="line">
@@ -6184,7 +6184,7 @@
         </p:nvSpPr>
         <p:spPr>
           <a:xfrm>
-            <a:off x="20951062" y="6910398"/>
+            <a:off x="33551050" y="6910398"/>
             <a:ext cx="565608" cy="565608"/>
           </a:xfrm>
           <a:prstGeom prst="ellipse">
@@ -6238,7 +6238,7 @@
         </p:nvSpPr>
         <p:spPr>
           <a:xfrm>
-            <a:off x="14116335" y="6623669"/>
+            <a:off x="26716324" y="6623670"/>
             <a:ext cx="852341" cy="852341"/>
           </a:xfrm>
           <a:prstGeom prst="ellipse">
@@ -6294,7 +6294,7 @@
         </p:nvCxnSpPr>
         <p:spPr>
           <a:xfrm>
-            <a:off x="14253972" y="12805496"/>
+            <a:off x="26853960" y="12805496"/>
             <a:ext cx="7934422" cy="0"/>
           </a:xfrm>
           <a:prstGeom prst="line">
@@ -6335,7 +6335,7 @@
         </p:nvSpPr>
         <p:spPr>
           <a:xfrm>
-            <a:off x="21045889" y="12221032"/>
+            <a:off x="33645877" y="12221032"/>
             <a:ext cx="565608" cy="565608"/>
           </a:xfrm>
           <a:prstGeom prst="ellipse">
@@ -6389,7 +6389,7 @@
         </p:nvSpPr>
         <p:spPr>
           <a:xfrm>
-            <a:off x="14343509" y="11934303"/>
+            <a:off x="26943498" y="11934304"/>
             <a:ext cx="852341" cy="852341"/>
           </a:xfrm>
           <a:prstGeom prst="ellipse">
@@ -6445,7 +6445,7 @@
         </p:nvCxnSpPr>
         <p:spPr>
           <a:xfrm flipH="1">
-            <a:off x="15864238" y="7170977"/>
+            <a:off x="28464227" y="7170977"/>
             <a:ext cx="4845621" cy="0"/>
           </a:xfrm>
           <a:prstGeom prst="straightConnector1">
@@ -6487,7 +6487,7 @@
         </p:nvSpPr>
         <p:spPr>
           <a:xfrm>
-            <a:off x="15107738" y="6918965"/>
+            <a:off x="27707726" y="6918965"/>
             <a:ext cx="565608" cy="565608"/>
           </a:xfrm>
           <a:prstGeom prst="ellipse">
@@ -6540,7 +6540,7 @@
         </p:nvSpPr>
         <p:spPr>
           <a:xfrm>
-            <a:off x="15305257" y="12197388"/>
+            <a:off x="27905245" y="12197388"/>
             <a:ext cx="565608" cy="565608"/>
           </a:xfrm>
           <a:prstGeom prst="ellipse">
@@ -6595,7 +6595,7 @@
         </p:nvCxnSpPr>
         <p:spPr>
           <a:xfrm>
-            <a:off x="19954517" y="12445116"/>
+            <a:off x="32554506" y="12445116"/>
             <a:ext cx="840921" cy="0"/>
           </a:xfrm>
           <a:prstGeom prst="straightConnector1">
@@ -6640,7 +6640,7 @@
         </p:nvCxnSpPr>
         <p:spPr>
           <a:xfrm flipH="1">
-            <a:off x="19954517" y="12675131"/>
+            <a:off x="32554506" y="12675131"/>
             <a:ext cx="850169" cy="0"/>
           </a:xfrm>
           <a:prstGeom prst="straightConnector1">
@@ -6683,7 +6683,7 @@
         </p:nvSpPr>
         <p:spPr>
           <a:xfrm>
-            <a:off x="16878032" y="9937321"/>
+            <a:off x="29478020" y="9937321"/>
             <a:ext cx="3135410" cy="553998"/>
           </a:xfrm>
           <a:prstGeom prst="rect">
@@ -6721,7 +6721,7 @@
         </p:nvSpPr>
         <p:spPr>
           <a:xfrm>
-            <a:off x="16878032" y="6132666"/>
+            <a:off x="29478020" y="6132666"/>
             <a:ext cx="2858090" cy="553998"/>
           </a:xfrm>
           <a:prstGeom prst="rect">
@@ -6759,7 +6759,7 @@
         </p:nvSpPr>
         <p:spPr>
           <a:xfrm>
-            <a:off x="6559375" y="9005133"/>
+            <a:off x="19159364" y="9005133"/>
             <a:ext cx="896323" cy="1536568"/>
           </a:xfrm>
           <a:prstGeom prst="rect">
@@ -6813,7 +6813,7 @@
         </p:nvSpPr>
         <p:spPr>
           <a:xfrm>
-            <a:off x="6565983" y="12020923"/>
+            <a:off x="19165972" y="12020923"/>
             <a:ext cx="896323" cy="1536568"/>
           </a:xfrm>
           <a:prstGeom prst="rect">
@@ -6867,7 +6867,7 @@
         </p:nvSpPr>
         <p:spPr>
           <a:xfrm>
-            <a:off x="6547405" y="15073565"/>
+            <a:off x="19147394" y="15073565"/>
             <a:ext cx="896323" cy="1536568"/>
           </a:xfrm>
           <a:prstGeom prst="rect">
@@ -6921,7 +6921,7 @@
         </p:nvSpPr>
         <p:spPr>
           <a:xfrm>
-            <a:off x="6522541" y="3495419"/>
+            <a:off x="19122530" y="3495419"/>
             <a:ext cx="896323" cy="1536568"/>
           </a:xfrm>
           <a:prstGeom prst="rect">
@@ -6975,7 +6975,7 @@
         </p:nvSpPr>
         <p:spPr>
           <a:xfrm>
-            <a:off x="4711512" y="2389698"/>
+            <a:off x="17311500" y="2389698"/>
             <a:ext cx="4753224" cy="784830"/>
           </a:xfrm>
           <a:prstGeom prst="rect">
@@ -7013,7 +7013,7 @@
         </p:nvSpPr>
         <p:spPr>
           <a:xfrm>
-            <a:off x="16896717" y="2389698"/>
+            <a:off x="29496705" y="2389698"/>
             <a:ext cx="2776658" cy="784830"/>
           </a:xfrm>
           <a:prstGeom prst="rect">
@@ -7051,7 +7051,7 @@
         </p:nvSpPr>
         <p:spPr>
           <a:xfrm>
-            <a:off x="8253669" y="241338"/>
+            <a:off x="20853657" y="241339"/>
             <a:ext cx="8692636" cy="1015663"/>
           </a:xfrm>
           <a:prstGeom prst="rect">
@@ -7089,7 +7089,7 @@
         </p:nvCxnSpPr>
         <p:spPr>
           <a:xfrm>
-            <a:off x="802106" y="4577702"/>
+            <a:off x="13402094" y="4577702"/>
             <a:ext cx="0" cy="10428926"/>
           </a:xfrm>
           <a:prstGeom prst="straightConnector1">
@@ -7131,7 +7131,7 @@
         </p:nvSpPr>
         <p:spPr>
           <a:xfrm rot="5400000">
-            <a:off x="751392" y="9142262"/>
+            <a:off x="13351380" y="9142262"/>
             <a:ext cx="1315104" cy="707886"/>
           </a:xfrm>
           <a:prstGeom prst="rect">
@@ -7191,6 +7191,222 @@
           <a:chExt cx="0" cy="0"/>
         </a:xfrm>
       </p:grpSpPr>
+      <p:sp>
+        <p:nvSpPr>
+          <p:cNvPr id="160" name="Rectangle 159">
+            <a:extLst>
+              <a:ext uri="{FF2B5EF4-FFF2-40B4-BE49-F238E27FC236}">
+                <a16:creationId xmlns:a16="http://schemas.microsoft.com/office/drawing/2014/main" id="{09B899A5-77B6-455F-AB51-CFC43DE645B4}"/>
+              </a:ext>
+            </a:extLst>
+          </p:cNvPr>
+          <p:cNvSpPr/>
+          <p:nvPr/>
+        </p:nvSpPr>
+        <p:spPr>
+          <a:xfrm>
+            <a:off x="39175377" y="2318656"/>
+            <a:ext cx="10482932" cy="15120255"/>
+          </a:xfrm>
+          <a:prstGeom prst="rect">
+            <a:avLst/>
+          </a:prstGeom>
+          <a:solidFill>
+            <a:srgbClr val="F4F8F5"/>
+          </a:solidFill>
+          <a:ln w="9525">
+            <a:solidFill>
+              <a:schemeClr val="accent3"/>
+            </a:solidFill>
+          </a:ln>
+        </p:spPr>
+        <p:style>
+          <a:lnRef idx="2">
+            <a:schemeClr val="accent1">
+              <a:shade val="15000"/>
+            </a:schemeClr>
+          </a:lnRef>
+          <a:fillRef idx="1">
+            <a:schemeClr val="accent1"/>
+          </a:fillRef>
+          <a:effectRef idx="0">
+            <a:schemeClr val="accent1"/>
+          </a:effectRef>
+          <a:fontRef idx="minor">
+            <a:schemeClr val="lt1"/>
+          </a:fontRef>
+        </p:style>
+        <p:txBody>
+          <a:bodyPr rtlCol="0" anchor="ctr"/>
+          <a:lstStyle/>
+          <a:p>
+            <a:pPr algn="ctr"/>
+            <a:endParaRPr lang="en-US"/>
+          </a:p>
+        </p:txBody>
+      </p:sp>
+      <p:sp>
+        <p:nvSpPr>
+          <p:cNvPr id="161" name="Rectangle 160">
+            <a:extLst>
+              <a:ext uri="{FF2B5EF4-FFF2-40B4-BE49-F238E27FC236}">
+                <a16:creationId xmlns:a16="http://schemas.microsoft.com/office/drawing/2014/main" id="{FE328332-2BE1-07C9-96D6-BBCB39EE676F}"/>
+              </a:ext>
+            </a:extLst>
+          </p:cNvPr>
+          <p:cNvSpPr/>
+          <p:nvPr/>
+        </p:nvSpPr>
+        <p:spPr>
+          <a:xfrm>
+            <a:off x="28702120" y="2318657"/>
+            <a:ext cx="10482932" cy="15120255"/>
+          </a:xfrm>
+          <a:prstGeom prst="rect">
+            <a:avLst/>
+          </a:prstGeom>
+          <a:solidFill>
+            <a:srgbClr val="F1F5F8"/>
+          </a:solidFill>
+          <a:ln w="9525">
+            <a:solidFill>
+              <a:schemeClr val="tx2"/>
+            </a:solidFill>
+          </a:ln>
+        </p:spPr>
+        <p:style>
+          <a:lnRef idx="2">
+            <a:schemeClr val="accent1">
+              <a:shade val="15000"/>
+            </a:schemeClr>
+          </a:lnRef>
+          <a:fillRef idx="1">
+            <a:schemeClr val="accent1"/>
+          </a:fillRef>
+          <a:effectRef idx="0">
+            <a:schemeClr val="accent1"/>
+          </a:effectRef>
+          <a:fontRef idx="minor">
+            <a:schemeClr val="lt1"/>
+          </a:fontRef>
+        </p:style>
+        <p:txBody>
+          <a:bodyPr rtlCol="0" anchor="ctr"/>
+          <a:lstStyle/>
+          <a:p>
+            <a:pPr algn="ctr"/>
+            <a:endParaRPr lang="en-US"/>
+          </a:p>
+        </p:txBody>
+      </p:sp>
+      <p:sp>
+        <p:nvSpPr>
+          <p:cNvPr id="155" name="Rectangle 154">
+            <a:extLst>
+              <a:ext uri="{FF2B5EF4-FFF2-40B4-BE49-F238E27FC236}">
+                <a16:creationId xmlns:a16="http://schemas.microsoft.com/office/drawing/2014/main" id="{E716EE3B-06DA-6C14-0024-41CDDECCC94F}"/>
+              </a:ext>
+            </a:extLst>
+          </p:cNvPr>
+          <p:cNvSpPr/>
+          <p:nvPr/>
+        </p:nvSpPr>
+        <p:spPr>
+          <a:xfrm>
+            <a:off x="12628628" y="2318656"/>
+            <a:ext cx="10482932" cy="15120255"/>
+          </a:xfrm>
+          <a:prstGeom prst="rect">
+            <a:avLst/>
+          </a:prstGeom>
+          <a:solidFill>
+            <a:srgbClr val="F4F8F5"/>
+          </a:solidFill>
+          <a:ln w="9525">
+            <a:solidFill>
+              <a:schemeClr val="accent3"/>
+            </a:solidFill>
+          </a:ln>
+        </p:spPr>
+        <p:style>
+          <a:lnRef idx="2">
+            <a:schemeClr val="accent1">
+              <a:shade val="15000"/>
+            </a:schemeClr>
+          </a:lnRef>
+          <a:fillRef idx="1">
+            <a:schemeClr val="accent1"/>
+          </a:fillRef>
+          <a:effectRef idx="0">
+            <a:schemeClr val="accent1"/>
+          </a:effectRef>
+          <a:fontRef idx="minor">
+            <a:schemeClr val="lt1"/>
+          </a:fontRef>
+        </p:style>
+        <p:txBody>
+          <a:bodyPr rtlCol="0" anchor="ctr"/>
+          <a:lstStyle/>
+          <a:p>
+            <a:pPr algn="ctr"/>
+            <a:endParaRPr lang="en-US"/>
+          </a:p>
+        </p:txBody>
+      </p:sp>
+      <p:sp>
+        <p:nvSpPr>
+          <p:cNvPr id="154" name="Rectangle 153">
+            <a:extLst>
+              <a:ext uri="{FF2B5EF4-FFF2-40B4-BE49-F238E27FC236}">
+                <a16:creationId xmlns:a16="http://schemas.microsoft.com/office/drawing/2014/main" id="{BBDCC8A4-21E3-59F0-742C-28F9A77D5211}"/>
+              </a:ext>
+            </a:extLst>
+          </p:cNvPr>
+          <p:cNvSpPr/>
+          <p:nvPr/>
+        </p:nvSpPr>
+        <p:spPr>
+          <a:xfrm>
+            <a:off x="2155371" y="2318657"/>
+            <a:ext cx="10482932" cy="15120255"/>
+          </a:xfrm>
+          <a:prstGeom prst="rect">
+            <a:avLst/>
+          </a:prstGeom>
+          <a:solidFill>
+            <a:srgbClr val="F1F5F8"/>
+          </a:solidFill>
+          <a:ln w="9525">
+            <a:solidFill>
+              <a:schemeClr val="tx2"/>
+            </a:solidFill>
+          </a:ln>
+        </p:spPr>
+        <p:style>
+          <a:lnRef idx="2">
+            <a:schemeClr val="accent1">
+              <a:shade val="15000"/>
+            </a:schemeClr>
+          </a:lnRef>
+          <a:fillRef idx="1">
+            <a:schemeClr val="accent1"/>
+          </a:fillRef>
+          <a:effectRef idx="0">
+            <a:schemeClr val="accent1"/>
+          </a:effectRef>
+          <a:fontRef idx="minor">
+            <a:schemeClr val="lt1"/>
+          </a:fontRef>
+        </p:style>
+        <p:txBody>
+          <a:bodyPr rtlCol="0" anchor="ctr"/>
+          <a:lstStyle/>
+          <a:p>
+            <a:pPr algn="ctr"/>
+            <a:endParaRPr lang="en-US"/>
+          </a:p>
+        </p:txBody>
+      </p:sp>
       <p:grpSp>
         <p:nvGrpSpPr>
           <p:cNvPr id="95" name="Group 94">
@@ -7205,7 +7421,7 @@
         </p:nvGrpSpPr>
         <p:grpSpPr>
           <a:xfrm>
-            <a:off x="4607796" y="8648858"/>
+            <a:off x="31185043" y="8942773"/>
             <a:ext cx="4991999" cy="1558309"/>
             <a:chOff x="2498104" y="1876424"/>
             <a:chExt cx="4991999" cy="1558309"/>
@@ -7393,7 +7609,7 @@
         </p:nvCxnSpPr>
         <p:spPr>
           <a:xfrm>
-            <a:off x="2486948" y="5032504"/>
+            <a:off x="29064194" y="5326418"/>
             <a:ext cx="9366342" cy="0"/>
           </a:xfrm>
           <a:prstGeom prst="line">
@@ -7434,7 +7650,7 @@
         </p:nvSpPr>
         <p:spPr>
           <a:xfrm>
-            <a:off x="9586284" y="4448040"/>
+            <a:off x="36163530" y="4741954"/>
             <a:ext cx="565608" cy="565608"/>
           </a:xfrm>
           <a:prstGeom prst="ellipse">
@@ -7488,7 +7704,7 @@
         </p:nvSpPr>
         <p:spPr>
           <a:xfrm>
-            <a:off x="2920389" y="4161311"/>
+            <a:off x="29497636" y="4455226"/>
             <a:ext cx="852341" cy="852341"/>
           </a:xfrm>
           <a:prstGeom prst="ellipse">
@@ -7542,7 +7758,7 @@
         </p:nvSpPr>
         <p:spPr>
           <a:xfrm>
-            <a:off x="9371332" y="4118110"/>
+            <a:off x="35948579" y="4412025"/>
             <a:ext cx="996879" cy="895541"/>
           </a:xfrm>
           <a:prstGeom prst="ellipse">
@@ -7599,7 +7815,7 @@
         </p:nvCxnSpPr>
         <p:spPr>
           <a:xfrm flipH="1">
-            <a:off x="9869091" y="4118110"/>
+            <a:off x="36446338" y="4412025"/>
             <a:ext cx="681" cy="329933"/>
           </a:xfrm>
           <a:prstGeom prst="straightConnector1">
@@ -7644,7 +7860,7 @@
         </p:nvCxnSpPr>
         <p:spPr>
           <a:xfrm>
-            <a:off x="9444545" y="4344344"/>
+            <a:off x="36021792" y="4638259"/>
             <a:ext cx="207549" cy="175177"/>
           </a:xfrm>
           <a:prstGeom prst="straightConnector1">
@@ -7689,7 +7905,7 @@
         </p:nvCxnSpPr>
         <p:spPr>
           <a:xfrm flipV="1">
-            <a:off x="10106882" y="4419760"/>
+            <a:off x="36684129" y="4713675"/>
             <a:ext cx="250541" cy="141407"/>
           </a:xfrm>
           <a:prstGeom prst="straightConnector1">
@@ -7732,7 +7948,7 @@
         </p:nvSpPr>
         <p:spPr>
           <a:xfrm>
-            <a:off x="2772404" y="3816463"/>
+            <a:off x="29349651" y="4110377"/>
             <a:ext cx="1131217" cy="1189726"/>
           </a:xfrm>
           <a:prstGeom prst="ellipse">
@@ -7787,7 +8003,7 @@
         </p:nvCxnSpPr>
         <p:spPr>
           <a:xfrm flipH="1">
-            <a:off x="3337671" y="3830592"/>
+            <a:off x="29914918" y="4124507"/>
             <a:ext cx="681" cy="329933"/>
           </a:xfrm>
           <a:prstGeom prst="straightConnector1">
@@ -7832,7 +8048,7 @@
         </p:nvCxnSpPr>
         <p:spPr>
           <a:xfrm>
-            <a:off x="2854117" y="4099256"/>
+            <a:off x="29431364" y="4393171"/>
             <a:ext cx="207549" cy="175177"/>
           </a:xfrm>
           <a:prstGeom prst="straightConnector1">
@@ -7877,7 +8093,7 @@
         </p:nvCxnSpPr>
         <p:spPr>
           <a:xfrm flipV="1">
-            <a:off x="3577077" y="4080400"/>
+            <a:off x="30154324" y="4374315"/>
             <a:ext cx="250541" cy="141407"/>
           </a:xfrm>
           <a:prstGeom prst="straightConnector1">
@@ -7920,7 +8136,7 @@
         </p:nvSpPr>
         <p:spPr>
           <a:xfrm>
-            <a:off x="9861947" y="6936713"/>
+            <a:off x="36439193" y="7230627"/>
             <a:ext cx="565608" cy="565608"/>
           </a:xfrm>
           <a:prstGeom prst="ellipse">
@@ -7974,7 +8190,7 @@
         </p:nvSpPr>
         <p:spPr>
           <a:xfrm>
-            <a:off x="3048388" y="15756300"/>
+            <a:off x="29625635" y="16050215"/>
             <a:ext cx="852341" cy="852341"/>
           </a:xfrm>
           <a:prstGeom prst="ellipse">
@@ -8030,7 +8246,7 @@
         </p:nvCxnSpPr>
         <p:spPr>
           <a:xfrm>
-            <a:off x="8788952" y="7073310"/>
+            <a:off x="35366199" y="7367224"/>
             <a:ext cx="840921" cy="0"/>
           </a:xfrm>
           <a:prstGeom prst="straightConnector1">
@@ -8075,7 +8291,7 @@
         </p:nvCxnSpPr>
         <p:spPr>
           <a:xfrm flipH="1">
-            <a:off x="8825056" y="7315357"/>
+            <a:off x="35402303" y="7609271"/>
             <a:ext cx="850169" cy="0"/>
           </a:xfrm>
           <a:prstGeom prst="straightConnector1">
@@ -8118,7 +8334,7 @@
         </p:nvGrpSpPr>
         <p:grpSpPr>
           <a:xfrm>
-            <a:off x="4608862" y="5634737"/>
+            <a:off x="31186109" y="5928652"/>
             <a:ext cx="4991999" cy="1558309"/>
             <a:chOff x="2498104" y="1876424"/>
             <a:chExt cx="4991999" cy="1558309"/>
@@ -8304,7 +8520,7 @@
         </p:nvSpPr>
         <p:spPr>
           <a:xfrm>
-            <a:off x="8031814" y="6942869"/>
+            <a:off x="34609060" y="7236783"/>
             <a:ext cx="565608" cy="565608"/>
           </a:xfrm>
           <a:prstGeom prst="ellipse">
@@ -8359,7 +8575,7 @@
         </p:nvCxnSpPr>
         <p:spPr>
           <a:xfrm>
-            <a:off x="2422449" y="7519030"/>
+            <a:off x="28999695" y="7812944"/>
             <a:ext cx="9366342" cy="0"/>
           </a:xfrm>
           <a:prstGeom prst="line">
@@ -8400,7 +8616,7 @@
         </p:nvSpPr>
         <p:spPr>
           <a:xfrm>
-            <a:off x="10654675" y="5972384"/>
+            <a:off x="37231922" y="6266298"/>
             <a:ext cx="896323" cy="1536568"/>
           </a:xfrm>
           <a:prstGeom prst="rect">
@@ -8454,7 +8670,7 @@
         </p:nvSpPr>
         <p:spPr>
           <a:xfrm>
-            <a:off x="9860881" y="9950834"/>
+            <a:off x="36438127" y="10244748"/>
             <a:ext cx="565608" cy="565608"/>
           </a:xfrm>
           <a:prstGeom prst="ellipse">
@@ -8508,7 +8724,7 @@
         </p:nvSpPr>
         <p:spPr>
           <a:xfrm>
-            <a:off x="6695243" y="8385434"/>
+            <a:off x="33272489" y="8679348"/>
             <a:ext cx="565608" cy="565608"/>
           </a:xfrm>
           <a:prstGeom prst="ellipse">
@@ -8563,7 +8779,7 @@
         </p:nvCxnSpPr>
         <p:spPr>
           <a:xfrm>
-            <a:off x="2421383" y="10533151"/>
+            <a:off x="28998629" y="10827065"/>
             <a:ext cx="9366342" cy="0"/>
           </a:xfrm>
           <a:prstGeom prst="line">
@@ -8604,7 +8820,7 @@
         </p:nvSpPr>
         <p:spPr>
           <a:xfrm>
-            <a:off x="10653609" y="8986505"/>
+            <a:off x="37230856" y="9280419"/>
             <a:ext cx="896323" cy="1536568"/>
           </a:xfrm>
           <a:prstGeom prst="rect">
@@ -8658,7 +8874,7 @@
         </p:nvSpPr>
         <p:spPr>
           <a:xfrm>
-            <a:off x="9877995" y="12973072"/>
+            <a:off x="36455241" y="13266986"/>
             <a:ext cx="565608" cy="565608"/>
           </a:xfrm>
           <a:prstGeom prst="ellipse">
@@ -8714,7 +8930,7 @@
         </p:nvCxnSpPr>
         <p:spPr>
           <a:xfrm>
-            <a:off x="8805000" y="13109669"/>
+            <a:off x="35382247" y="13403583"/>
             <a:ext cx="840921" cy="0"/>
           </a:xfrm>
           <a:prstGeom prst="straightConnector1">
@@ -8759,7 +8975,7 @@
         </p:nvCxnSpPr>
         <p:spPr>
           <a:xfrm flipH="1">
-            <a:off x="8841104" y="13351716"/>
+            <a:off x="35418351" y="13645630"/>
             <a:ext cx="850169" cy="0"/>
           </a:xfrm>
           <a:prstGeom prst="straightConnector1">
@@ -8802,7 +9018,7 @@
         </p:nvGrpSpPr>
         <p:grpSpPr>
           <a:xfrm>
-            <a:off x="4624910" y="11671096"/>
+            <a:off x="31202157" y="11965011"/>
             <a:ext cx="4991999" cy="1558309"/>
             <a:chOff x="2498104" y="1876424"/>
             <a:chExt cx="4991999" cy="1558309"/>
@@ -8988,7 +9204,7 @@
         </p:nvSpPr>
         <p:spPr>
           <a:xfrm>
-            <a:off x="5422669" y="12949619"/>
+            <a:off x="31999915" y="13243533"/>
             <a:ext cx="565608" cy="565608"/>
           </a:xfrm>
           <a:prstGeom prst="ellipse">
@@ -9043,7 +9259,7 @@
         </p:nvCxnSpPr>
         <p:spPr>
           <a:xfrm>
-            <a:off x="2438497" y="13555389"/>
+            <a:off x="29015743" y="13849303"/>
             <a:ext cx="9366342" cy="0"/>
           </a:xfrm>
           <a:prstGeom prst="line">
@@ -9084,7 +9300,7 @@
         </p:nvSpPr>
         <p:spPr>
           <a:xfrm>
-            <a:off x="10670723" y="12008743"/>
+            <a:off x="37247970" y="12302657"/>
             <a:ext cx="896323" cy="1536568"/>
           </a:xfrm>
           <a:prstGeom prst="rect">
@@ -9138,7 +9354,7 @@
         </p:nvSpPr>
         <p:spPr>
           <a:xfrm>
-            <a:off x="9877995" y="16051880"/>
+            <a:off x="36455241" y="16345794"/>
             <a:ext cx="565608" cy="565608"/>
           </a:xfrm>
           <a:prstGeom prst="ellipse">
@@ -9192,7 +9408,7 @@
         </p:nvSpPr>
         <p:spPr>
           <a:xfrm>
-            <a:off x="3043285" y="12685060"/>
+            <a:off x="29620532" y="12978975"/>
             <a:ext cx="852341" cy="852341"/>
           </a:xfrm>
           <a:prstGeom prst="ellipse">
@@ -9248,7 +9464,7 @@
         </p:nvCxnSpPr>
         <p:spPr>
           <a:xfrm>
-            <a:off x="8805000" y="16188477"/>
+            <a:off x="35382247" y="16482391"/>
             <a:ext cx="840921" cy="0"/>
           </a:xfrm>
           <a:prstGeom prst="straightConnector1">
@@ -9293,7 +9509,7 @@
         </p:nvCxnSpPr>
         <p:spPr>
           <a:xfrm flipH="1">
-            <a:off x="8841104" y="16430524"/>
+            <a:off x="35418351" y="16724438"/>
             <a:ext cx="850169" cy="0"/>
           </a:xfrm>
           <a:prstGeom prst="straightConnector1">
@@ -9336,7 +9552,7 @@
         </p:nvGrpSpPr>
         <p:grpSpPr>
           <a:xfrm>
-            <a:off x="4624910" y="14749904"/>
+            <a:off x="31202157" y="15043819"/>
             <a:ext cx="4991999" cy="1558309"/>
             <a:chOff x="2498104" y="1876424"/>
             <a:chExt cx="4991999" cy="1558309"/>
@@ -9522,7 +9738,7 @@
         </p:nvSpPr>
         <p:spPr>
           <a:xfrm>
-            <a:off x="4015937" y="16031524"/>
+            <a:off x="30593183" y="16325438"/>
             <a:ext cx="565608" cy="565608"/>
           </a:xfrm>
           <a:prstGeom prst="ellipse">
@@ -9577,7 +9793,7 @@
         </p:nvCxnSpPr>
         <p:spPr>
           <a:xfrm>
-            <a:off x="2438497" y="16634197"/>
+            <a:off x="29015743" y="16928111"/>
             <a:ext cx="9366342" cy="0"/>
           </a:xfrm>
           <a:prstGeom prst="line">
@@ -9618,7 +9834,7 @@
         </p:nvSpPr>
         <p:spPr>
           <a:xfrm>
-            <a:off x="10670723" y="15087551"/>
+            <a:off x="37247970" y="15381465"/>
             <a:ext cx="896323" cy="1536568"/>
           </a:xfrm>
           <a:prstGeom prst="rect">
@@ -9672,7 +9888,7 @@
         </p:nvSpPr>
         <p:spPr>
           <a:xfrm>
-            <a:off x="3036462" y="9663359"/>
+            <a:off x="29613709" y="9957274"/>
             <a:ext cx="852341" cy="852341"/>
           </a:xfrm>
           <a:prstGeom prst="ellipse">
@@ -9726,7 +9942,7 @@
         </p:nvSpPr>
         <p:spPr>
           <a:xfrm>
-            <a:off x="3003766" y="6646984"/>
+            <a:off x="29581013" y="6940899"/>
             <a:ext cx="852341" cy="852341"/>
           </a:xfrm>
           <a:prstGeom prst="ellipse">
@@ -9780,7 +9996,7 @@
         </p:nvGrpSpPr>
         <p:grpSpPr>
           <a:xfrm>
-            <a:off x="15959065" y="11009415"/>
+            <a:off x="42536312" y="11303330"/>
             <a:ext cx="4991999" cy="1558309"/>
             <a:chOff x="2498104" y="1876424"/>
             <a:chExt cx="4991999" cy="1558309"/>
@@ -9968,7 +10184,7 @@
         </p:nvCxnSpPr>
         <p:spPr>
           <a:xfrm>
-            <a:off x="14159145" y="7494862"/>
+            <a:off x="40736391" y="7788776"/>
             <a:ext cx="7934422" cy="0"/>
           </a:xfrm>
           <a:prstGeom prst="line">
@@ -10009,7 +10225,7 @@
         </p:nvSpPr>
         <p:spPr>
           <a:xfrm>
-            <a:off x="20951062" y="6910398"/>
+            <a:off x="47528308" y="7204312"/>
             <a:ext cx="565608" cy="565608"/>
           </a:xfrm>
           <a:prstGeom prst="ellipse">
@@ -10063,7 +10279,7 @@
         </p:nvSpPr>
         <p:spPr>
           <a:xfrm>
-            <a:off x="14116335" y="6623669"/>
+            <a:off x="40693582" y="6917584"/>
             <a:ext cx="852341" cy="852341"/>
           </a:xfrm>
           <a:prstGeom prst="ellipse">
@@ -10119,7 +10335,7 @@
         </p:nvCxnSpPr>
         <p:spPr>
           <a:xfrm>
-            <a:off x="14253972" y="12805496"/>
+            <a:off x="40831218" y="13099410"/>
             <a:ext cx="7934422" cy="0"/>
           </a:xfrm>
           <a:prstGeom prst="line">
@@ -10160,7 +10376,7 @@
         </p:nvSpPr>
         <p:spPr>
           <a:xfrm>
-            <a:off x="21045889" y="12221032"/>
+            <a:off x="47623135" y="12514946"/>
             <a:ext cx="565608" cy="565608"/>
           </a:xfrm>
           <a:prstGeom prst="ellipse">
@@ -10214,7 +10430,7 @@
         </p:nvSpPr>
         <p:spPr>
           <a:xfrm>
-            <a:off x="14343509" y="11934303"/>
+            <a:off x="40920756" y="12228218"/>
             <a:ext cx="852341" cy="852341"/>
           </a:xfrm>
           <a:prstGeom prst="ellipse">
@@ -10270,7 +10486,7 @@
         </p:nvCxnSpPr>
         <p:spPr>
           <a:xfrm flipH="1">
-            <a:off x="15864238" y="7170977"/>
+            <a:off x="42441485" y="7464891"/>
             <a:ext cx="4845621" cy="0"/>
           </a:xfrm>
           <a:prstGeom prst="straightConnector1">
@@ -10312,7 +10528,7 @@
         </p:nvSpPr>
         <p:spPr>
           <a:xfrm>
-            <a:off x="15107738" y="6918965"/>
+            <a:off x="41684984" y="7212879"/>
             <a:ext cx="565608" cy="565608"/>
           </a:xfrm>
           <a:prstGeom prst="ellipse">
@@ -10365,7 +10581,7 @@
         </p:nvSpPr>
         <p:spPr>
           <a:xfrm>
-            <a:off x="15305257" y="12197388"/>
+            <a:off x="41882503" y="12491302"/>
             <a:ext cx="565608" cy="565608"/>
           </a:xfrm>
           <a:prstGeom prst="ellipse">
@@ -10420,7 +10636,7 @@
         </p:nvCxnSpPr>
         <p:spPr>
           <a:xfrm>
-            <a:off x="19954517" y="12445116"/>
+            <a:off x="46531764" y="12739030"/>
             <a:ext cx="840921" cy="0"/>
           </a:xfrm>
           <a:prstGeom prst="straightConnector1">
@@ -10465,7 +10681,7 @@
         </p:nvCxnSpPr>
         <p:spPr>
           <a:xfrm flipH="1">
-            <a:off x="19954517" y="12675131"/>
+            <a:off x="46531764" y="12969045"/>
             <a:ext cx="850169" cy="0"/>
           </a:xfrm>
           <a:prstGeom prst="straightConnector1">
@@ -10496,10 +10712,64 @@
       </p:cxnSp>
       <p:sp>
         <p:nvSpPr>
-          <p:cNvPr id="150" name="TextBox 149">
-            <a:extLst>
-              <a:ext uri="{FF2B5EF4-FFF2-40B4-BE49-F238E27FC236}">
-                <a16:creationId xmlns:a16="http://schemas.microsoft.com/office/drawing/2014/main" id="{9649F2F1-A6DD-73FD-001E-E2A6356D32BD}"/>
+          <p:cNvPr id="2" name="Rectangle 1">
+            <a:extLst>
+              <a:ext uri="{FF2B5EF4-FFF2-40B4-BE49-F238E27FC236}">
+                <a16:creationId xmlns:a16="http://schemas.microsoft.com/office/drawing/2014/main" id="{F1BAA800-6DA3-DD70-C70E-53D1CAC7E762}"/>
+              </a:ext>
+            </a:extLst>
+          </p:cNvPr>
+          <p:cNvSpPr/>
+          <p:nvPr/>
+        </p:nvSpPr>
+        <p:spPr>
+          <a:xfrm>
+            <a:off x="37236790" y="3771086"/>
+            <a:ext cx="896323" cy="1536568"/>
+          </a:xfrm>
+          <a:prstGeom prst="rect">
+            <a:avLst/>
+          </a:prstGeom>
+          <a:solidFill>
+            <a:schemeClr val="tx1"/>
+          </a:solidFill>
+          <a:ln>
+            <a:solidFill>
+              <a:schemeClr val="tx1"/>
+            </a:solidFill>
+          </a:ln>
+        </p:spPr>
+        <p:style>
+          <a:lnRef idx="2">
+            <a:schemeClr val="accent1">
+              <a:shade val="15000"/>
+            </a:schemeClr>
+          </a:lnRef>
+          <a:fillRef idx="1">
+            <a:schemeClr val="accent1"/>
+          </a:fillRef>
+          <a:effectRef idx="0">
+            <a:schemeClr val="accent1"/>
+          </a:effectRef>
+          <a:fontRef idx="minor">
+            <a:schemeClr val="lt1"/>
+          </a:fontRef>
+        </p:style>
+        <p:txBody>
+          <a:bodyPr rtlCol="0" anchor="ctr"/>
+          <a:lstStyle/>
+          <a:p>
+            <a:pPr algn="ctr"/>
+            <a:endParaRPr lang="en-US"/>
+          </a:p>
+        </p:txBody>
+      </p:sp>
+      <p:sp>
+        <p:nvSpPr>
+          <p:cNvPr id="5" name="TextBox 4">
+            <a:extLst>
+              <a:ext uri="{FF2B5EF4-FFF2-40B4-BE49-F238E27FC236}">
+                <a16:creationId xmlns:a16="http://schemas.microsoft.com/office/drawing/2014/main" id="{0E19E686-2137-CB8E-A2BA-4054AF171413}"/>
               </a:ext>
             </a:extLst>
           </p:cNvPr>
@@ -10508,8 +10778,8 @@
         </p:nvSpPr>
         <p:spPr>
           <a:xfrm>
-            <a:off x="16878032" y="9937321"/>
-            <a:ext cx="3135410" cy="553998"/>
+            <a:off x="28489366" y="551270"/>
+            <a:ext cx="13750367" cy="1323439"/>
           </a:xfrm>
           <a:prstGeom prst="rect">
             <a:avLst/>
@@ -10523,7 +10793,3228 @@
           <a:lstStyle/>
           <a:p>
             <a:r>
-              <a:rPr lang="en-US" sz="3000" b="1" dirty="0">
+              <a:rPr lang="en-US" sz="8000" b="1" dirty="0">
+                <a:latin typeface="Times New Roman" panose="02020603050405020304" pitchFamily="18" charset="0"/>
+                <a:cs typeface="Times New Roman" panose="02020603050405020304" pitchFamily="18" charset="0"/>
+              </a:rPr>
+              <a:t>B. Unconstrained Action Event</a:t>
+            </a:r>
+          </a:p>
+        </p:txBody>
+      </p:sp>
+      <p:cxnSp>
+        <p:nvCxnSpPr>
+          <p:cNvPr id="6" name="Straight Arrow Connector 5">
+            <a:extLst>
+              <a:ext uri="{FF2B5EF4-FFF2-40B4-BE49-F238E27FC236}">
+                <a16:creationId xmlns:a16="http://schemas.microsoft.com/office/drawing/2014/main" id="{75DC2CA3-2E6C-0556-F434-09B294FCC00C}"/>
+              </a:ext>
+            </a:extLst>
+          </p:cNvPr>
+          <p:cNvCxnSpPr/>
+          <p:nvPr/>
+        </p:nvCxnSpPr>
+        <p:spPr>
+          <a:xfrm>
+            <a:off x="27379352" y="4871616"/>
+            <a:ext cx="0" cy="10428926"/>
+          </a:xfrm>
+          <a:prstGeom prst="straightConnector1">
+            <a:avLst/>
+          </a:prstGeom>
+          <a:ln w="57150">
+            <a:solidFill>
+              <a:schemeClr val="tx1"/>
+            </a:solidFill>
+            <a:tailEnd type="triangle"/>
+          </a:ln>
+        </p:spPr>
+        <p:style>
+          <a:lnRef idx="2">
+            <a:schemeClr val="dk1"/>
+          </a:lnRef>
+          <a:fillRef idx="0">
+            <a:schemeClr val="dk1"/>
+          </a:fillRef>
+          <a:effectRef idx="1">
+            <a:schemeClr val="dk1"/>
+          </a:effectRef>
+          <a:fontRef idx="minor">
+            <a:schemeClr val="tx1"/>
+          </a:fontRef>
+        </p:style>
+      </p:cxnSp>
+      <p:grpSp>
+        <p:nvGrpSpPr>
+          <p:cNvPr id="8" name="Group 7">
+            <a:extLst>
+              <a:ext uri="{FF2B5EF4-FFF2-40B4-BE49-F238E27FC236}">
+                <a16:creationId xmlns:a16="http://schemas.microsoft.com/office/drawing/2014/main" id="{553A9EC1-B530-5761-A681-3EAC50FCCDC0}"/>
+              </a:ext>
+            </a:extLst>
+          </p:cNvPr>
+          <p:cNvGrpSpPr/>
+          <p:nvPr/>
+        </p:nvGrpSpPr>
+        <p:grpSpPr>
+          <a:xfrm>
+            <a:off x="4668032" y="8942773"/>
+            <a:ext cx="4991999" cy="1558309"/>
+            <a:chOff x="2498104" y="1876424"/>
+            <a:chExt cx="4991999" cy="1558309"/>
+          </a:xfrm>
+        </p:grpSpPr>
+        <p:sp>
+          <p:nvSpPr>
+            <p:cNvPr id="9" name="Freeform: Shape 8">
+              <a:extLst>
+                <a:ext uri="{FF2B5EF4-FFF2-40B4-BE49-F238E27FC236}">
+                  <a16:creationId xmlns:a16="http://schemas.microsoft.com/office/drawing/2014/main" id="{366CA529-1A2B-20C0-C1FE-4EE5799F614C}"/>
+                </a:ext>
+              </a:extLst>
+            </p:cNvPr>
+            <p:cNvSpPr/>
+            <p:nvPr/>
+          </p:nvSpPr>
+          <p:spPr>
+            <a:xfrm>
+              <a:off x="3621518" y="1876424"/>
+              <a:ext cx="2590743" cy="1555621"/>
+            </a:xfrm>
+            <a:custGeom>
+              <a:avLst/>
+              <a:gdLst>
+                <a:gd name="csX0" fmla="*/ 0 w 1932495"/>
+                <a:gd name="csY0" fmla="*/ 1470779 h 1555621"/>
+                <a:gd name="csX1" fmla="*/ 942680 w 1932495"/>
+                <a:gd name="csY1" fmla="*/ 198 h 1555621"/>
+                <a:gd name="csX2" fmla="*/ 1932495 w 1932495"/>
+                <a:gd name="csY2" fmla="*/ 1555621 h 1555621"/>
+              </a:gdLst>
+              <a:ahLst/>
+              <a:cxnLst>
+                <a:cxn ang="0">
+                  <a:pos x="csX0" y="csY0"/>
+                </a:cxn>
+                <a:cxn ang="0">
+                  <a:pos x="csX1" y="csY1"/>
+                </a:cxn>
+                <a:cxn ang="0">
+                  <a:pos x="csX2" y="csY2"/>
+                </a:cxn>
+              </a:cxnLst>
+              <a:rect l="l" t="t" r="r" b="b"/>
+              <a:pathLst>
+                <a:path w="1932495" h="1555621">
+                  <a:moveTo>
+                    <a:pt x="0" y="1470779"/>
+                  </a:moveTo>
+                  <a:cubicBezTo>
+                    <a:pt x="310299" y="728418"/>
+                    <a:pt x="620598" y="-13942"/>
+                    <a:pt x="942680" y="198"/>
+                  </a:cubicBezTo>
+                  <a:cubicBezTo>
+                    <a:pt x="1264763" y="14338"/>
+                    <a:pt x="1598629" y="784979"/>
+                    <a:pt x="1932495" y="1555621"/>
+                  </a:cubicBezTo>
+                </a:path>
+              </a:pathLst>
+            </a:custGeom>
+            <a:noFill/>
+          </p:spPr>
+          <p:style>
+            <a:lnRef idx="2">
+              <a:schemeClr val="accent1">
+                <a:shade val="15000"/>
+              </a:schemeClr>
+            </a:lnRef>
+            <a:fillRef idx="1">
+              <a:schemeClr val="accent1"/>
+            </a:fillRef>
+            <a:effectRef idx="0">
+              <a:schemeClr val="accent1"/>
+            </a:effectRef>
+            <a:fontRef idx="minor">
+              <a:schemeClr val="lt1"/>
+            </a:fontRef>
+          </p:style>
+          <p:txBody>
+            <a:bodyPr rtlCol="0" anchor="ctr"/>
+            <a:lstStyle/>
+            <a:p>
+              <a:pPr algn="ctr"/>
+              <a:endParaRPr lang="en-US"/>
+            </a:p>
+          </p:txBody>
+        </p:sp>
+        <p:cxnSp>
+          <p:nvCxnSpPr>
+            <p:cNvPr id="10" name="Straight Connector 9">
+              <a:extLst>
+                <a:ext uri="{FF2B5EF4-FFF2-40B4-BE49-F238E27FC236}">
+                  <a16:creationId xmlns:a16="http://schemas.microsoft.com/office/drawing/2014/main" id="{40C4E80F-62D1-7EAC-C41F-D150F1C561E0}"/>
+                </a:ext>
+              </a:extLst>
+            </p:cNvPr>
+            <p:cNvCxnSpPr>
+              <a:cxnSpLocks/>
+            </p:cNvCxnSpPr>
+            <p:nvPr/>
+          </p:nvCxnSpPr>
+          <p:spPr>
+            <a:xfrm>
+              <a:off x="6210095" y="3434733"/>
+              <a:ext cx="1280008" cy="0"/>
+            </a:xfrm>
+            <a:prstGeom prst="line">
+              <a:avLst/>
+            </a:prstGeom>
+          </p:spPr>
+          <p:style>
+            <a:lnRef idx="2">
+              <a:schemeClr val="dk1"/>
+            </a:lnRef>
+            <a:fillRef idx="0">
+              <a:schemeClr val="dk1"/>
+            </a:fillRef>
+            <a:effectRef idx="1">
+              <a:schemeClr val="dk1"/>
+            </a:effectRef>
+            <a:fontRef idx="minor">
+              <a:schemeClr val="tx1"/>
+            </a:fontRef>
+          </p:style>
+        </p:cxnSp>
+        <p:cxnSp>
+          <p:nvCxnSpPr>
+            <p:cNvPr id="11" name="Straight Arrow Connector 10">
+              <a:extLst>
+                <a:ext uri="{FF2B5EF4-FFF2-40B4-BE49-F238E27FC236}">
+                  <a16:creationId xmlns:a16="http://schemas.microsoft.com/office/drawing/2014/main" id="{16E561AD-87D8-5558-C839-AE1A25860450}"/>
+                </a:ext>
+              </a:extLst>
+            </p:cNvPr>
+            <p:cNvCxnSpPr>
+              <a:cxnSpLocks/>
+              <a:stCxn id="9" idx="0"/>
+            </p:cNvCxnSpPr>
+            <p:nvPr/>
+          </p:nvCxnSpPr>
+          <p:spPr>
+            <a:xfrm flipH="1" flipV="1">
+              <a:off x="2498104" y="3327032"/>
+              <a:ext cx="1123414" cy="20171"/>
+            </a:xfrm>
+            <a:prstGeom prst="straightConnector1">
+              <a:avLst/>
+            </a:prstGeom>
+            <a:ln>
+              <a:tailEnd type="triangle"/>
+            </a:ln>
+          </p:spPr>
+          <p:style>
+            <a:lnRef idx="2">
+              <a:schemeClr val="dk1"/>
+            </a:lnRef>
+            <a:fillRef idx="0">
+              <a:schemeClr val="dk1"/>
+            </a:fillRef>
+            <a:effectRef idx="1">
+              <a:schemeClr val="dk1"/>
+            </a:effectRef>
+            <a:fontRef idx="minor">
+              <a:schemeClr val="tx1"/>
+            </a:fontRef>
+          </p:style>
+        </p:cxnSp>
+      </p:grpSp>
+      <p:cxnSp>
+        <p:nvCxnSpPr>
+          <p:cNvPr id="12" name="Straight Connector 11">
+            <a:extLst>
+              <a:ext uri="{FF2B5EF4-FFF2-40B4-BE49-F238E27FC236}">
+                <a16:creationId xmlns:a16="http://schemas.microsoft.com/office/drawing/2014/main" id="{B336569C-5BC2-2003-1431-8CEB23D8C48A}"/>
+              </a:ext>
+            </a:extLst>
+          </p:cNvPr>
+          <p:cNvCxnSpPr>
+            <a:cxnSpLocks/>
+          </p:cNvCxnSpPr>
+          <p:nvPr/>
+        </p:nvCxnSpPr>
+        <p:spPr>
+          <a:xfrm>
+            <a:off x="2547183" y="5326418"/>
+            <a:ext cx="9366342" cy="0"/>
+          </a:xfrm>
+          <a:prstGeom prst="line">
+            <a:avLst/>
+          </a:prstGeom>
+          <a:ln>
+            <a:solidFill>
+              <a:schemeClr val="tx1"/>
+            </a:solidFill>
+          </a:ln>
+        </p:spPr>
+        <p:style>
+          <a:lnRef idx="2">
+            <a:schemeClr val="accent1"/>
+          </a:lnRef>
+          <a:fillRef idx="0">
+            <a:schemeClr val="accent1"/>
+          </a:fillRef>
+          <a:effectRef idx="1">
+            <a:schemeClr val="accent1"/>
+          </a:effectRef>
+          <a:fontRef idx="minor">
+            <a:schemeClr val="tx1"/>
+          </a:fontRef>
+        </p:style>
+      </p:cxnSp>
+      <p:sp>
+        <p:nvSpPr>
+          <p:cNvPr id="13" name="Oval 12">
+            <a:extLst>
+              <a:ext uri="{FF2B5EF4-FFF2-40B4-BE49-F238E27FC236}">
+                <a16:creationId xmlns:a16="http://schemas.microsoft.com/office/drawing/2014/main" id="{66867A8D-A006-1CCB-0E2F-D12D8302B176}"/>
+              </a:ext>
+            </a:extLst>
+          </p:cNvPr>
+          <p:cNvSpPr/>
+          <p:nvPr/>
+        </p:nvSpPr>
+        <p:spPr>
+          <a:xfrm>
+            <a:off x="9646519" y="4741954"/>
+            <a:ext cx="565608" cy="565608"/>
+          </a:xfrm>
+          <a:prstGeom prst="ellipse">
+            <a:avLst/>
+          </a:prstGeom>
+          <a:solidFill>
+            <a:schemeClr val="tx1"/>
+          </a:solidFill>
+          <a:ln>
+            <a:solidFill>
+              <a:schemeClr val="tx1"/>
+            </a:solidFill>
+          </a:ln>
+        </p:spPr>
+        <p:style>
+          <a:lnRef idx="2">
+            <a:schemeClr val="accent1">
+              <a:shade val="15000"/>
+            </a:schemeClr>
+          </a:lnRef>
+          <a:fillRef idx="1">
+            <a:schemeClr val="accent1"/>
+          </a:fillRef>
+          <a:effectRef idx="0">
+            <a:schemeClr val="accent1"/>
+          </a:effectRef>
+          <a:fontRef idx="minor">
+            <a:schemeClr val="lt1"/>
+          </a:fontRef>
+        </p:style>
+        <p:txBody>
+          <a:bodyPr rtlCol="0" anchor="ctr"/>
+          <a:lstStyle/>
+          <a:p>
+            <a:pPr algn="ctr"/>
+            <a:endParaRPr lang="en-US"/>
+          </a:p>
+        </p:txBody>
+      </p:sp>
+      <p:sp>
+        <p:nvSpPr>
+          <p:cNvPr id="15" name="Oval 14">
+            <a:extLst>
+              <a:ext uri="{FF2B5EF4-FFF2-40B4-BE49-F238E27FC236}">
+                <a16:creationId xmlns:a16="http://schemas.microsoft.com/office/drawing/2014/main" id="{04B2C21A-2385-494A-19D1-7A070356DFDA}"/>
+              </a:ext>
+            </a:extLst>
+          </p:cNvPr>
+          <p:cNvSpPr/>
+          <p:nvPr/>
+        </p:nvSpPr>
+        <p:spPr>
+          <a:xfrm>
+            <a:off x="2980625" y="4455226"/>
+            <a:ext cx="852341" cy="852341"/>
+          </a:xfrm>
+          <a:prstGeom prst="ellipse">
+            <a:avLst/>
+          </a:prstGeom>
+          <a:solidFill>
+            <a:schemeClr val="tx1"/>
+          </a:solidFill>
+          <a:ln>
+            <a:solidFill>
+              <a:schemeClr val="tx1"/>
+            </a:solidFill>
+          </a:ln>
+        </p:spPr>
+        <p:style>
+          <a:lnRef idx="2">
+            <a:schemeClr val="accent1">
+              <a:shade val="15000"/>
+            </a:schemeClr>
+          </a:lnRef>
+          <a:fillRef idx="1">
+            <a:schemeClr val="accent1"/>
+          </a:fillRef>
+          <a:effectRef idx="0">
+            <a:schemeClr val="accent1"/>
+          </a:effectRef>
+          <a:fontRef idx="minor">
+            <a:schemeClr val="lt1"/>
+          </a:fontRef>
+        </p:style>
+        <p:txBody>
+          <a:bodyPr rtlCol="0" anchor="ctr"/>
+          <a:lstStyle/>
+          <a:p>
+            <a:pPr algn="ctr"/>
+            <a:endParaRPr lang="en-US"/>
+          </a:p>
+        </p:txBody>
+      </p:sp>
+      <p:sp>
+        <p:nvSpPr>
+          <p:cNvPr id="26" name="Oval 25">
+            <a:extLst>
+              <a:ext uri="{FF2B5EF4-FFF2-40B4-BE49-F238E27FC236}">
+                <a16:creationId xmlns:a16="http://schemas.microsoft.com/office/drawing/2014/main" id="{5C927715-46B5-B7F8-D124-0CFFA52D9EAF}"/>
+              </a:ext>
+            </a:extLst>
+          </p:cNvPr>
+          <p:cNvSpPr/>
+          <p:nvPr/>
+        </p:nvSpPr>
+        <p:spPr>
+          <a:xfrm>
+            <a:off x="9431568" y="4412025"/>
+            <a:ext cx="996879" cy="895541"/>
+          </a:xfrm>
+          <a:prstGeom prst="ellipse">
+            <a:avLst/>
+          </a:prstGeom>
+          <a:noFill/>
+          <a:ln>
+            <a:solidFill>
+              <a:schemeClr val="tx1"/>
+            </a:solidFill>
+            <a:prstDash val="sysDot"/>
+          </a:ln>
+        </p:spPr>
+        <p:style>
+          <a:lnRef idx="2">
+            <a:schemeClr val="accent1">
+              <a:shade val="15000"/>
+            </a:schemeClr>
+          </a:lnRef>
+          <a:fillRef idx="1">
+            <a:schemeClr val="accent1"/>
+          </a:fillRef>
+          <a:effectRef idx="0">
+            <a:schemeClr val="accent1"/>
+          </a:effectRef>
+          <a:fontRef idx="minor">
+            <a:schemeClr val="lt1"/>
+          </a:fontRef>
+        </p:style>
+        <p:txBody>
+          <a:bodyPr rtlCol="0" anchor="ctr"/>
+          <a:lstStyle/>
+          <a:p>
+            <a:pPr algn="ctr"/>
+            <a:endParaRPr lang="en-US" dirty="0"/>
+          </a:p>
+        </p:txBody>
+      </p:sp>
+      <p:cxnSp>
+        <p:nvCxnSpPr>
+          <p:cNvPr id="27" name="Straight Arrow Connector 26">
+            <a:extLst>
+              <a:ext uri="{FF2B5EF4-FFF2-40B4-BE49-F238E27FC236}">
+                <a16:creationId xmlns:a16="http://schemas.microsoft.com/office/drawing/2014/main" id="{D3A09BDF-CF55-F116-23DC-9395CAA05E06}"/>
+              </a:ext>
+            </a:extLst>
+          </p:cNvPr>
+          <p:cNvCxnSpPr>
+            <a:cxnSpLocks/>
+            <a:stCxn id="26" idx="0"/>
+            <a:endCxn id="13" idx="0"/>
+          </p:cNvCxnSpPr>
+          <p:nvPr/>
+        </p:nvCxnSpPr>
+        <p:spPr>
+          <a:xfrm flipH="1">
+            <a:off x="9929327" y="4412025"/>
+            <a:ext cx="681" cy="329933"/>
+          </a:xfrm>
+          <a:prstGeom prst="straightConnector1">
+            <a:avLst/>
+          </a:prstGeom>
+          <a:ln w="38100">
+            <a:solidFill>
+              <a:schemeClr val="tx1"/>
+            </a:solidFill>
+            <a:headEnd type="triangle"/>
+            <a:tailEnd type="triangle"/>
+          </a:ln>
+        </p:spPr>
+        <p:style>
+          <a:lnRef idx="2">
+            <a:schemeClr val="accent1"/>
+          </a:lnRef>
+          <a:fillRef idx="0">
+            <a:schemeClr val="accent1"/>
+          </a:fillRef>
+          <a:effectRef idx="1">
+            <a:schemeClr val="accent1"/>
+          </a:effectRef>
+          <a:fontRef idx="minor">
+            <a:schemeClr val="tx1"/>
+          </a:fontRef>
+        </p:style>
+      </p:cxnSp>
+      <p:cxnSp>
+        <p:nvCxnSpPr>
+          <p:cNvPr id="30" name="Straight Arrow Connector 29">
+            <a:extLst>
+              <a:ext uri="{FF2B5EF4-FFF2-40B4-BE49-F238E27FC236}">
+                <a16:creationId xmlns:a16="http://schemas.microsoft.com/office/drawing/2014/main" id="{794FA1B2-1882-DAB7-7D70-5D53069D821B}"/>
+              </a:ext>
+            </a:extLst>
+          </p:cNvPr>
+          <p:cNvCxnSpPr>
+            <a:cxnSpLocks/>
+          </p:cNvCxnSpPr>
+          <p:nvPr/>
+        </p:nvCxnSpPr>
+        <p:spPr>
+          <a:xfrm>
+            <a:off x="9504781" y="4638259"/>
+            <a:ext cx="207549" cy="175177"/>
+          </a:xfrm>
+          <a:prstGeom prst="straightConnector1">
+            <a:avLst/>
+          </a:prstGeom>
+          <a:ln w="38100">
+            <a:solidFill>
+              <a:schemeClr val="tx1"/>
+            </a:solidFill>
+            <a:headEnd type="triangle"/>
+            <a:tailEnd type="triangle"/>
+          </a:ln>
+        </p:spPr>
+        <p:style>
+          <a:lnRef idx="2">
+            <a:schemeClr val="accent1"/>
+          </a:lnRef>
+          <a:fillRef idx="0">
+            <a:schemeClr val="accent1"/>
+          </a:fillRef>
+          <a:effectRef idx="1">
+            <a:schemeClr val="accent1"/>
+          </a:effectRef>
+          <a:fontRef idx="minor">
+            <a:schemeClr val="tx1"/>
+          </a:fontRef>
+        </p:style>
+      </p:cxnSp>
+      <p:cxnSp>
+        <p:nvCxnSpPr>
+          <p:cNvPr id="31" name="Straight Arrow Connector 30">
+            <a:extLst>
+              <a:ext uri="{FF2B5EF4-FFF2-40B4-BE49-F238E27FC236}">
+                <a16:creationId xmlns:a16="http://schemas.microsoft.com/office/drawing/2014/main" id="{F19E3349-9630-E204-D205-95C0E242CE2D}"/>
+              </a:ext>
+            </a:extLst>
+          </p:cNvPr>
+          <p:cNvCxnSpPr>
+            <a:cxnSpLocks/>
+          </p:cNvCxnSpPr>
+          <p:nvPr/>
+        </p:nvCxnSpPr>
+        <p:spPr>
+          <a:xfrm flipV="1">
+            <a:off x="10167118" y="4713675"/>
+            <a:ext cx="250541" cy="141407"/>
+          </a:xfrm>
+          <a:prstGeom prst="straightConnector1">
+            <a:avLst/>
+          </a:prstGeom>
+          <a:ln w="38100">
+            <a:solidFill>
+              <a:schemeClr val="tx1"/>
+            </a:solidFill>
+            <a:headEnd type="triangle"/>
+            <a:tailEnd type="triangle"/>
+          </a:ln>
+        </p:spPr>
+        <p:style>
+          <a:lnRef idx="2">
+            <a:schemeClr val="accent1"/>
+          </a:lnRef>
+          <a:fillRef idx="0">
+            <a:schemeClr val="accent1"/>
+          </a:fillRef>
+          <a:effectRef idx="1">
+            <a:schemeClr val="accent1"/>
+          </a:effectRef>
+          <a:fontRef idx="minor">
+            <a:schemeClr val="tx1"/>
+          </a:fontRef>
+        </p:style>
+      </p:cxnSp>
+      <p:sp>
+        <p:nvSpPr>
+          <p:cNvPr id="32" name="Oval 31">
+            <a:extLst>
+              <a:ext uri="{FF2B5EF4-FFF2-40B4-BE49-F238E27FC236}">
+                <a16:creationId xmlns:a16="http://schemas.microsoft.com/office/drawing/2014/main" id="{53A97238-CC30-9556-21D0-5AA60EDFE935}"/>
+              </a:ext>
+            </a:extLst>
+          </p:cNvPr>
+          <p:cNvSpPr/>
+          <p:nvPr/>
+        </p:nvSpPr>
+        <p:spPr>
+          <a:xfrm>
+            <a:off x="2832640" y="4110377"/>
+            <a:ext cx="1131217" cy="1189726"/>
+          </a:xfrm>
+          <a:prstGeom prst="ellipse">
+            <a:avLst/>
+          </a:prstGeom>
+          <a:noFill/>
+          <a:ln>
+            <a:solidFill>
+              <a:schemeClr val="tx1"/>
+            </a:solidFill>
+            <a:prstDash val="sysDot"/>
+          </a:ln>
+        </p:spPr>
+        <p:style>
+          <a:lnRef idx="2">
+            <a:schemeClr val="accent1">
+              <a:shade val="15000"/>
+            </a:schemeClr>
+          </a:lnRef>
+          <a:fillRef idx="1">
+            <a:schemeClr val="accent1"/>
+          </a:fillRef>
+          <a:effectRef idx="0">
+            <a:schemeClr val="accent1"/>
+          </a:effectRef>
+          <a:fontRef idx="minor">
+            <a:schemeClr val="lt1"/>
+          </a:fontRef>
+        </p:style>
+        <p:txBody>
+          <a:bodyPr rtlCol="0" anchor="ctr"/>
+          <a:lstStyle/>
+          <a:p>
+            <a:pPr algn="ctr"/>
+            <a:endParaRPr lang="en-US"/>
+          </a:p>
+        </p:txBody>
+      </p:sp>
+      <p:cxnSp>
+        <p:nvCxnSpPr>
+          <p:cNvPr id="33" name="Straight Arrow Connector 32">
+            <a:extLst>
+              <a:ext uri="{FF2B5EF4-FFF2-40B4-BE49-F238E27FC236}">
+                <a16:creationId xmlns:a16="http://schemas.microsoft.com/office/drawing/2014/main" id="{154CADAB-E75D-54CB-E6C7-5FD4288DAEDA}"/>
+              </a:ext>
+            </a:extLst>
+          </p:cNvPr>
+          <p:cNvCxnSpPr>
+            <a:cxnSpLocks/>
+          </p:cNvCxnSpPr>
+          <p:nvPr/>
+        </p:nvCxnSpPr>
+        <p:spPr>
+          <a:xfrm flipH="1">
+            <a:off x="3397907" y="4124507"/>
+            <a:ext cx="681" cy="329933"/>
+          </a:xfrm>
+          <a:prstGeom prst="straightConnector1">
+            <a:avLst/>
+          </a:prstGeom>
+          <a:ln w="38100">
+            <a:solidFill>
+              <a:schemeClr val="tx1"/>
+            </a:solidFill>
+            <a:headEnd type="triangle"/>
+            <a:tailEnd type="triangle"/>
+          </a:ln>
+        </p:spPr>
+        <p:style>
+          <a:lnRef idx="2">
+            <a:schemeClr val="accent1"/>
+          </a:lnRef>
+          <a:fillRef idx="0">
+            <a:schemeClr val="accent1"/>
+          </a:fillRef>
+          <a:effectRef idx="1">
+            <a:schemeClr val="accent1"/>
+          </a:effectRef>
+          <a:fontRef idx="minor">
+            <a:schemeClr val="tx1"/>
+          </a:fontRef>
+        </p:style>
+      </p:cxnSp>
+      <p:cxnSp>
+        <p:nvCxnSpPr>
+          <p:cNvPr id="41" name="Straight Arrow Connector 40">
+            <a:extLst>
+              <a:ext uri="{FF2B5EF4-FFF2-40B4-BE49-F238E27FC236}">
+                <a16:creationId xmlns:a16="http://schemas.microsoft.com/office/drawing/2014/main" id="{A7166B27-7458-66A5-2219-26CF68CDA167}"/>
+              </a:ext>
+            </a:extLst>
+          </p:cNvPr>
+          <p:cNvCxnSpPr>
+            <a:cxnSpLocks/>
+          </p:cNvCxnSpPr>
+          <p:nvPr/>
+        </p:nvCxnSpPr>
+        <p:spPr>
+          <a:xfrm>
+            <a:off x="2914353" y="4393171"/>
+            <a:ext cx="207549" cy="175177"/>
+          </a:xfrm>
+          <a:prstGeom prst="straightConnector1">
+            <a:avLst/>
+          </a:prstGeom>
+          <a:ln w="38100">
+            <a:solidFill>
+              <a:schemeClr val="tx1"/>
+            </a:solidFill>
+            <a:headEnd type="triangle"/>
+            <a:tailEnd type="triangle"/>
+          </a:ln>
+        </p:spPr>
+        <p:style>
+          <a:lnRef idx="2">
+            <a:schemeClr val="accent1"/>
+          </a:lnRef>
+          <a:fillRef idx="0">
+            <a:schemeClr val="accent1"/>
+          </a:fillRef>
+          <a:effectRef idx="1">
+            <a:schemeClr val="accent1"/>
+          </a:effectRef>
+          <a:fontRef idx="minor">
+            <a:schemeClr val="tx1"/>
+          </a:fontRef>
+        </p:style>
+      </p:cxnSp>
+      <p:cxnSp>
+        <p:nvCxnSpPr>
+          <p:cNvPr id="42" name="Straight Arrow Connector 41">
+            <a:extLst>
+              <a:ext uri="{FF2B5EF4-FFF2-40B4-BE49-F238E27FC236}">
+                <a16:creationId xmlns:a16="http://schemas.microsoft.com/office/drawing/2014/main" id="{63C78106-26FB-B832-316D-B9358AF9D984}"/>
+              </a:ext>
+            </a:extLst>
+          </p:cNvPr>
+          <p:cNvCxnSpPr>
+            <a:cxnSpLocks/>
+          </p:cNvCxnSpPr>
+          <p:nvPr/>
+        </p:nvCxnSpPr>
+        <p:spPr>
+          <a:xfrm flipV="1">
+            <a:off x="3637313" y="4374315"/>
+            <a:ext cx="250541" cy="141407"/>
+          </a:xfrm>
+          <a:prstGeom prst="straightConnector1">
+            <a:avLst/>
+          </a:prstGeom>
+          <a:ln w="38100">
+            <a:solidFill>
+              <a:schemeClr val="tx1"/>
+            </a:solidFill>
+            <a:headEnd type="triangle"/>
+            <a:tailEnd type="triangle"/>
+          </a:ln>
+        </p:spPr>
+        <p:style>
+          <a:lnRef idx="2">
+            <a:schemeClr val="accent1"/>
+          </a:lnRef>
+          <a:fillRef idx="0">
+            <a:schemeClr val="accent1"/>
+          </a:fillRef>
+          <a:effectRef idx="1">
+            <a:schemeClr val="accent1"/>
+          </a:effectRef>
+          <a:fontRef idx="minor">
+            <a:schemeClr val="tx1"/>
+          </a:fontRef>
+        </p:style>
+      </p:cxnSp>
+      <p:sp>
+        <p:nvSpPr>
+          <p:cNvPr id="43" name="Oval 42">
+            <a:extLst>
+              <a:ext uri="{FF2B5EF4-FFF2-40B4-BE49-F238E27FC236}">
+                <a16:creationId xmlns:a16="http://schemas.microsoft.com/office/drawing/2014/main" id="{AD6A77DF-31D4-7D0F-5A01-F2EE7D3F139E}"/>
+              </a:ext>
+            </a:extLst>
+          </p:cNvPr>
+          <p:cNvSpPr/>
+          <p:nvPr/>
+        </p:nvSpPr>
+        <p:spPr>
+          <a:xfrm>
+            <a:off x="9922182" y="7230627"/>
+            <a:ext cx="565608" cy="565608"/>
+          </a:xfrm>
+          <a:prstGeom prst="ellipse">
+            <a:avLst/>
+          </a:prstGeom>
+          <a:solidFill>
+            <a:schemeClr val="tx1"/>
+          </a:solidFill>
+          <a:ln>
+            <a:solidFill>
+              <a:schemeClr val="tx1"/>
+            </a:solidFill>
+          </a:ln>
+        </p:spPr>
+        <p:style>
+          <a:lnRef idx="2">
+            <a:schemeClr val="accent1">
+              <a:shade val="15000"/>
+            </a:schemeClr>
+          </a:lnRef>
+          <a:fillRef idx="1">
+            <a:schemeClr val="accent1"/>
+          </a:fillRef>
+          <a:effectRef idx="0">
+            <a:schemeClr val="accent1"/>
+          </a:effectRef>
+          <a:fontRef idx="minor">
+            <a:schemeClr val="lt1"/>
+          </a:fontRef>
+        </p:style>
+        <p:txBody>
+          <a:bodyPr rtlCol="0" anchor="ctr"/>
+          <a:lstStyle/>
+          <a:p>
+            <a:pPr algn="ctr"/>
+            <a:endParaRPr lang="en-US" dirty="0"/>
+          </a:p>
+        </p:txBody>
+      </p:sp>
+      <p:sp>
+        <p:nvSpPr>
+          <p:cNvPr id="44" name="Oval 43">
+            <a:extLst>
+              <a:ext uri="{FF2B5EF4-FFF2-40B4-BE49-F238E27FC236}">
+                <a16:creationId xmlns:a16="http://schemas.microsoft.com/office/drawing/2014/main" id="{DBBDE434-DFD6-2E00-0103-F1F03D67A344}"/>
+              </a:ext>
+            </a:extLst>
+          </p:cNvPr>
+          <p:cNvSpPr/>
+          <p:nvPr/>
+        </p:nvSpPr>
+        <p:spPr>
+          <a:xfrm>
+            <a:off x="3108624" y="16050215"/>
+            <a:ext cx="852341" cy="852341"/>
+          </a:xfrm>
+          <a:prstGeom prst="ellipse">
+            <a:avLst/>
+          </a:prstGeom>
+          <a:solidFill>
+            <a:schemeClr val="tx1"/>
+          </a:solidFill>
+          <a:ln>
+            <a:solidFill>
+              <a:schemeClr val="tx1"/>
+            </a:solidFill>
+          </a:ln>
+        </p:spPr>
+        <p:style>
+          <a:lnRef idx="2">
+            <a:schemeClr val="accent1">
+              <a:shade val="15000"/>
+            </a:schemeClr>
+          </a:lnRef>
+          <a:fillRef idx="1">
+            <a:schemeClr val="accent1"/>
+          </a:fillRef>
+          <a:effectRef idx="0">
+            <a:schemeClr val="accent1"/>
+          </a:effectRef>
+          <a:fontRef idx="minor">
+            <a:schemeClr val="lt1"/>
+          </a:fontRef>
+        </p:style>
+        <p:txBody>
+          <a:bodyPr rtlCol="0" anchor="ctr"/>
+          <a:lstStyle/>
+          <a:p>
+            <a:pPr algn="ctr"/>
+            <a:endParaRPr lang="en-US"/>
+          </a:p>
+        </p:txBody>
+      </p:sp>
+      <p:cxnSp>
+        <p:nvCxnSpPr>
+          <p:cNvPr id="45" name="Straight Arrow Connector 44">
+            <a:extLst>
+              <a:ext uri="{FF2B5EF4-FFF2-40B4-BE49-F238E27FC236}">
+                <a16:creationId xmlns:a16="http://schemas.microsoft.com/office/drawing/2014/main" id="{0220C2CB-6171-5FCF-24DF-7A36E4A5B90F}"/>
+              </a:ext>
+            </a:extLst>
+          </p:cNvPr>
+          <p:cNvCxnSpPr>
+            <a:cxnSpLocks/>
+          </p:cNvCxnSpPr>
+          <p:nvPr/>
+        </p:nvCxnSpPr>
+        <p:spPr>
+          <a:xfrm>
+            <a:off x="8849188" y="7367224"/>
+            <a:ext cx="840921" cy="0"/>
+          </a:xfrm>
+          <a:prstGeom prst="straightConnector1">
+            <a:avLst/>
+          </a:prstGeom>
+          <a:ln>
+            <a:solidFill>
+              <a:schemeClr val="tx1"/>
+            </a:solidFill>
+            <a:prstDash val="sysDash"/>
+            <a:tailEnd type="triangle"/>
+          </a:ln>
+        </p:spPr>
+        <p:style>
+          <a:lnRef idx="2">
+            <a:schemeClr val="accent1"/>
+          </a:lnRef>
+          <a:fillRef idx="0">
+            <a:schemeClr val="accent1"/>
+          </a:fillRef>
+          <a:effectRef idx="1">
+            <a:schemeClr val="accent1"/>
+          </a:effectRef>
+          <a:fontRef idx="minor">
+            <a:schemeClr val="tx1"/>
+          </a:fontRef>
+        </p:style>
+      </p:cxnSp>
+      <p:cxnSp>
+        <p:nvCxnSpPr>
+          <p:cNvPr id="46" name="Straight Arrow Connector 45">
+            <a:extLst>
+              <a:ext uri="{FF2B5EF4-FFF2-40B4-BE49-F238E27FC236}">
+                <a16:creationId xmlns:a16="http://schemas.microsoft.com/office/drawing/2014/main" id="{FD60C645-4727-EB4D-6ECF-3E2E3CF8E17E}"/>
+              </a:ext>
+            </a:extLst>
+          </p:cNvPr>
+          <p:cNvCxnSpPr>
+            <a:cxnSpLocks/>
+          </p:cNvCxnSpPr>
+          <p:nvPr/>
+        </p:nvCxnSpPr>
+        <p:spPr>
+          <a:xfrm flipH="1">
+            <a:off x="8885292" y="7609271"/>
+            <a:ext cx="850169" cy="0"/>
+          </a:xfrm>
+          <a:prstGeom prst="straightConnector1">
+            <a:avLst/>
+          </a:prstGeom>
+          <a:ln>
+            <a:solidFill>
+              <a:schemeClr val="tx1"/>
+            </a:solidFill>
+            <a:prstDash val="sysDash"/>
+            <a:tailEnd type="triangle"/>
+          </a:ln>
+        </p:spPr>
+        <p:style>
+          <a:lnRef idx="2">
+            <a:schemeClr val="accent1"/>
+          </a:lnRef>
+          <a:fillRef idx="0">
+            <a:schemeClr val="accent1"/>
+          </a:fillRef>
+          <a:effectRef idx="1">
+            <a:schemeClr val="accent1"/>
+          </a:effectRef>
+          <a:fontRef idx="minor">
+            <a:schemeClr val="tx1"/>
+          </a:fontRef>
+        </p:style>
+      </p:cxnSp>
+      <p:grpSp>
+        <p:nvGrpSpPr>
+          <p:cNvPr id="47" name="Group 46">
+            <a:extLst>
+              <a:ext uri="{FF2B5EF4-FFF2-40B4-BE49-F238E27FC236}">
+                <a16:creationId xmlns:a16="http://schemas.microsoft.com/office/drawing/2014/main" id="{408A7484-BC63-A1C4-C142-EF376B043A91}"/>
+              </a:ext>
+            </a:extLst>
+          </p:cNvPr>
+          <p:cNvGrpSpPr/>
+          <p:nvPr/>
+        </p:nvGrpSpPr>
+        <p:grpSpPr>
+          <a:xfrm>
+            <a:off x="4669098" y="5928652"/>
+            <a:ext cx="4991999" cy="1558309"/>
+            <a:chOff x="2498104" y="1876424"/>
+            <a:chExt cx="4991999" cy="1558309"/>
+          </a:xfrm>
+        </p:grpSpPr>
+        <p:sp>
+          <p:nvSpPr>
+            <p:cNvPr id="48" name="Freeform: Shape 47">
+              <a:extLst>
+                <a:ext uri="{FF2B5EF4-FFF2-40B4-BE49-F238E27FC236}">
+                  <a16:creationId xmlns:a16="http://schemas.microsoft.com/office/drawing/2014/main" id="{7C539950-85B1-0E2C-A771-6A99C76FAC45}"/>
+                </a:ext>
+              </a:extLst>
+            </p:cNvPr>
+            <p:cNvSpPr/>
+            <p:nvPr/>
+          </p:nvSpPr>
+          <p:spPr>
+            <a:xfrm>
+              <a:off x="3621518" y="1876424"/>
+              <a:ext cx="2590743" cy="1555621"/>
+            </a:xfrm>
+            <a:custGeom>
+              <a:avLst/>
+              <a:gdLst>
+                <a:gd name="csX0" fmla="*/ 0 w 1932495"/>
+                <a:gd name="csY0" fmla="*/ 1470779 h 1555621"/>
+                <a:gd name="csX1" fmla="*/ 942680 w 1932495"/>
+                <a:gd name="csY1" fmla="*/ 198 h 1555621"/>
+                <a:gd name="csX2" fmla="*/ 1932495 w 1932495"/>
+                <a:gd name="csY2" fmla="*/ 1555621 h 1555621"/>
+              </a:gdLst>
+              <a:ahLst/>
+              <a:cxnLst>
+                <a:cxn ang="0">
+                  <a:pos x="csX0" y="csY0"/>
+                </a:cxn>
+                <a:cxn ang="0">
+                  <a:pos x="csX1" y="csY1"/>
+                </a:cxn>
+                <a:cxn ang="0">
+                  <a:pos x="csX2" y="csY2"/>
+                </a:cxn>
+              </a:cxnLst>
+              <a:rect l="l" t="t" r="r" b="b"/>
+              <a:pathLst>
+                <a:path w="1932495" h="1555621">
+                  <a:moveTo>
+                    <a:pt x="0" y="1470779"/>
+                  </a:moveTo>
+                  <a:cubicBezTo>
+                    <a:pt x="310299" y="728418"/>
+                    <a:pt x="620598" y="-13942"/>
+                    <a:pt x="942680" y="198"/>
+                  </a:cubicBezTo>
+                  <a:cubicBezTo>
+                    <a:pt x="1264763" y="14338"/>
+                    <a:pt x="1598629" y="784979"/>
+                    <a:pt x="1932495" y="1555621"/>
+                  </a:cubicBezTo>
+                </a:path>
+              </a:pathLst>
+            </a:custGeom>
+            <a:noFill/>
+          </p:spPr>
+          <p:style>
+            <a:lnRef idx="2">
+              <a:schemeClr val="accent1">
+                <a:shade val="15000"/>
+              </a:schemeClr>
+            </a:lnRef>
+            <a:fillRef idx="1">
+              <a:schemeClr val="accent1"/>
+            </a:fillRef>
+            <a:effectRef idx="0">
+              <a:schemeClr val="accent1"/>
+            </a:effectRef>
+            <a:fontRef idx="minor">
+              <a:schemeClr val="lt1"/>
+            </a:fontRef>
+          </p:style>
+          <p:txBody>
+            <a:bodyPr rtlCol="0" anchor="ctr"/>
+            <a:lstStyle/>
+            <a:p>
+              <a:pPr algn="ctr"/>
+              <a:endParaRPr lang="en-US"/>
+            </a:p>
+          </p:txBody>
+        </p:sp>
+        <p:cxnSp>
+          <p:nvCxnSpPr>
+            <p:cNvPr id="49" name="Straight Connector 48">
+              <a:extLst>
+                <a:ext uri="{FF2B5EF4-FFF2-40B4-BE49-F238E27FC236}">
+                  <a16:creationId xmlns:a16="http://schemas.microsoft.com/office/drawing/2014/main" id="{C51D9DB2-EC2A-330E-3C81-0EF648FF5365}"/>
+                </a:ext>
+              </a:extLst>
+            </p:cNvPr>
+            <p:cNvCxnSpPr>
+              <a:cxnSpLocks/>
+            </p:cNvCxnSpPr>
+            <p:nvPr/>
+          </p:nvCxnSpPr>
+          <p:spPr>
+            <a:xfrm>
+              <a:off x="6210095" y="3434733"/>
+              <a:ext cx="1280008" cy="0"/>
+            </a:xfrm>
+            <a:prstGeom prst="line">
+              <a:avLst/>
+            </a:prstGeom>
+          </p:spPr>
+          <p:style>
+            <a:lnRef idx="2">
+              <a:schemeClr val="dk1"/>
+            </a:lnRef>
+            <a:fillRef idx="0">
+              <a:schemeClr val="dk1"/>
+            </a:fillRef>
+            <a:effectRef idx="1">
+              <a:schemeClr val="dk1"/>
+            </a:effectRef>
+            <a:fontRef idx="minor">
+              <a:schemeClr val="tx1"/>
+            </a:fontRef>
+          </p:style>
+        </p:cxnSp>
+        <p:cxnSp>
+          <p:nvCxnSpPr>
+            <p:cNvPr id="50" name="Straight Arrow Connector 49">
+              <a:extLst>
+                <a:ext uri="{FF2B5EF4-FFF2-40B4-BE49-F238E27FC236}">
+                  <a16:creationId xmlns:a16="http://schemas.microsoft.com/office/drawing/2014/main" id="{01CC8D1B-17A5-D1F6-3DBA-F66576EE75A2}"/>
+                </a:ext>
+              </a:extLst>
+            </p:cNvPr>
+            <p:cNvCxnSpPr>
+              <a:cxnSpLocks/>
+              <a:stCxn id="48" idx="0"/>
+            </p:cNvCxnSpPr>
+            <p:nvPr/>
+          </p:nvCxnSpPr>
+          <p:spPr>
+            <a:xfrm flipH="1" flipV="1">
+              <a:off x="2498104" y="3327032"/>
+              <a:ext cx="1123414" cy="20171"/>
+            </a:xfrm>
+            <a:prstGeom prst="straightConnector1">
+              <a:avLst/>
+            </a:prstGeom>
+            <a:ln>
+              <a:tailEnd type="triangle"/>
+            </a:ln>
+          </p:spPr>
+          <p:style>
+            <a:lnRef idx="2">
+              <a:schemeClr val="dk1"/>
+            </a:lnRef>
+            <a:fillRef idx="0">
+              <a:schemeClr val="dk1"/>
+            </a:fillRef>
+            <a:effectRef idx="1">
+              <a:schemeClr val="dk1"/>
+            </a:effectRef>
+            <a:fontRef idx="minor">
+              <a:schemeClr val="tx1"/>
+            </a:fontRef>
+          </p:style>
+        </p:cxnSp>
+      </p:grpSp>
+      <p:sp>
+        <p:nvSpPr>
+          <p:cNvPr id="51" name="Oval 50">
+            <a:extLst>
+              <a:ext uri="{FF2B5EF4-FFF2-40B4-BE49-F238E27FC236}">
+                <a16:creationId xmlns:a16="http://schemas.microsoft.com/office/drawing/2014/main" id="{F8A2CF17-42AE-B346-49C5-54E751235C5E}"/>
+              </a:ext>
+            </a:extLst>
+          </p:cNvPr>
+          <p:cNvSpPr/>
+          <p:nvPr/>
+        </p:nvSpPr>
+        <p:spPr>
+          <a:xfrm>
+            <a:off x="8092049" y="7236783"/>
+            <a:ext cx="565608" cy="565608"/>
+          </a:xfrm>
+          <a:prstGeom prst="ellipse">
+            <a:avLst/>
+          </a:prstGeom>
+          <a:noFill/>
+          <a:ln>
+            <a:solidFill>
+              <a:schemeClr val="tx1"/>
+            </a:solidFill>
+            <a:prstDash val="sysDash"/>
+          </a:ln>
+        </p:spPr>
+        <p:style>
+          <a:lnRef idx="2">
+            <a:schemeClr val="accent1">
+              <a:shade val="15000"/>
+            </a:schemeClr>
+          </a:lnRef>
+          <a:fillRef idx="1">
+            <a:schemeClr val="accent1"/>
+          </a:fillRef>
+          <a:effectRef idx="0">
+            <a:schemeClr val="accent1"/>
+          </a:effectRef>
+          <a:fontRef idx="minor">
+            <a:schemeClr val="lt1"/>
+          </a:fontRef>
+        </p:style>
+        <p:txBody>
+          <a:bodyPr rtlCol="0" anchor="ctr"/>
+          <a:lstStyle/>
+          <a:p>
+            <a:pPr algn="ctr"/>
+            <a:endParaRPr lang="en-US" dirty="0"/>
+          </a:p>
+        </p:txBody>
+      </p:sp>
+      <p:sp>
+        <p:nvSpPr>
+          <p:cNvPr id="52" name="Rectangle 51">
+            <a:extLst>
+              <a:ext uri="{FF2B5EF4-FFF2-40B4-BE49-F238E27FC236}">
+                <a16:creationId xmlns:a16="http://schemas.microsoft.com/office/drawing/2014/main" id="{3C0C19C8-FA5D-82DE-4DE1-A2373C4D2DD8}"/>
+              </a:ext>
+            </a:extLst>
+          </p:cNvPr>
+          <p:cNvSpPr/>
+          <p:nvPr/>
+        </p:nvSpPr>
+        <p:spPr>
+          <a:xfrm>
+            <a:off x="6599562" y="6271100"/>
+            <a:ext cx="896323" cy="1536568"/>
+          </a:xfrm>
+          <a:prstGeom prst="rect">
+            <a:avLst/>
+          </a:prstGeom>
+          <a:solidFill>
+            <a:schemeClr val="tx1"/>
+          </a:solidFill>
+          <a:ln>
+            <a:solidFill>
+              <a:schemeClr val="tx1"/>
+            </a:solidFill>
+          </a:ln>
+        </p:spPr>
+        <p:style>
+          <a:lnRef idx="2">
+            <a:schemeClr val="accent1">
+              <a:shade val="15000"/>
+            </a:schemeClr>
+          </a:lnRef>
+          <a:fillRef idx="1">
+            <a:schemeClr val="accent1"/>
+          </a:fillRef>
+          <a:effectRef idx="0">
+            <a:schemeClr val="accent1"/>
+          </a:effectRef>
+          <a:fontRef idx="minor">
+            <a:schemeClr val="lt1"/>
+          </a:fontRef>
+        </p:style>
+        <p:txBody>
+          <a:bodyPr rtlCol="0" anchor="ctr"/>
+          <a:lstStyle/>
+          <a:p>
+            <a:pPr algn="ctr"/>
+            <a:endParaRPr lang="en-US"/>
+          </a:p>
+        </p:txBody>
+      </p:sp>
+      <p:cxnSp>
+        <p:nvCxnSpPr>
+          <p:cNvPr id="53" name="Straight Connector 52">
+            <a:extLst>
+              <a:ext uri="{FF2B5EF4-FFF2-40B4-BE49-F238E27FC236}">
+                <a16:creationId xmlns:a16="http://schemas.microsoft.com/office/drawing/2014/main" id="{58D89349-8C37-DF43-3E2E-B7356C933CD1}"/>
+              </a:ext>
+            </a:extLst>
+          </p:cNvPr>
+          <p:cNvCxnSpPr>
+            <a:cxnSpLocks/>
+          </p:cNvCxnSpPr>
+          <p:nvPr/>
+        </p:nvCxnSpPr>
+        <p:spPr>
+          <a:xfrm>
+            <a:off x="2482684" y="7812944"/>
+            <a:ext cx="9366342" cy="0"/>
+          </a:xfrm>
+          <a:prstGeom prst="line">
+            <a:avLst/>
+          </a:prstGeom>
+          <a:ln>
+            <a:solidFill>
+              <a:schemeClr val="tx1"/>
+            </a:solidFill>
+          </a:ln>
+        </p:spPr>
+        <p:style>
+          <a:lnRef idx="2">
+            <a:schemeClr val="accent1"/>
+          </a:lnRef>
+          <a:fillRef idx="0">
+            <a:schemeClr val="accent1"/>
+          </a:fillRef>
+          <a:effectRef idx="1">
+            <a:schemeClr val="accent1"/>
+          </a:effectRef>
+          <a:fontRef idx="minor">
+            <a:schemeClr val="tx1"/>
+          </a:fontRef>
+        </p:style>
+      </p:cxnSp>
+      <p:sp>
+        <p:nvSpPr>
+          <p:cNvPr id="54" name="Oval 53">
+            <a:extLst>
+              <a:ext uri="{FF2B5EF4-FFF2-40B4-BE49-F238E27FC236}">
+                <a16:creationId xmlns:a16="http://schemas.microsoft.com/office/drawing/2014/main" id="{136B7D92-37D6-4EAB-9042-CE444BDE1929}"/>
+              </a:ext>
+            </a:extLst>
+          </p:cNvPr>
+          <p:cNvSpPr/>
+          <p:nvPr/>
+        </p:nvSpPr>
+        <p:spPr>
+          <a:xfrm>
+            <a:off x="9921116" y="10244748"/>
+            <a:ext cx="565608" cy="565608"/>
+          </a:xfrm>
+          <a:prstGeom prst="ellipse">
+            <a:avLst/>
+          </a:prstGeom>
+          <a:solidFill>
+            <a:schemeClr val="tx1"/>
+          </a:solidFill>
+          <a:ln>
+            <a:solidFill>
+              <a:schemeClr val="tx1"/>
+            </a:solidFill>
+          </a:ln>
+        </p:spPr>
+        <p:style>
+          <a:lnRef idx="2">
+            <a:schemeClr val="accent1">
+              <a:shade val="15000"/>
+            </a:schemeClr>
+          </a:lnRef>
+          <a:fillRef idx="1">
+            <a:schemeClr val="accent1"/>
+          </a:fillRef>
+          <a:effectRef idx="0">
+            <a:schemeClr val="accent1"/>
+          </a:effectRef>
+          <a:fontRef idx="minor">
+            <a:schemeClr val="lt1"/>
+          </a:fontRef>
+        </p:style>
+        <p:txBody>
+          <a:bodyPr rtlCol="0" anchor="ctr"/>
+          <a:lstStyle/>
+          <a:p>
+            <a:pPr algn="ctr"/>
+            <a:endParaRPr lang="en-US" dirty="0"/>
+          </a:p>
+        </p:txBody>
+      </p:sp>
+      <p:sp>
+        <p:nvSpPr>
+          <p:cNvPr id="55" name="Oval 54">
+            <a:extLst>
+              <a:ext uri="{FF2B5EF4-FFF2-40B4-BE49-F238E27FC236}">
+                <a16:creationId xmlns:a16="http://schemas.microsoft.com/office/drawing/2014/main" id="{AF1C9414-88AA-E3C2-C562-989FFB9DF8EB}"/>
+              </a:ext>
+            </a:extLst>
+          </p:cNvPr>
+          <p:cNvSpPr/>
+          <p:nvPr/>
+        </p:nvSpPr>
+        <p:spPr>
+          <a:xfrm>
+            <a:off x="6755478" y="8679348"/>
+            <a:ext cx="565608" cy="565608"/>
+          </a:xfrm>
+          <a:prstGeom prst="ellipse">
+            <a:avLst/>
+          </a:prstGeom>
+          <a:noFill/>
+          <a:ln>
+            <a:solidFill>
+              <a:schemeClr val="tx1"/>
+            </a:solidFill>
+            <a:prstDash val="sysDash"/>
+          </a:ln>
+        </p:spPr>
+        <p:style>
+          <a:lnRef idx="2">
+            <a:schemeClr val="accent1">
+              <a:shade val="15000"/>
+            </a:schemeClr>
+          </a:lnRef>
+          <a:fillRef idx="1">
+            <a:schemeClr val="accent1"/>
+          </a:fillRef>
+          <a:effectRef idx="0">
+            <a:schemeClr val="accent1"/>
+          </a:effectRef>
+          <a:fontRef idx="minor">
+            <a:schemeClr val="lt1"/>
+          </a:fontRef>
+        </p:style>
+        <p:txBody>
+          <a:bodyPr rtlCol="0" anchor="ctr"/>
+          <a:lstStyle/>
+          <a:p>
+            <a:pPr algn="ctr"/>
+            <a:endParaRPr lang="en-US" dirty="0"/>
+          </a:p>
+        </p:txBody>
+      </p:sp>
+      <p:cxnSp>
+        <p:nvCxnSpPr>
+          <p:cNvPr id="56" name="Straight Connector 55">
+            <a:extLst>
+              <a:ext uri="{FF2B5EF4-FFF2-40B4-BE49-F238E27FC236}">
+                <a16:creationId xmlns:a16="http://schemas.microsoft.com/office/drawing/2014/main" id="{C389ABC6-3B53-0180-6610-A00996160B17}"/>
+              </a:ext>
+            </a:extLst>
+          </p:cNvPr>
+          <p:cNvCxnSpPr>
+            <a:cxnSpLocks/>
+          </p:cNvCxnSpPr>
+          <p:nvPr/>
+        </p:nvCxnSpPr>
+        <p:spPr>
+          <a:xfrm>
+            <a:off x="2481618" y="10827065"/>
+            <a:ext cx="9366342" cy="0"/>
+          </a:xfrm>
+          <a:prstGeom prst="line">
+            <a:avLst/>
+          </a:prstGeom>
+          <a:ln>
+            <a:solidFill>
+              <a:schemeClr val="tx1"/>
+            </a:solidFill>
+          </a:ln>
+        </p:spPr>
+        <p:style>
+          <a:lnRef idx="2">
+            <a:schemeClr val="accent1"/>
+          </a:lnRef>
+          <a:fillRef idx="0">
+            <a:schemeClr val="accent1"/>
+          </a:fillRef>
+          <a:effectRef idx="1">
+            <a:schemeClr val="accent1"/>
+          </a:effectRef>
+          <a:fontRef idx="minor">
+            <a:schemeClr val="tx1"/>
+          </a:fontRef>
+        </p:style>
+      </p:cxnSp>
+      <p:sp>
+        <p:nvSpPr>
+          <p:cNvPr id="57" name="Oval 56">
+            <a:extLst>
+              <a:ext uri="{FF2B5EF4-FFF2-40B4-BE49-F238E27FC236}">
+                <a16:creationId xmlns:a16="http://schemas.microsoft.com/office/drawing/2014/main" id="{BB26B3BF-382F-53BD-9294-9506852654E6}"/>
+              </a:ext>
+            </a:extLst>
+          </p:cNvPr>
+          <p:cNvSpPr/>
+          <p:nvPr/>
+        </p:nvSpPr>
+        <p:spPr>
+          <a:xfrm>
+            <a:off x="9938230" y="13266986"/>
+            <a:ext cx="565608" cy="565608"/>
+          </a:xfrm>
+          <a:prstGeom prst="ellipse">
+            <a:avLst/>
+          </a:prstGeom>
+          <a:solidFill>
+            <a:schemeClr val="tx1"/>
+          </a:solidFill>
+          <a:ln>
+            <a:solidFill>
+              <a:schemeClr val="tx1"/>
+            </a:solidFill>
+          </a:ln>
+        </p:spPr>
+        <p:style>
+          <a:lnRef idx="2">
+            <a:schemeClr val="accent1">
+              <a:shade val="15000"/>
+            </a:schemeClr>
+          </a:lnRef>
+          <a:fillRef idx="1">
+            <a:schemeClr val="accent1"/>
+          </a:fillRef>
+          <a:effectRef idx="0">
+            <a:schemeClr val="accent1"/>
+          </a:effectRef>
+          <a:fontRef idx="minor">
+            <a:schemeClr val="lt1"/>
+          </a:fontRef>
+        </p:style>
+        <p:txBody>
+          <a:bodyPr rtlCol="0" anchor="ctr"/>
+          <a:lstStyle/>
+          <a:p>
+            <a:pPr algn="ctr"/>
+            <a:endParaRPr lang="en-US" dirty="0"/>
+          </a:p>
+        </p:txBody>
+      </p:sp>
+      <p:cxnSp>
+        <p:nvCxnSpPr>
+          <p:cNvPr id="58" name="Straight Arrow Connector 57">
+            <a:extLst>
+              <a:ext uri="{FF2B5EF4-FFF2-40B4-BE49-F238E27FC236}">
+                <a16:creationId xmlns:a16="http://schemas.microsoft.com/office/drawing/2014/main" id="{D1F2C12E-37D8-CC46-0976-2924D22B20BF}"/>
+              </a:ext>
+            </a:extLst>
+          </p:cNvPr>
+          <p:cNvCxnSpPr>
+            <a:cxnSpLocks/>
+          </p:cNvCxnSpPr>
+          <p:nvPr/>
+        </p:nvCxnSpPr>
+        <p:spPr>
+          <a:xfrm>
+            <a:off x="8865236" y="13403583"/>
+            <a:ext cx="840921" cy="0"/>
+          </a:xfrm>
+          <a:prstGeom prst="straightConnector1">
+            <a:avLst/>
+          </a:prstGeom>
+          <a:ln>
+            <a:solidFill>
+              <a:schemeClr val="tx1"/>
+            </a:solidFill>
+            <a:prstDash val="sysDash"/>
+            <a:tailEnd type="triangle"/>
+          </a:ln>
+        </p:spPr>
+        <p:style>
+          <a:lnRef idx="2">
+            <a:schemeClr val="accent1"/>
+          </a:lnRef>
+          <a:fillRef idx="0">
+            <a:schemeClr val="accent1"/>
+          </a:fillRef>
+          <a:effectRef idx="1">
+            <a:schemeClr val="accent1"/>
+          </a:effectRef>
+          <a:fontRef idx="minor">
+            <a:schemeClr val="tx1"/>
+          </a:fontRef>
+        </p:style>
+      </p:cxnSp>
+      <p:cxnSp>
+        <p:nvCxnSpPr>
+          <p:cNvPr id="59" name="Straight Arrow Connector 58">
+            <a:extLst>
+              <a:ext uri="{FF2B5EF4-FFF2-40B4-BE49-F238E27FC236}">
+                <a16:creationId xmlns:a16="http://schemas.microsoft.com/office/drawing/2014/main" id="{F57D05E1-C450-5ABA-0811-86CCD7AE67AB}"/>
+              </a:ext>
+            </a:extLst>
+          </p:cNvPr>
+          <p:cNvCxnSpPr>
+            <a:cxnSpLocks/>
+          </p:cNvCxnSpPr>
+          <p:nvPr/>
+        </p:nvCxnSpPr>
+        <p:spPr>
+          <a:xfrm flipH="1">
+            <a:off x="8901340" y="13645630"/>
+            <a:ext cx="850169" cy="0"/>
+          </a:xfrm>
+          <a:prstGeom prst="straightConnector1">
+            <a:avLst/>
+          </a:prstGeom>
+          <a:ln>
+            <a:solidFill>
+              <a:schemeClr val="tx1"/>
+            </a:solidFill>
+            <a:prstDash val="sysDash"/>
+            <a:tailEnd type="triangle"/>
+          </a:ln>
+        </p:spPr>
+        <p:style>
+          <a:lnRef idx="2">
+            <a:schemeClr val="accent1"/>
+          </a:lnRef>
+          <a:fillRef idx="0">
+            <a:schemeClr val="accent1"/>
+          </a:fillRef>
+          <a:effectRef idx="1">
+            <a:schemeClr val="accent1"/>
+          </a:effectRef>
+          <a:fontRef idx="minor">
+            <a:schemeClr val="tx1"/>
+          </a:fontRef>
+        </p:style>
+      </p:cxnSp>
+      <p:grpSp>
+        <p:nvGrpSpPr>
+          <p:cNvPr id="60" name="Group 59">
+            <a:extLst>
+              <a:ext uri="{FF2B5EF4-FFF2-40B4-BE49-F238E27FC236}">
+                <a16:creationId xmlns:a16="http://schemas.microsoft.com/office/drawing/2014/main" id="{BCDB637C-2E7B-8AF4-2177-CA62DE6DBD27}"/>
+              </a:ext>
+            </a:extLst>
+          </p:cNvPr>
+          <p:cNvGrpSpPr/>
+          <p:nvPr/>
+        </p:nvGrpSpPr>
+        <p:grpSpPr>
+          <a:xfrm>
+            <a:off x="4685146" y="11965011"/>
+            <a:ext cx="4991999" cy="1558309"/>
+            <a:chOff x="2498104" y="1876424"/>
+            <a:chExt cx="4991999" cy="1558309"/>
+          </a:xfrm>
+        </p:grpSpPr>
+        <p:sp>
+          <p:nvSpPr>
+            <p:cNvPr id="61" name="Freeform: Shape 60">
+              <a:extLst>
+                <a:ext uri="{FF2B5EF4-FFF2-40B4-BE49-F238E27FC236}">
+                  <a16:creationId xmlns:a16="http://schemas.microsoft.com/office/drawing/2014/main" id="{9DFAB113-BF15-9A1A-2836-EC11790BB630}"/>
+                </a:ext>
+              </a:extLst>
+            </p:cNvPr>
+            <p:cNvSpPr/>
+            <p:nvPr/>
+          </p:nvSpPr>
+          <p:spPr>
+            <a:xfrm>
+              <a:off x="3621518" y="1876424"/>
+              <a:ext cx="2590743" cy="1555621"/>
+            </a:xfrm>
+            <a:custGeom>
+              <a:avLst/>
+              <a:gdLst>
+                <a:gd name="csX0" fmla="*/ 0 w 1932495"/>
+                <a:gd name="csY0" fmla="*/ 1470779 h 1555621"/>
+                <a:gd name="csX1" fmla="*/ 942680 w 1932495"/>
+                <a:gd name="csY1" fmla="*/ 198 h 1555621"/>
+                <a:gd name="csX2" fmla="*/ 1932495 w 1932495"/>
+                <a:gd name="csY2" fmla="*/ 1555621 h 1555621"/>
+              </a:gdLst>
+              <a:ahLst/>
+              <a:cxnLst>
+                <a:cxn ang="0">
+                  <a:pos x="csX0" y="csY0"/>
+                </a:cxn>
+                <a:cxn ang="0">
+                  <a:pos x="csX1" y="csY1"/>
+                </a:cxn>
+                <a:cxn ang="0">
+                  <a:pos x="csX2" y="csY2"/>
+                </a:cxn>
+              </a:cxnLst>
+              <a:rect l="l" t="t" r="r" b="b"/>
+              <a:pathLst>
+                <a:path w="1932495" h="1555621">
+                  <a:moveTo>
+                    <a:pt x="0" y="1470779"/>
+                  </a:moveTo>
+                  <a:cubicBezTo>
+                    <a:pt x="310299" y="728418"/>
+                    <a:pt x="620598" y="-13942"/>
+                    <a:pt x="942680" y="198"/>
+                  </a:cubicBezTo>
+                  <a:cubicBezTo>
+                    <a:pt x="1264763" y="14338"/>
+                    <a:pt x="1598629" y="784979"/>
+                    <a:pt x="1932495" y="1555621"/>
+                  </a:cubicBezTo>
+                </a:path>
+              </a:pathLst>
+            </a:custGeom>
+            <a:noFill/>
+          </p:spPr>
+          <p:style>
+            <a:lnRef idx="2">
+              <a:schemeClr val="accent1">
+                <a:shade val="15000"/>
+              </a:schemeClr>
+            </a:lnRef>
+            <a:fillRef idx="1">
+              <a:schemeClr val="accent1"/>
+            </a:fillRef>
+            <a:effectRef idx="0">
+              <a:schemeClr val="accent1"/>
+            </a:effectRef>
+            <a:fontRef idx="minor">
+              <a:schemeClr val="lt1"/>
+            </a:fontRef>
+          </p:style>
+          <p:txBody>
+            <a:bodyPr rtlCol="0" anchor="ctr"/>
+            <a:lstStyle/>
+            <a:p>
+              <a:pPr algn="ctr"/>
+              <a:endParaRPr lang="en-US"/>
+            </a:p>
+          </p:txBody>
+        </p:sp>
+        <p:cxnSp>
+          <p:nvCxnSpPr>
+            <p:cNvPr id="62" name="Straight Connector 61">
+              <a:extLst>
+                <a:ext uri="{FF2B5EF4-FFF2-40B4-BE49-F238E27FC236}">
+                  <a16:creationId xmlns:a16="http://schemas.microsoft.com/office/drawing/2014/main" id="{4420B571-05AE-1850-99E9-8263A1E8F7CE}"/>
+                </a:ext>
+              </a:extLst>
+            </p:cNvPr>
+            <p:cNvCxnSpPr>
+              <a:cxnSpLocks/>
+            </p:cNvCxnSpPr>
+            <p:nvPr/>
+          </p:nvCxnSpPr>
+          <p:spPr>
+            <a:xfrm>
+              <a:off x="6210095" y="3434733"/>
+              <a:ext cx="1280008" cy="0"/>
+            </a:xfrm>
+            <a:prstGeom prst="line">
+              <a:avLst/>
+            </a:prstGeom>
+          </p:spPr>
+          <p:style>
+            <a:lnRef idx="2">
+              <a:schemeClr val="dk1"/>
+            </a:lnRef>
+            <a:fillRef idx="0">
+              <a:schemeClr val="dk1"/>
+            </a:fillRef>
+            <a:effectRef idx="1">
+              <a:schemeClr val="dk1"/>
+            </a:effectRef>
+            <a:fontRef idx="minor">
+              <a:schemeClr val="tx1"/>
+            </a:fontRef>
+          </p:style>
+        </p:cxnSp>
+        <p:cxnSp>
+          <p:nvCxnSpPr>
+            <p:cNvPr id="63" name="Straight Arrow Connector 62">
+              <a:extLst>
+                <a:ext uri="{FF2B5EF4-FFF2-40B4-BE49-F238E27FC236}">
+                  <a16:creationId xmlns:a16="http://schemas.microsoft.com/office/drawing/2014/main" id="{87AA566E-6FA0-7F64-0599-2B7B374B1152}"/>
+                </a:ext>
+              </a:extLst>
+            </p:cNvPr>
+            <p:cNvCxnSpPr>
+              <a:cxnSpLocks/>
+              <a:stCxn id="61" idx="0"/>
+            </p:cNvCxnSpPr>
+            <p:nvPr/>
+          </p:nvCxnSpPr>
+          <p:spPr>
+            <a:xfrm flipH="1" flipV="1">
+              <a:off x="2498104" y="3327032"/>
+              <a:ext cx="1123414" cy="20171"/>
+            </a:xfrm>
+            <a:prstGeom prst="straightConnector1">
+              <a:avLst/>
+            </a:prstGeom>
+            <a:ln>
+              <a:tailEnd type="triangle"/>
+            </a:ln>
+          </p:spPr>
+          <p:style>
+            <a:lnRef idx="2">
+              <a:schemeClr val="dk1"/>
+            </a:lnRef>
+            <a:fillRef idx="0">
+              <a:schemeClr val="dk1"/>
+            </a:fillRef>
+            <a:effectRef idx="1">
+              <a:schemeClr val="dk1"/>
+            </a:effectRef>
+            <a:fontRef idx="minor">
+              <a:schemeClr val="tx1"/>
+            </a:fontRef>
+          </p:style>
+        </p:cxnSp>
+      </p:grpSp>
+      <p:sp>
+        <p:nvSpPr>
+          <p:cNvPr id="64" name="Oval 63">
+            <a:extLst>
+              <a:ext uri="{FF2B5EF4-FFF2-40B4-BE49-F238E27FC236}">
+                <a16:creationId xmlns:a16="http://schemas.microsoft.com/office/drawing/2014/main" id="{3457A925-10D5-2B21-9F2F-6EA30885D027}"/>
+              </a:ext>
+            </a:extLst>
+          </p:cNvPr>
+          <p:cNvSpPr/>
+          <p:nvPr/>
+        </p:nvSpPr>
+        <p:spPr>
+          <a:xfrm>
+            <a:off x="5482904" y="13243533"/>
+            <a:ext cx="565608" cy="565608"/>
+          </a:xfrm>
+          <a:prstGeom prst="ellipse">
+            <a:avLst/>
+          </a:prstGeom>
+          <a:noFill/>
+          <a:ln>
+            <a:solidFill>
+              <a:schemeClr val="tx1"/>
+            </a:solidFill>
+            <a:prstDash val="sysDash"/>
+          </a:ln>
+        </p:spPr>
+        <p:style>
+          <a:lnRef idx="2">
+            <a:schemeClr val="accent1">
+              <a:shade val="15000"/>
+            </a:schemeClr>
+          </a:lnRef>
+          <a:fillRef idx="1">
+            <a:schemeClr val="accent1"/>
+          </a:fillRef>
+          <a:effectRef idx="0">
+            <a:schemeClr val="accent1"/>
+          </a:effectRef>
+          <a:fontRef idx="minor">
+            <a:schemeClr val="lt1"/>
+          </a:fontRef>
+        </p:style>
+        <p:txBody>
+          <a:bodyPr rtlCol="0" anchor="ctr"/>
+          <a:lstStyle/>
+          <a:p>
+            <a:pPr algn="ctr"/>
+            <a:endParaRPr lang="en-US" dirty="0"/>
+          </a:p>
+        </p:txBody>
+      </p:sp>
+      <p:cxnSp>
+        <p:nvCxnSpPr>
+          <p:cNvPr id="65" name="Straight Connector 64">
+            <a:extLst>
+              <a:ext uri="{FF2B5EF4-FFF2-40B4-BE49-F238E27FC236}">
+                <a16:creationId xmlns:a16="http://schemas.microsoft.com/office/drawing/2014/main" id="{8BEC0D07-524A-8098-483D-E242CAB5744F}"/>
+              </a:ext>
+            </a:extLst>
+          </p:cNvPr>
+          <p:cNvCxnSpPr>
+            <a:cxnSpLocks/>
+          </p:cNvCxnSpPr>
+          <p:nvPr/>
+        </p:nvCxnSpPr>
+        <p:spPr>
+          <a:xfrm>
+            <a:off x="2498732" y="13849303"/>
+            <a:ext cx="9366342" cy="0"/>
+          </a:xfrm>
+          <a:prstGeom prst="line">
+            <a:avLst/>
+          </a:prstGeom>
+          <a:ln>
+            <a:solidFill>
+              <a:schemeClr val="tx1"/>
+            </a:solidFill>
+          </a:ln>
+        </p:spPr>
+        <p:style>
+          <a:lnRef idx="2">
+            <a:schemeClr val="accent1"/>
+          </a:lnRef>
+          <a:fillRef idx="0">
+            <a:schemeClr val="accent1"/>
+          </a:fillRef>
+          <a:effectRef idx="1">
+            <a:schemeClr val="accent1"/>
+          </a:effectRef>
+          <a:fontRef idx="minor">
+            <a:schemeClr val="tx1"/>
+          </a:fontRef>
+        </p:style>
+      </p:cxnSp>
+      <p:sp>
+        <p:nvSpPr>
+          <p:cNvPr id="66" name="Oval 65">
+            <a:extLst>
+              <a:ext uri="{FF2B5EF4-FFF2-40B4-BE49-F238E27FC236}">
+                <a16:creationId xmlns:a16="http://schemas.microsoft.com/office/drawing/2014/main" id="{BD702EB9-15E9-769E-DE96-4A20D3D34779}"/>
+              </a:ext>
+            </a:extLst>
+          </p:cNvPr>
+          <p:cNvSpPr/>
+          <p:nvPr/>
+        </p:nvSpPr>
+        <p:spPr>
+          <a:xfrm>
+            <a:off x="9938230" y="16345794"/>
+            <a:ext cx="565608" cy="565608"/>
+          </a:xfrm>
+          <a:prstGeom prst="ellipse">
+            <a:avLst/>
+          </a:prstGeom>
+          <a:solidFill>
+            <a:schemeClr val="tx1"/>
+          </a:solidFill>
+          <a:ln>
+            <a:solidFill>
+              <a:schemeClr val="tx1"/>
+            </a:solidFill>
+          </a:ln>
+        </p:spPr>
+        <p:style>
+          <a:lnRef idx="2">
+            <a:schemeClr val="accent1">
+              <a:shade val="15000"/>
+            </a:schemeClr>
+          </a:lnRef>
+          <a:fillRef idx="1">
+            <a:schemeClr val="accent1"/>
+          </a:fillRef>
+          <a:effectRef idx="0">
+            <a:schemeClr val="accent1"/>
+          </a:effectRef>
+          <a:fontRef idx="minor">
+            <a:schemeClr val="lt1"/>
+          </a:fontRef>
+        </p:style>
+        <p:txBody>
+          <a:bodyPr rtlCol="0" anchor="ctr"/>
+          <a:lstStyle/>
+          <a:p>
+            <a:pPr algn="ctr"/>
+            <a:endParaRPr lang="en-US" dirty="0"/>
+          </a:p>
+        </p:txBody>
+      </p:sp>
+      <p:sp>
+        <p:nvSpPr>
+          <p:cNvPr id="67" name="Oval 66">
+            <a:extLst>
+              <a:ext uri="{FF2B5EF4-FFF2-40B4-BE49-F238E27FC236}">
+                <a16:creationId xmlns:a16="http://schemas.microsoft.com/office/drawing/2014/main" id="{C97CD54D-9521-1633-0DC4-F46AA63E9D09}"/>
+              </a:ext>
+            </a:extLst>
+          </p:cNvPr>
+          <p:cNvSpPr/>
+          <p:nvPr/>
+        </p:nvSpPr>
+        <p:spPr>
+          <a:xfrm>
+            <a:off x="3103521" y="12978975"/>
+            <a:ext cx="852341" cy="852341"/>
+          </a:xfrm>
+          <a:prstGeom prst="ellipse">
+            <a:avLst/>
+          </a:prstGeom>
+          <a:solidFill>
+            <a:schemeClr val="tx1"/>
+          </a:solidFill>
+          <a:ln>
+            <a:solidFill>
+              <a:schemeClr val="tx1"/>
+            </a:solidFill>
+          </a:ln>
+        </p:spPr>
+        <p:style>
+          <a:lnRef idx="2">
+            <a:schemeClr val="accent1">
+              <a:shade val="15000"/>
+            </a:schemeClr>
+          </a:lnRef>
+          <a:fillRef idx="1">
+            <a:schemeClr val="accent1"/>
+          </a:fillRef>
+          <a:effectRef idx="0">
+            <a:schemeClr val="accent1"/>
+          </a:effectRef>
+          <a:fontRef idx="minor">
+            <a:schemeClr val="lt1"/>
+          </a:fontRef>
+        </p:style>
+        <p:txBody>
+          <a:bodyPr rtlCol="0" anchor="ctr"/>
+          <a:lstStyle/>
+          <a:p>
+            <a:pPr algn="ctr"/>
+            <a:endParaRPr lang="en-US"/>
+          </a:p>
+        </p:txBody>
+      </p:sp>
+      <p:cxnSp>
+        <p:nvCxnSpPr>
+          <p:cNvPr id="68" name="Straight Arrow Connector 67">
+            <a:extLst>
+              <a:ext uri="{FF2B5EF4-FFF2-40B4-BE49-F238E27FC236}">
+                <a16:creationId xmlns:a16="http://schemas.microsoft.com/office/drawing/2014/main" id="{4E7B5B61-A177-D211-80C5-6E33C4B556FB}"/>
+              </a:ext>
+            </a:extLst>
+          </p:cNvPr>
+          <p:cNvCxnSpPr>
+            <a:cxnSpLocks/>
+          </p:cNvCxnSpPr>
+          <p:nvPr/>
+        </p:nvCxnSpPr>
+        <p:spPr>
+          <a:xfrm>
+            <a:off x="8865236" y="16482391"/>
+            <a:ext cx="840921" cy="0"/>
+          </a:xfrm>
+          <a:prstGeom prst="straightConnector1">
+            <a:avLst/>
+          </a:prstGeom>
+          <a:ln>
+            <a:solidFill>
+              <a:schemeClr val="tx1"/>
+            </a:solidFill>
+            <a:prstDash val="sysDash"/>
+            <a:tailEnd type="triangle"/>
+          </a:ln>
+        </p:spPr>
+        <p:style>
+          <a:lnRef idx="2">
+            <a:schemeClr val="accent1"/>
+          </a:lnRef>
+          <a:fillRef idx="0">
+            <a:schemeClr val="accent1"/>
+          </a:fillRef>
+          <a:effectRef idx="1">
+            <a:schemeClr val="accent1"/>
+          </a:effectRef>
+          <a:fontRef idx="minor">
+            <a:schemeClr val="tx1"/>
+          </a:fontRef>
+        </p:style>
+      </p:cxnSp>
+      <p:cxnSp>
+        <p:nvCxnSpPr>
+          <p:cNvPr id="69" name="Straight Arrow Connector 68">
+            <a:extLst>
+              <a:ext uri="{FF2B5EF4-FFF2-40B4-BE49-F238E27FC236}">
+                <a16:creationId xmlns:a16="http://schemas.microsoft.com/office/drawing/2014/main" id="{4891D790-3330-6999-4E39-21E66D289AB6}"/>
+              </a:ext>
+            </a:extLst>
+          </p:cNvPr>
+          <p:cNvCxnSpPr>
+            <a:cxnSpLocks/>
+          </p:cNvCxnSpPr>
+          <p:nvPr/>
+        </p:nvCxnSpPr>
+        <p:spPr>
+          <a:xfrm flipH="1">
+            <a:off x="8901340" y="16724438"/>
+            <a:ext cx="850169" cy="0"/>
+          </a:xfrm>
+          <a:prstGeom prst="straightConnector1">
+            <a:avLst/>
+          </a:prstGeom>
+          <a:ln>
+            <a:solidFill>
+              <a:schemeClr val="tx1"/>
+            </a:solidFill>
+            <a:prstDash val="sysDash"/>
+            <a:tailEnd type="triangle"/>
+          </a:ln>
+        </p:spPr>
+        <p:style>
+          <a:lnRef idx="2">
+            <a:schemeClr val="accent1"/>
+          </a:lnRef>
+          <a:fillRef idx="0">
+            <a:schemeClr val="accent1"/>
+          </a:fillRef>
+          <a:effectRef idx="1">
+            <a:schemeClr val="accent1"/>
+          </a:effectRef>
+          <a:fontRef idx="minor">
+            <a:schemeClr val="tx1"/>
+          </a:fontRef>
+        </p:style>
+      </p:cxnSp>
+      <p:grpSp>
+        <p:nvGrpSpPr>
+          <p:cNvPr id="70" name="Group 69">
+            <a:extLst>
+              <a:ext uri="{FF2B5EF4-FFF2-40B4-BE49-F238E27FC236}">
+                <a16:creationId xmlns:a16="http://schemas.microsoft.com/office/drawing/2014/main" id="{D4C0AA39-95B3-354F-179F-30C1EAF9EDE0}"/>
+              </a:ext>
+            </a:extLst>
+          </p:cNvPr>
+          <p:cNvGrpSpPr/>
+          <p:nvPr/>
+        </p:nvGrpSpPr>
+        <p:grpSpPr>
+          <a:xfrm>
+            <a:off x="4685146" y="15043819"/>
+            <a:ext cx="4991999" cy="1558309"/>
+            <a:chOff x="2498104" y="1876424"/>
+            <a:chExt cx="4991999" cy="1558309"/>
+          </a:xfrm>
+        </p:grpSpPr>
+        <p:sp>
+          <p:nvSpPr>
+            <p:cNvPr id="71" name="Freeform: Shape 70">
+              <a:extLst>
+                <a:ext uri="{FF2B5EF4-FFF2-40B4-BE49-F238E27FC236}">
+                  <a16:creationId xmlns:a16="http://schemas.microsoft.com/office/drawing/2014/main" id="{E2CF10AC-B550-38BA-0CAF-0C511D886433}"/>
+                </a:ext>
+              </a:extLst>
+            </p:cNvPr>
+            <p:cNvSpPr/>
+            <p:nvPr/>
+          </p:nvSpPr>
+          <p:spPr>
+            <a:xfrm>
+              <a:off x="3621518" y="1876424"/>
+              <a:ext cx="2590743" cy="1555621"/>
+            </a:xfrm>
+            <a:custGeom>
+              <a:avLst/>
+              <a:gdLst>
+                <a:gd name="csX0" fmla="*/ 0 w 1932495"/>
+                <a:gd name="csY0" fmla="*/ 1470779 h 1555621"/>
+                <a:gd name="csX1" fmla="*/ 942680 w 1932495"/>
+                <a:gd name="csY1" fmla="*/ 198 h 1555621"/>
+                <a:gd name="csX2" fmla="*/ 1932495 w 1932495"/>
+                <a:gd name="csY2" fmla="*/ 1555621 h 1555621"/>
+              </a:gdLst>
+              <a:ahLst/>
+              <a:cxnLst>
+                <a:cxn ang="0">
+                  <a:pos x="csX0" y="csY0"/>
+                </a:cxn>
+                <a:cxn ang="0">
+                  <a:pos x="csX1" y="csY1"/>
+                </a:cxn>
+                <a:cxn ang="0">
+                  <a:pos x="csX2" y="csY2"/>
+                </a:cxn>
+              </a:cxnLst>
+              <a:rect l="l" t="t" r="r" b="b"/>
+              <a:pathLst>
+                <a:path w="1932495" h="1555621">
+                  <a:moveTo>
+                    <a:pt x="0" y="1470779"/>
+                  </a:moveTo>
+                  <a:cubicBezTo>
+                    <a:pt x="310299" y="728418"/>
+                    <a:pt x="620598" y="-13942"/>
+                    <a:pt x="942680" y="198"/>
+                  </a:cubicBezTo>
+                  <a:cubicBezTo>
+                    <a:pt x="1264763" y="14338"/>
+                    <a:pt x="1598629" y="784979"/>
+                    <a:pt x="1932495" y="1555621"/>
+                  </a:cubicBezTo>
+                </a:path>
+              </a:pathLst>
+            </a:custGeom>
+            <a:noFill/>
+          </p:spPr>
+          <p:style>
+            <a:lnRef idx="2">
+              <a:schemeClr val="accent1">
+                <a:shade val="15000"/>
+              </a:schemeClr>
+            </a:lnRef>
+            <a:fillRef idx="1">
+              <a:schemeClr val="accent1"/>
+            </a:fillRef>
+            <a:effectRef idx="0">
+              <a:schemeClr val="accent1"/>
+            </a:effectRef>
+            <a:fontRef idx="minor">
+              <a:schemeClr val="lt1"/>
+            </a:fontRef>
+          </p:style>
+          <p:txBody>
+            <a:bodyPr rtlCol="0" anchor="ctr"/>
+            <a:lstStyle/>
+            <a:p>
+              <a:pPr algn="ctr"/>
+              <a:endParaRPr lang="en-US"/>
+            </a:p>
+          </p:txBody>
+        </p:sp>
+        <p:cxnSp>
+          <p:nvCxnSpPr>
+            <p:cNvPr id="72" name="Straight Connector 71">
+              <a:extLst>
+                <a:ext uri="{FF2B5EF4-FFF2-40B4-BE49-F238E27FC236}">
+                  <a16:creationId xmlns:a16="http://schemas.microsoft.com/office/drawing/2014/main" id="{508FA42A-7ADA-187C-B22D-2D14FAC2E9C0}"/>
+                </a:ext>
+              </a:extLst>
+            </p:cNvPr>
+            <p:cNvCxnSpPr>
+              <a:cxnSpLocks/>
+            </p:cNvCxnSpPr>
+            <p:nvPr/>
+          </p:nvCxnSpPr>
+          <p:spPr>
+            <a:xfrm>
+              <a:off x="6210095" y="3434733"/>
+              <a:ext cx="1280008" cy="0"/>
+            </a:xfrm>
+            <a:prstGeom prst="line">
+              <a:avLst/>
+            </a:prstGeom>
+          </p:spPr>
+          <p:style>
+            <a:lnRef idx="2">
+              <a:schemeClr val="dk1"/>
+            </a:lnRef>
+            <a:fillRef idx="0">
+              <a:schemeClr val="dk1"/>
+            </a:fillRef>
+            <a:effectRef idx="1">
+              <a:schemeClr val="dk1"/>
+            </a:effectRef>
+            <a:fontRef idx="minor">
+              <a:schemeClr val="tx1"/>
+            </a:fontRef>
+          </p:style>
+        </p:cxnSp>
+        <p:cxnSp>
+          <p:nvCxnSpPr>
+            <p:cNvPr id="73" name="Straight Arrow Connector 72">
+              <a:extLst>
+                <a:ext uri="{FF2B5EF4-FFF2-40B4-BE49-F238E27FC236}">
+                  <a16:creationId xmlns:a16="http://schemas.microsoft.com/office/drawing/2014/main" id="{24EEC260-7AEE-A914-07FA-FF847970AC7F}"/>
+                </a:ext>
+              </a:extLst>
+            </p:cNvPr>
+            <p:cNvCxnSpPr>
+              <a:cxnSpLocks/>
+              <a:stCxn id="71" idx="0"/>
+            </p:cNvCxnSpPr>
+            <p:nvPr/>
+          </p:nvCxnSpPr>
+          <p:spPr>
+            <a:xfrm flipH="1" flipV="1">
+              <a:off x="2498104" y="3327032"/>
+              <a:ext cx="1123414" cy="20171"/>
+            </a:xfrm>
+            <a:prstGeom prst="straightConnector1">
+              <a:avLst/>
+            </a:prstGeom>
+            <a:ln>
+              <a:tailEnd type="triangle"/>
+            </a:ln>
+          </p:spPr>
+          <p:style>
+            <a:lnRef idx="2">
+              <a:schemeClr val="dk1"/>
+            </a:lnRef>
+            <a:fillRef idx="0">
+              <a:schemeClr val="dk1"/>
+            </a:fillRef>
+            <a:effectRef idx="1">
+              <a:schemeClr val="dk1"/>
+            </a:effectRef>
+            <a:fontRef idx="minor">
+              <a:schemeClr val="tx1"/>
+            </a:fontRef>
+          </p:style>
+        </p:cxnSp>
+      </p:grpSp>
+      <p:sp>
+        <p:nvSpPr>
+          <p:cNvPr id="74" name="Oval 73">
+            <a:extLst>
+              <a:ext uri="{FF2B5EF4-FFF2-40B4-BE49-F238E27FC236}">
+                <a16:creationId xmlns:a16="http://schemas.microsoft.com/office/drawing/2014/main" id="{BCC79867-12AE-2495-8CA7-2B6B8F78FC0C}"/>
+              </a:ext>
+            </a:extLst>
+          </p:cNvPr>
+          <p:cNvSpPr/>
+          <p:nvPr/>
+        </p:nvSpPr>
+        <p:spPr>
+          <a:xfrm>
+            <a:off x="4076172" y="16325438"/>
+            <a:ext cx="565608" cy="565608"/>
+          </a:xfrm>
+          <a:prstGeom prst="ellipse">
+            <a:avLst/>
+          </a:prstGeom>
+          <a:noFill/>
+          <a:ln>
+            <a:solidFill>
+              <a:schemeClr val="tx1"/>
+            </a:solidFill>
+            <a:prstDash val="sysDash"/>
+          </a:ln>
+        </p:spPr>
+        <p:style>
+          <a:lnRef idx="2">
+            <a:schemeClr val="accent1">
+              <a:shade val="15000"/>
+            </a:schemeClr>
+          </a:lnRef>
+          <a:fillRef idx="1">
+            <a:schemeClr val="accent1"/>
+          </a:fillRef>
+          <a:effectRef idx="0">
+            <a:schemeClr val="accent1"/>
+          </a:effectRef>
+          <a:fontRef idx="minor">
+            <a:schemeClr val="lt1"/>
+          </a:fontRef>
+        </p:style>
+        <p:txBody>
+          <a:bodyPr rtlCol="0" anchor="ctr"/>
+          <a:lstStyle/>
+          <a:p>
+            <a:pPr algn="ctr"/>
+            <a:endParaRPr lang="en-US" dirty="0"/>
+          </a:p>
+        </p:txBody>
+      </p:sp>
+      <p:cxnSp>
+        <p:nvCxnSpPr>
+          <p:cNvPr id="75" name="Straight Connector 74">
+            <a:extLst>
+              <a:ext uri="{FF2B5EF4-FFF2-40B4-BE49-F238E27FC236}">
+                <a16:creationId xmlns:a16="http://schemas.microsoft.com/office/drawing/2014/main" id="{466CBE6C-8883-653A-61C3-4B42BDFE01E4}"/>
+              </a:ext>
+            </a:extLst>
+          </p:cNvPr>
+          <p:cNvCxnSpPr>
+            <a:cxnSpLocks/>
+          </p:cNvCxnSpPr>
+          <p:nvPr/>
+        </p:nvCxnSpPr>
+        <p:spPr>
+          <a:xfrm>
+            <a:off x="2498732" y="16928111"/>
+            <a:ext cx="9366342" cy="0"/>
+          </a:xfrm>
+          <a:prstGeom prst="line">
+            <a:avLst/>
+          </a:prstGeom>
+          <a:ln>
+            <a:solidFill>
+              <a:schemeClr val="tx1"/>
+            </a:solidFill>
+          </a:ln>
+        </p:spPr>
+        <p:style>
+          <a:lnRef idx="2">
+            <a:schemeClr val="accent1"/>
+          </a:lnRef>
+          <a:fillRef idx="0">
+            <a:schemeClr val="accent1"/>
+          </a:fillRef>
+          <a:effectRef idx="1">
+            <a:schemeClr val="accent1"/>
+          </a:effectRef>
+          <a:fontRef idx="minor">
+            <a:schemeClr val="tx1"/>
+          </a:fontRef>
+        </p:style>
+      </p:cxnSp>
+      <p:sp>
+        <p:nvSpPr>
+          <p:cNvPr id="76" name="Oval 75">
+            <a:extLst>
+              <a:ext uri="{FF2B5EF4-FFF2-40B4-BE49-F238E27FC236}">
+                <a16:creationId xmlns:a16="http://schemas.microsoft.com/office/drawing/2014/main" id="{9D0E4A4A-67FD-8293-F137-AB03D7CB6039}"/>
+              </a:ext>
+            </a:extLst>
+          </p:cNvPr>
+          <p:cNvSpPr/>
+          <p:nvPr/>
+        </p:nvSpPr>
+        <p:spPr>
+          <a:xfrm>
+            <a:off x="3096698" y="9957274"/>
+            <a:ext cx="852341" cy="852341"/>
+          </a:xfrm>
+          <a:prstGeom prst="ellipse">
+            <a:avLst/>
+          </a:prstGeom>
+          <a:solidFill>
+            <a:schemeClr val="tx1"/>
+          </a:solidFill>
+          <a:ln>
+            <a:solidFill>
+              <a:schemeClr val="tx1"/>
+            </a:solidFill>
+          </a:ln>
+        </p:spPr>
+        <p:style>
+          <a:lnRef idx="2">
+            <a:schemeClr val="accent1">
+              <a:shade val="15000"/>
+            </a:schemeClr>
+          </a:lnRef>
+          <a:fillRef idx="1">
+            <a:schemeClr val="accent1"/>
+          </a:fillRef>
+          <a:effectRef idx="0">
+            <a:schemeClr val="accent1"/>
+          </a:effectRef>
+          <a:fontRef idx="minor">
+            <a:schemeClr val="lt1"/>
+          </a:fontRef>
+        </p:style>
+        <p:txBody>
+          <a:bodyPr rtlCol="0" anchor="ctr"/>
+          <a:lstStyle/>
+          <a:p>
+            <a:pPr algn="ctr"/>
+            <a:endParaRPr lang="en-US"/>
+          </a:p>
+        </p:txBody>
+      </p:sp>
+      <p:sp>
+        <p:nvSpPr>
+          <p:cNvPr id="77" name="Oval 76">
+            <a:extLst>
+              <a:ext uri="{FF2B5EF4-FFF2-40B4-BE49-F238E27FC236}">
+                <a16:creationId xmlns:a16="http://schemas.microsoft.com/office/drawing/2014/main" id="{26E5E5E4-E6A3-8C40-B964-C43AC27C7EA3}"/>
+              </a:ext>
+            </a:extLst>
+          </p:cNvPr>
+          <p:cNvSpPr/>
+          <p:nvPr/>
+        </p:nvSpPr>
+        <p:spPr>
+          <a:xfrm>
+            <a:off x="3064002" y="6940899"/>
+            <a:ext cx="852341" cy="852341"/>
+          </a:xfrm>
+          <a:prstGeom prst="ellipse">
+            <a:avLst/>
+          </a:prstGeom>
+          <a:solidFill>
+            <a:schemeClr val="tx1"/>
+          </a:solidFill>
+          <a:ln>
+            <a:solidFill>
+              <a:schemeClr val="tx1"/>
+            </a:solidFill>
+          </a:ln>
+        </p:spPr>
+        <p:style>
+          <a:lnRef idx="2">
+            <a:schemeClr val="accent1">
+              <a:shade val="15000"/>
+            </a:schemeClr>
+          </a:lnRef>
+          <a:fillRef idx="1">
+            <a:schemeClr val="accent1"/>
+          </a:fillRef>
+          <a:effectRef idx="0">
+            <a:schemeClr val="accent1"/>
+          </a:effectRef>
+          <a:fontRef idx="minor">
+            <a:schemeClr val="lt1"/>
+          </a:fontRef>
+        </p:style>
+        <p:txBody>
+          <a:bodyPr rtlCol="0" anchor="ctr"/>
+          <a:lstStyle/>
+          <a:p>
+            <a:pPr algn="ctr"/>
+            <a:endParaRPr lang="en-US"/>
+          </a:p>
+        </p:txBody>
+      </p:sp>
+      <p:grpSp>
+        <p:nvGrpSpPr>
+          <p:cNvPr id="78" name="Group 77">
+            <a:extLst>
+              <a:ext uri="{FF2B5EF4-FFF2-40B4-BE49-F238E27FC236}">
+                <a16:creationId xmlns:a16="http://schemas.microsoft.com/office/drawing/2014/main" id="{E8ACAC0D-DE22-B968-A052-0F6D61D39C67}"/>
+              </a:ext>
+            </a:extLst>
+          </p:cNvPr>
+          <p:cNvGrpSpPr/>
+          <p:nvPr/>
+        </p:nvGrpSpPr>
+        <p:grpSpPr>
+          <a:xfrm>
+            <a:off x="16019301" y="11303330"/>
+            <a:ext cx="4991999" cy="1558309"/>
+            <a:chOff x="2498104" y="1876424"/>
+            <a:chExt cx="4991999" cy="1558309"/>
+          </a:xfrm>
+        </p:grpSpPr>
+        <p:sp>
+          <p:nvSpPr>
+            <p:cNvPr id="79" name="Freeform: Shape 78">
+              <a:extLst>
+                <a:ext uri="{FF2B5EF4-FFF2-40B4-BE49-F238E27FC236}">
+                  <a16:creationId xmlns:a16="http://schemas.microsoft.com/office/drawing/2014/main" id="{0CE80CE3-9DEC-CB31-123C-AFDD4E5FC51E}"/>
+                </a:ext>
+              </a:extLst>
+            </p:cNvPr>
+            <p:cNvSpPr/>
+            <p:nvPr/>
+          </p:nvSpPr>
+          <p:spPr>
+            <a:xfrm>
+              <a:off x="3621518" y="1876424"/>
+              <a:ext cx="2590743" cy="1555621"/>
+            </a:xfrm>
+            <a:custGeom>
+              <a:avLst/>
+              <a:gdLst>
+                <a:gd name="csX0" fmla="*/ 0 w 1932495"/>
+                <a:gd name="csY0" fmla="*/ 1470779 h 1555621"/>
+                <a:gd name="csX1" fmla="*/ 942680 w 1932495"/>
+                <a:gd name="csY1" fmla="*/ 198 h 1555621"/>
+                <a:gd name="csX2" fmla="*/ 1932495 w 1932495"/>
+                <a:gd name="csY2" fmla="*/ 1555621 h 1555621"/>
+              </a:gdLst>
+              <a:ahLst/>
+              <a:cxnLst>
+                <a:cxn ang="0">
+                  <a:pos x="csX0" y="csY0"/>
+                </a:cxn>
+                <a:cxn ang="0">
+                  <a:pos x="csX1" y="csY1"/>
+                </a:cxn>
+                <a:cxn ang="0">
+                  <a:pos x="csX2" y="csY2"/>
+                </a:cxn>
+              </a:cxnLst>
+              <a:rect l="l" t="t" r="r" b="b"/>
+              <a:pathLst>
+                <a:path w="1932495" h="1555621">
+                  <a:moveTo>
+                    <a:pt x="0" y="1470779"/>
+                  </a:moveTo>
+                  <a:cubicBezTo>
+                    <a:pt x="310299" y="728418"/>
+                    <a:pt x="620598" y="-13942"/>
+                    <a:pt x="942680" y="198"/>
+                  </a:cubicBezTo>
+                  <a:cubicBezTo>
+                    <a:pt x="1264763" y="14338"/>
+                    <a:pt x="1598629" y="784979"/>
+                    <a:pt x="1932495" y="1555621"/>
+                  </a:cubicBezTo>
+                </a:path>
+              </a:pathLst>
+            </a:custGeom>
+            <a:noFill/>
+          </p:spPr>
+          <p:style>
+            <a:lnRef idx="2">
+              <a:schemeClr val="accent1">
+                <a:shade val="15000"/>
+              </a:schemeClr>
+            </a:lnRef>
+            <a:fillRef idx="1">
+              <a:schemeClr val="accent1"/>
+            </a:fillRef>
+            <a:effectRef idx="0">
+              <a:schemeClr val="accent1"/>
+            </a:effectRef>
+            <a:fontRef idx="minor">
+              <a:schemeClr val="lt1"/>
+            </a:fontRef>
+          </p:style>
+          <p:txBody>
+            <a:bodyPr rtlCol="0" anchor="ctr"/>
+            <a:lstStyle/>
+            <a:p>
+              <a:pPr algn="ctr"/>
+              <a:endParaRPr lang="en-US"/>
+            </a:p>
+          </p:txBody>
+        </p:sp>
+        <p:cxnSp>
+          <p:nvCxnSpPr>
+            <p:cNvPr id="80" name="Straight Connector 79">
+              <a:extLst>
+                <a:ext uri="{FF2B5EF4-FFF2-40B4-BE49-F238E27FC236}">
+                  <a16:creationId xmlns:a16="http://schemas.microsoft.com/office/drawing/2014/main" id="{70D0B574-E1E1-9E39-6714-1AD15B1BCDF3}"/>
+                </a:ext>
+              </a:extLst>
+            </p:cNvPr>
+            <p:cNvCxnSpPr>
+              <a:cxnSpLocks/>
+            </p:cNvCxnSpPr>
+            <p:nvPr/>
+          </p:nvCxnSpPr>
+          <p:spPr>
+            <a:xfrm>
+              <a:off x="6210095" y="3434733"/>
+              <a:ext cx="1280008" cy="0"/>
+            </a:xfrm>
+            <a:prstGeom prst="line">
+              <a:avLst/>
+            </a:prstGeom>
+          </p:spPr>
+          <p:style>
+            <a:lnRef idx="2">
+              <a:schemeClr val="dk1"/>
+            </a:lnRef>
+            <a:fillRef idx="0">
+              <a:schemeClr val="dk1"/>
+            </a:fillRef>
+            <a:effectRef idx="1">
+              <a:schemeClr val="dk1"/>
+            </a:effectRef>
+            <a:fontRef idx="minor">
+              <a:schemeClr val="tx1"/>
+            </a:fontRef>
+          </p:style>
+        </p:cxnSp>
+        <p:cxnSp>
+          <p:nvCxnSpPr>
+            <p:cNvPr id="81" name="Straight Arrow Connector 80">
+              <a:extLst>
+                <a:ext uri="{FF2B5EF4-FFF2-40B4-BE49-F238E27FC236}">
+                  <a16:creationId xmlns:a16="http://schemas.microsoft.com/office/drawing/2014/main" id="{96D96921-0851-4536-F442-B55466D59C69}"/>
+                </a:ext>
+              </a:extLst>
+            </p:cNvPr>
+            <p:cNvCxnSpPr>
+              <a:cxnSpLocks/>
+              <a:stCxn id="79" idx="0"/>
+            </p:cNvCxnSpPr>
+            <p:nvPr/>
+          </p:nvCxnSpPr>
+          <p:spPr>
+            <a:xfrm flipH="1" flipV="1">
+              <a:off x="2498104" y="3327032"/>
+              <a:ext cx="1123414" cy="20171"/>
+            </a:xfrm>
+            <a:prstGeom prst="straightConnector1">
+              <a:avLst/>
+            </a:prstGeom>
+            <a:ln>
+              <a:tailEnd type="triangle"/>
+            </a:ln>
+          </p:spPr>
+          <p:style>
+            <a:lnRef idx="2">
+              <a:schemeClr val="dk1"/>
+            </a:lnRef>
+            <a:fillRef idx="0">
+              <a:schemeClr val="dk1"/>
+            </a:fillRef>
+            <a:effectRef idx="1">
+              <a:schemeClr val="dk1"/>
+            </a:effectRef>
+            <a:fontRef idx="minor">
+              <a:schemeClr val="tx1"/>
+            </a:fontRef>
+          </p:style>
+        </p:cxnSp>
+      </p:grpSp>
+      <p:cxnSp>
+        <p:nvCxnSpPr>
+          <p:cNvPr id="82" name="Straight Connector 81">
+            <a:extLst>
+              <a:ext uri="{FF2B5EF4-FFF2-40B4-BE49-F238E27FC236}">
+                <a16:creationId xmlns:a16="http://schemas.microsoft.com/office/drawing/2014/main" id="{12809D0C-356B-FDEA-3F1C-1C7A443F5EA7}"/>
+              </a:ext>
+            </a:extLst>
+          </p:cNvPr>
+          <p:cNvCxnSpPr>
+            <a:cxnSpLocks/>
+          </p:cNvCxnSpPr>
+          <p:nvPr/>
+        </p:nvCxnSpPr>
+        <p:spPr>
+          <a:xfrm>
+            <a:off x="14219380" y="7788776"/>
+            <a:ext cx="7934422" cy="0"/>
+          </a:xfrm>
+          <a:prstGeom prst="line">
+            <a:avLst/>
+          </a:prstGeom>
+          <a:ln>
+            <a:solidFill>
+              <a:schemeClr val="tx1"/>
+            </a:solidFill>
+          </a:ln>
+        </p:spPr>
+        <p:style>
+          <a:lnRef idx="2">
+            <a:schemeClr val="accent1"/>
+          </a:lnRef>
+          <a:fillRef idx="0">
+            <a:schemeClr val="accent1"/>
+          </a:fillRef>
+          <a:effectRef idx="1">
+            <a:schemeClr val="accent1"/>
+          </a:effectRef>
+          <a:fontRef idx="minor">
+            <a:schemeClr val="tx1"/>
+          </a:fontRef>
+        </p:style>
+      </p:cxnSp>
+      <p:sp>
+        <p:nvSpPr>
+          <p:cNvPr id="83" name="Oval 82">
+            <a:extLst>
+              <a:ext uri="{FF2B5EF4-FFF2-40B4-BE49-F238E27FC236}">
+                <a16:creationId xmlns:a16="http://schemas.microsoft.com/office/drawing/2014/main" id="{F2D1D059-033A-C109-E1A1-A69989324108}"/>
+              </a:ext>
+            </a:extLst>
+          </p:cNvPr>
+          <p:cNvSpPr/>
+          <p:nvPr/>
+        </p:nvSpPr>
+        <p:spPr>
+          <a:xfrm>
+            <a:off x="21011297" y="7204312"/>
+            <a:ext cx="565608" cy="565608"/>
+          </a:xfrm>
+          <a:prstGeom prst="ellipse">
+            <a:avLst/>
+          </a:prstGeom>
+          <a:solidFill>
+            <a:schemeClr val="tx1"/>
+          </a:solidFill>
+          <a:ln>
+            <a:solidFill>
+              <a:schemeClr val="tx1"/>
+            </a:solidFill>
+          </a:ln>
+        </p:spPr>
+        <p:style>
+          <a:lnRef idx="2">
+            <a:schemeClr val="accent1">
+              <a:shade val="15000"/>
+            </a:schemeClr>
+          </a:lnRef>
+          <a:fillRef idx="1">
+            <a:schemeClr val="accent1"/>
+          </a:fillRef>
+          <a:effectRef idx="0">
+            <a:schemeClr val="accent1"/>
+          </a:effectRef>
+          <a:fontRef idx="minor">
+            <a:schemeClr val="lt1"/>
+          </a:fontRef>
+        </p:style>
+        <p:txBody>
+          <a:bodyPr rtlCol="0" anchor="ctr"/>
+          <a:lstStyle/>
+          <a:p>
+            <a:pPr algn="ctr"/>
+            <a:endParaRPr lang="en-US"/>
+          </a:p>
+        </p:txBody>
+      </p:sp>
+      <p:sp>
+        <p:nvSpPr>
+          <p:cNvPr id="84" name="Oval 83">
+            <a:extLst>
+              <a:ext uri="{FF2B5EF4-FFF2-40B4-BE49-F238E27FC236}">
+                <a16:creationId xmlns:a16="http://schemas.microsoft.com/office/drawing/2014/main" id="{E3877E3F-FD11-69E5-E357-29112F53E1CF}"/>
+              </a:ext>
+            </a:extLst>
+          </p:cNvPr>
+          <p:cNvSpPr/>
+          <p:nvPr/>
+        </p:nvSpPr>
+        <p:spPr>
+          <a:xfrm>
+            <a:off x="14176571" y="6917584"/>
+            <a:ext cx="852341" cy="852341"/>
+          </a:xfrm>
+          <a:prstGeom prst="ellipse">
+            <a:avLst/>
+          </a:prstGeom>
+          <a:solidFill>
+            <a:schemeClr val="tx1"/>
+          </a:solidFill>
+          <a:ln>
+            <a:solidFill>
+              <a:schemeClr val="tx1"/>
+            </a:solidFill>
+          </a:ln>
+        </p:spPr>
+        <p:style>
+          <a:lnRef idx="2">
+            <a:schemeClr val="accent1">
+              <a:shade val="15000"/>
+            </a:schemeClr>
+          </a:lnRef>
+          <a:fillRef idx="1">
+            <a:schemeClr val="accent1"/>
+          </a:fillRef>
+          <a:effectRef idx="0">
+            <a:schemeClr val="accent1"/>
+          </a:effectRef>
+          <a:fontRef idx="minor">
+            <a:schemeClr val="lt1"/>
+          </a:fontRef>
+        </p:style>
+        <p:txBody>
+          <a:bodyPr rtlCol="0" anchor="ctr"/>
+          <a:lstStyle/>
+          <a:p>
+            <a:pPr algn="ctr"/>
+            <a:endParaRPr lang="en-US"/>
+          </a:p>
+        </p:txBody>
+      </p:sp>
+      <p:cxnSp>
+        <p:nvCxnSpPr>
+          <p:cNvPr id="88" name="Straight Connector 87">
+            <a:extLst>
+              <a:ext uri="{FF2B5EF4-FFF2-40B4-BE49-F238E27FC236}">
+                <a16:creationId xmlns:a16="http://schemas.microsoft.com/office/drawing/2014/main" id="{3B87E136-AE20-4C91-5CCA-307388F728FD}"/>
+              </a:ext>
+            </a:extLst>
+          </p:cNvPr>
+          <p:cNvCxnSpPr>
+            <a:cxnSpLocks/>
+          </p:cNvCxnSpPr>
+          <p:nvPr/>
+        </p:nvCxnSpPr>
+        <p:spPr>
+          <a:xfrm>
+            <a:off x="14314207" y="13099410"/>
+            <a:ext cx="7934422" cy="0"/>
+          </a:xfrm>
+          <a:prstGeom prst="line">
+            <a:avLst/>
+          </a:prstGeom>
+          <a:ln>
+            <a:solidFill>
+              <a:schemeClr val="tx1"/>
+            </a:solidFill>
+          </a:ln>
+        </p:spPr>
+        <p:style>
+          <a:lnRef idx="2">
+            <a:schemeClr val="accent1"/>
+          </a:lnRef>
+          <a:fillRef idx="0">
+            <a:schemeClr val="accent1"/>
+          </a:fillRef>
+          <a:effectRef idx="1">
+            <a:schemeClr val="accent1"/>
+          </a:effectRef>
+          <a:fontRef idx="minor">
+            <a:schemeClr val="tx1"/>
+          </a:fontRef>
+        </p:style>
+      </p:cxnSp>
+      <p:sp>
+        <p:nvSpPr>
+          <p:cNvPr id="89" name="Oval 88">
+            <a:extLst>
+              <a:ext uri="{FF2B5EF4-FFF2-40B4-BE49-F238E27FC236}">
+                <a16:creationId xmlns:a16="http://schemas.microsoft.com/office/drawing/2014/main" id="{1DDFFBC7-7B95-171C-E140-AC52AD99617A}"/>
+              </a:ext>
+            </a:extLst>
+          </p:cNvPr>
+          <p:cNvSpPr/>
+          <p:nvPr/>
+        </p:nvSpPr>
+        <p:spPr>
+          <a:xfrm>
+            <a:off x="21106124" y="12514946"/>
+            <a:ext cx="565608" cy="565608"/>
+          </a:xfrm>
+          <a:prstGeom prst="ellipse">
+            <a:avLst/>
+          </a:prstGeom>
+          <a:solidFill>
+            <a:schemeClr val="tx1"/>
+          </a:solidFill>
+          <a:ln>
+            <a:solidFill>
+              <a:schemeClr val="tx1"/>
+            </a:solidFill>
+          </a:ln>
+        </p:spPr>
+        <p:style>
+          <a:lnRef idx="2">
+            <a:schemeClr val="accent1">
+              <a:shade val="15000"/>
+            </a:schemeClr>
+          </a:lnRef>
+          <a:fillRef idx="1">
+            <a:schemeClr val="accent1"/>
+          </a:fillRef>
+          <a:effectRef idx="0">
+            <a:schemeClr val="accent1"/>
+          </a:effectRef>
+          <a:fontRef idx="minor">
+            <a:schemeClr val="lt1"/>
+          </a:fontRef>
+        </p:style>
+        <p:txBody>
+          <a:bodyPr rtlCol="0" anchor="ctr"/>
+          <a:lstStyle/>
+          <a:p>
+            <a:pPr algn="ctr"/>
+            <a:endParaRPr lang="en-US"/>
+          </a:p>
+        </p:txBody>
+      </p:sp>
+      <p:sp>
+        <p:nvSpPr>
+          <p:cNvPr id="90" name="Oval 89">
+            <a:extLst>
+              <a:ext uri="{FF2B5EF4-FFF2-40B4-BE49-F238E27FC236}">
+                <a16:creationId xmlns:a16="http://schemas.microsoft.com/office/drawing/2014/main" id="{CA6E3350-9FE6-7148-588C-1C1D36031DFB}"/>
+              </a:ext>
+            </a:extLst>
+          </p:cNvPr>
+          <p:cNvSpPr/>
+          <p:nvPr/>
+        </p:nvSpPr>
+        <p:spPr>
+          <a:xfrm>
+            <a:off x="14403745" y="12228218"/>
+            <a:ext cx="852341" cy="852341"/>
+          </a:xfrm>
+          <a:prstGeom prst="ellipse">
+            <a:avLst/>
+          </a:prstGeom>
+          <a:solidFill>
+            <a:schemeClr val="tx1"/>
+          </a:solidFill>
+          <a:ln>
+            <a:solidFill>
+              <a:schemeClr val="tx1"/>
+            </a:solidFill>
+          </a:ln>
+        </p:spPr>
+        <p:style>
+          <a:lnRef idx="2">
+            <a:schemeClr val="accent1">
+              <a:shade val="15000"/>
+            </a:schemeClr>
+          </a:lnRef>
+          <a:fillRef idx="1">
+            <a:schemeClr val="accent1"/>
+          </a:fillRef>
+          <a:effectRef idx="0">
+            <a:schemeClr val="accent1"/>
+          </a:effectRef>
+          <a:fontRef idx="minor">
+            <a:schemeClr val="lt1"/>
+          </a:fontRef>
+        </p:style>
+        <p:txBody>
+          <a:bodyPr rtlCol="0" anchor="ctr"/>
+          <a:lstStyle/>
+          <a:p>
+            <a:pPr algn="ctr"/>
+            <a:endParaRPr lang="en-US"/>
+          </a:p>
+        </p:txBody>
+      </p:sp>
+      <p:cxnSp>
+        <p:nvCxnSpPr>
+          <p:cNvPr id="91" name="Straight Arrow Connector 90">
+            <a:extLst>
+              <a:ext uri="{FF2B5EF4-FFF2-40B4-BE49-F238E27FC236}">
+                <a16:creationId xmlns:a16="http://schemas.microsoft.com/office/drawing/2014/main" id="{4FFA6BA9-3DDD-E798-619C-F9E01B8AF8E8}"/>
+              </a:ext>
+            </a:extLst>
+          </p:cNvPr>
+          <p:cNvCxnSpPr>
+            <a:cxnSpLocks/>
+          </p:cNvCxnSpPr>
+          <p:nvPr/>
+        </p:nvCxnSpPr>
+        <p:spPr>
+          <a:xfrm flipH="1">
+            <a:off x="15924474" y="7464891"/>
+            <a:ext cx="4845621" cy="0"/>
+          </a:xfrm>
+          <a:prstGeom prst="straightConnector1">
+            <a:avLst/>
+          </a:prstGeom>
+          <a:ln>
+            <a:solidFill>
+              <a:schemeClr val="tx1"/>
+            </a:solidFill>
+            <a:tailEnd type="triangle"/>
+          </a:ln>
+        </p:spPr>
+        <p:style>
+          <a:lnRef idx="2">
+            <a:schemeClr val="accent1"/>
+          </a:lnRef>
+          <a:fillRef idx="0">
+            <a:schemeClr val="accent1"/>
+          </a:fillRef>
+          <a:effectRef idx="1">
+            <a:schemeClr val="accent1"/>
+          </a:effectRef>
+          <a:fontRef idx="minor">
+            <a:schemeClr val="tx1"/>
+          </a:fontRef>
+        </p:style>
+      </p:cxnSp>
+      <p:sp>
+        <p:nvSpPr>
+          <p:cNvPr id="92" name="Oval 91">
+            <a:extLst>
+              <a:ext uri="{FF2B5EF4-FFF2-40B4-BE49-F238E27FC236}">
+                <a16:creationId xmlns:a16="http://schemas.microsoft.com/office/drawing/2014/main" id="{561A2444-3E28-FE12-201A-EE4C0853F6C7}"/>
+              </a:ext>
+            </a:extLst>
+          </p:cNvPr>
+          <p:cNvSpPr/>
+          <p:nvPr/>
+        </p:nvSpPr>
+        <p:spPr>
+          <a:xfrm>
+            <a:off x="15167973" y="7212879"/>
+            <a:ext cx="565608" cy="565608"/>
+          </a:xfrm>
+          <a:prstGeom prst="ellipse">
+            <a:avLst/>
+          </a:prstGeom>
+          <a:noFill/>
+          <a:ln>
+            <a:solidFill>
+              <a:schemeClr val="tx1"/>
+            </a:solidFill>
+            <a:prstDash val="sysDash"/>
+          </a:ln>
+        </p:spPr>
+        <p:style>
+          <a:lnRef idx="2">
+            <a:schemeClr val="accent1">
+              <a:shade val="15000"/>
+            </a:schemeClr>
+          </a:lnRef>
+          <a:fillRef idx="1">
+            <a:schemeClr val="accent1"/>
+          </a:fillRef>
+          <a:effectRef idx="0">
+            <a:schemeClr val="accent1"/>
+          </a:effectRef>
+          <a:fontRef idx="minor">
+            <a:schemeClr val="lt1"/>
+          </a:fontRef>
+        </p:style>
+        <p:txBody>
+          <a:bodyPr rtlCol="0" anchor="ctr"/>
+          <a:lstStyle/>
+          <a:p>
+            <a:pPr algn="ctr"/>
+            <a:endParaRPr lang="en-US" dirty="0"/>
+          </a:p>
+        </p:txBody>
+      </p:sp>
+      <p:sp>
+        <p:nvSpPr>
+          <p:cNvPr id="93" name="Oval 92">
+            <a:extLst>
+              <a:ext uri="{FF2B5EF4-FFF2-40B4-BE49-F238E27FC236}">
+                <a16:creationId xmlns:a16="http://schemas.microsoft.com/office/drawing/2014/main" id="{B72106B1-5114-960A-645F-3777EFC86FDF}"/>
+              </a:ext>
+            </a:extLst>
+          </p:cNvPr>
+          <p:cNvSpPr/>
+          <p:nvPr/>
+        </p:nvSpPr>
+        <p:spPr>
+          <a:xfrm>
+            <a:off x="15365492" y="12491302"/>
+            <a:ext cx="565608" cy="565608"/>
+          </a:xfrm>
+          <a:prstGeom prst="ellipse">
+            <a:avLst/>
+          </a:prstGeom>
+          <a:noFill/>
+          <a:ln>
+            <a:solidFill>
+              <a:schemeClr val="tx1"/>
+            </a:solidFill>
+            <a:prstDash val="sysDash"/>
+          </a:ln>
+        </p:spPr>
+        <p:style>
+          <a:lnRef idx="2">
+            <a:schemeClr val="accent1">
+              <a:shade val="15000"/>
+            </a:schemeClr>
+          </a:lnRef>
+          <a:fillRef idx="1">
+            <a:schemeClr val="accent1"/>
+          </a:fillRef>
+          <a:effectRef idx="0">
+            <a:schemeClr val="accent1"/>
+          </a:effectRef>
+          <a:fontRef idx="minor">
+            <a:schemeClr val="lt1"/>
+          </a:fontRef>
+        </p:style>
+        <p:txBody>
+          <a:bodyPr rtlCol="0" anchor="ctr"/>
+          <a:lstStyle/>
+          <a:p>
+            <a:pPr algn="ctr"/>
+            <a:endParaRPr lang="en-US" dirty="0"/>
+          </a:p>
+        </p:txBody>
+      </p:sp>
+      <p:cxnSp>
+        <p:nvCxnSpPr>
+          <p:cNvPr id="94" name="Straight Arrow Connector 93">
+            <a:extLst>
+              <a:ext uri="{FF2B5EF4-FFF2-40B4-BE49-F238E27FC236}">
+                <a16:creationId xmlns:a16="http://schemas.microsoft.com/office/drawing/2014/main" id="{47A10BF9-0F3A-F2C9-D92A-3F19D3C88D87}"/>
+              </a:ext>
+            </a:extLst>
+          </p:cNvPr>
+          <p:cNvCxnSpPr>
+            <a:cxnSpLocks/>
+          </p:cNvCxnSpPr>
+          <p:nvPr/>
+        </p:nvCxnSpPr>
+        <p:spPr>
+          <a:xfrm>
+            <a:off x="20014753" y="12739030"/>
+            <a:ext cx="840921" cy="0"/>
+          </a:xfrm>
+          <a:prstGeom prst="straightConnector1">
+            <a:avLst/>
+          </a:prstGeom>
+          <a:ln>
+            <a:solidFill>
+              <a:schemeClr val="tx1"/>
+            </a:solidFill>
+            <a:prstDash val="sysDash"/>
+            <a:tailEnd type="triangle"/>
+          </a:ln>
+        </p:spPr>
+        <p:style>
+          <a:lnRef idx="2">
+            <a:schemeClr val="accent1"/>
+          </a:lnRef>
+          <a:fillRef idx="0">
+            <a:schemeClr val="accent1"/>
+          </a:fillRef>
+          <a:effectRef idx="1">
+            <a:schemeClr val="accent1"/>
+          </a:effectRef>
+          <a:fontRef idx="minor">
+            <a:schemeClr val="tx1"/>
+          </a:fontRef>
+        </p:style>
+      </p:cxnSp>
+      <p:cxnSp>
+        <p:nvCxnSpPr>
+          <p:cNvPr id="103" name="Straight Arrow Connector 102">
+            <a:extLst>
+              <a:ext uri="{FF2B5EF4-FFF2-40B4-BE49-F238E27FC236}">
+                <a16:creationId xmlns:a16="http://schemas.microsoft.com/office/drawing/2014/main" id="{A01B7325-6955-FC32-54FE-25EAC5B2C2AC}"/>
+              </a:ext>
+            </a:extLst>
+          </p:cNvPr>
+          <p:cNvCxnSpPr>
+            <a:cxnSpLocks/>
+          </p:cNvCxnSpPr>
+          <p:nvPr/>
+        </p:nvCxnSpPr>
+        <p:spPr>
+          <a:xfrm flipH="1">
+            <a:off x="20014753" y="12969045"/>
+            <a:ext cx="850169" cy="0"/>
+          </a:xfrm>
+          <a:prstGeom prst="straightConnector1">
+            <a:avLst/>
+          </a:prstGeom>
+          <a:ln>
+            <a:solidFill>
+              <a:schemeClr val="tx1"/>
+            </a:solidFill>
+            <a:prstDash val="sysDash"/>
+            <a:tailEnd type="triangle"/>
+          </a:ln>
+        </p:spPr>
+        <p:style>
+          <a:lnRef idx="2">
+            <a:schemeClr val="accent1"/>
+          </a:lnRef>
+          <a:fillRef idx="0">
+            <a:schemeClr val="accent1"/>
+          </a:fillRef>
+          <a:effectRef idx="1">
+            <a:schemeClr val="accent1"/>
+          </a:effectRef>
+          <a:fontRef idx="minor">
+            <a:schemeClr val="tx1"/>
+          </a:fontRef>
+        </p:style>
+      </p:cxnSp>
+      <p:sp>
+        <p:nvSpPr>
+          <p:cNvPr id="104" name="TextBox 103">
+            <a:extLst>
+              <a:ext uri="{FF2B5EF4-FFF2-40B4-BE49-F238E27FC236}">
+                <a16:creationId xmlns:a16="http://schemas.microsoft.com/office/drawing/2014/main" id="{1740A703-9406-ACDD-78CE-3C4FB422ACEC}"/>
+              </a:ext>
+            </a:extLst>
+          </p:cNvPr>
+          <p:cNvSpPr txBox="1"/>
+          <p:nvPr/>
+        </p:nvSpPr>
+        <p:spPr>
+          <a:xfrm>
+            <a:off x="15380756" y="10048703"/>
+            <a:ext cx="6082947" cy="1015663"/>
+          </a:xfrm>
+          <a:prstGeom prst="rect">
+            <a:avLst/>
+          </a:prstGeom>
+          <a:noFill/>
+        </p:spPr>
+        <p:txBody>
+          <a:bodyPr wrap="none" rtlCol="0">
+            <a:spAutoFit/>
+          </a:bodyPr>
+          <a:lstStyle/>
+          <a:p>
+            <a:r>
+              <a:rPr lang="en-US" sz="6000" b="1" dirty="0">
                 <a:latin typeface="Times New Roman" panose="02020603050405020304" pitchFamily="18" charset="0"/>
                 <a:cs typeface="Times New Roman" panose="02020603050405020304" pitchFamily="18" charset="0"/>
               </a:rPr>
@@ -10534,10 +14025,10 @@
       </p:sp>
       <p:sp>
         <p:nvSpPr>
-          <p:cNvPr id="151" name="TextBox 150">
-            <a:extLst>
-              <a:ext uri="{FF2B5EF4-FFF2-40B4-BE49-F238E27FC236}">
-                <a16:creationId xmlns:a16="http://schemas.microsoft.com/office/drawing/2014/main" id="{ADC43092-DCAE-04CA-621D-1F0AA7F03556}"/>
+          <p:cNvPr id="105" name="TextBox 104">
+            <a:extLst>
+              <a:ext uri="{FF2B5EF4-FFF2-40B4-BE49-F238E27FC236}">
+                <a16:creationId xmlns:a16="http://schemas.microsoft.com/office/drawing/2014/main" id="{499A73EF-27D2-59AB-D2E4-86BB86389B49}"/>
               </a:ext>
             </a:extLst>
           </p:cNvPr>
@@ -10546,8 +14037,8 @@
         </p:nvSpPr>
         <p:spPr>
           <a:xfrm>
-            <a:off x="16878032" y="6132666"/>
-            <a:ext cx="2858090" cy="553998"/>
+            <a:off x="15641399" y="5901921"/>
+            <a:ext cx="5526706" cy="1015663"/>
           </a:xfrm>
           <a:prstGeom prst="rect">
             <a:avLst/>
@@ -10561,7 +14052,7 @@
           <a:lstStyle/>
           <a:p>
             <a:r>
-              <a:rPr lang="en-US" sz="3000" b="1" dirty="0">
+              <a:rPr lang="en-US" sz="6000" b="1" dirty="0">
                 <a:latin typeface="Times New Roman" panose="02020603050405020304" pitchFamily="18" charset="0"/>
                 <a:cs typeface="Times New Roman" panose="02020603050405020304" pitchFamily="18" charset="0"/>
               </a:rPr>
@@ -10572,10 +14063,10 @@
       </p:sp>
       <p:sp>
         <p:nvSpPr>
-          <p:cNvPr id="2" name="Rectangle 1">
-            <a:extLst>
-              <a:ext uri="{FF2B5EF4-FFF2-40B4-BE49-F238E27FC236}">
-                <a16:creationId xmlns:a16="http://schemas.microsoft.com/office/drawing/2014/main" id="{F1BAA800-6DA3-DD70-C70E-53D1CAC7E762}"/>
+          <p:cNvPr id="106" name="Rectangle 105">
+            <a:extLst>
+              <a:ext uri="{FF2B5EF4-FFF2-40B4-BE49-F238E27FC236}">
+                <a16:creationId xmlns:a16="http://schemas.microsoft.com/office/drawing/2014/main" id="{C3B9B576-8037-5796-FA43-D26F1ADC30E7}"/>
               </a:ext>
             </a:extLst>
           </p:cNvPr>
@@ -10584,7 +14075,7 @@
         </p:nvSpPr>
         <p:spPr>
           <a:xfrm>
-            <a:off x="10659543" y="3477172"/>
+            <a:off x="6619611" y="9299047"/>
             <a:ext cx="896323" cy="1536568"/>
           </a:xfrm>
           <a:prstGeom prst="rect">
@@ -10626,10 +14117,172 @@
       </p:sp>
       <p:sp>
         <p:nvSpPr>
-          <p:cNvPr id="3" name="TextBox 2">
-            <a:extLst>
-              <a:ext uri="{FF2B5EF4-FFF2-40B4-BE49-F238E27FC236}">
-                <a16:creationId xmlns:a16="http://schemas.microsoft.com/office/drawing/2014/main" id="{21378131-9DDB-E975-7B76-7B7EA4C2AC18}"/>
+          <p:cNvPr id="107" name="Rectangle 106">
+            <a:extLst>
+              <a:ext uri="{FF2B5EF4-FFF2-40B4-BE49-F238E27FC236}">
+                <a16:creationId xmlns:a16="http://schemas.microsoft.com/office/drawing/2014/main" id="{F5EDBCB3-A8BF-D438-100B-64C07C59BB85}"/>
+              </a:ext>
+            </a:extLst>
+          </p:cNvPr>
+          <p:cNvSpPr/>
+          <p:nvPr/>
+        </p:nvSpPr>
+        <p:spPr>
+          <a:xfrm>
+            <a:off x="6626219" y="12314837"/>
+            <a:ext cx="896323" cy="1536568"/>
+          </a:xfrm>
+          <a:prstGeom prst="rect">
+            <a:avLst/>
+          </a:prstGeom>
+          <a:solidFill>
+            <a:schemeClr val="tx1"/>
+          </a:solidFill>
+          <a:ln>
+            <a:solidFill>
+              <a:schemeClr val="tx1"/>
+            </a:solidFill>
+          </a:ln>
+        </p:spPr>
+        <p:style>
+          <a:lnRef idx="2">
+            <a:schemeClr val="accent1">
+              <a:shade val="15000"/>
+            </a:schemeClr>
+          </a:lnRef>
+          <a:fillRef idx="1">
+            <a:schemeClr val="accent1"/>
+          </a:fillRef>
+          <a:effectRef idx="0">
+            <a:schemeClr val="accent1"/>
+          </a:effectRef>
+          <a:fontRef idx="minor">
+            <a:schemeClr val="lt1"/>
+          </a:fontRef>
+        </p:style>
+        <p:txBody>
+          <a:bodyPr rtlCol="0" anchor="ctr"/>
+          <a:lstStyle/>
+          <a:p>
+            <a:pPr algn="ctr"/>
+            <a:endParaRPr lang="en-US"/>
+          </a:p>
+        </p:txBody>
+      </p:sp>
+      <p:sp>
+        <p:nvSpPr>
+          <p:cNvPr id="119" name="Rectangle 118">
+            <a:extLst>
+              <a:ext uri="{FF2B5EF4-FFF2-40B4-BE49-F238E27FC236}">
+                <a16:creationId xmlns:a16="http://schemas.microsoft.com/office/drawing/2014/main" id="{40A12B4F-799A-632B-B964-DB3A1431D569}"/>
+              </a:ext>
+            </a:extLst>
+          </p:cNvPr>
+          <p:cNvSpPr/>
+          <p:nvPr/>
+        </p:nvSpPr>
+        <p:spPr>
+          <a:xfrm>
+            <a:off x="6607641" y="15367479"/>
+            <a:ext cx="896323" cy="1536568"/>
+          </a:xfrm>
+          <a:prstGeom prst="rect">
+            <a:avLst/>
+          </a:prstGeom>
+          <a:solidFill>
+            <a:schemeClr val="tx1"/>
+          </a:solidFill>
+          <a:ln>
+            <a:solidFill>
+              <a:schemeClr val="tx1"/>
+            </a:solidFill>
+          </a:ln>
+        </p:spPr>
+        <p:style>
+          <a:lnRef idx="2">
+            <a:schemeClr val="accent1">
+              <a:shade val="15000"/>
+            </a:schemeClr>
+          </a:lnRef>
+          <a:fillRef idx="1">
+            <a:schemeClr val="accent1"/>
+          </a:fillRef>
+          <a:effectRef idx="0">
+            <a:schemeClr val="accent1"/>
+          </a:effectRef>
+          <a:fontRef idx="minor">
+            <a:schemeClr val="lt1"/>
+          </a:fontRef>
+        </p:style>
+        <p:txBody>
+          <a:bodyPr rtlCol="0" anchor="ctr"/>
+          <a:lstStyle/>
+          <a:p>
+            <a:pPr algn="ctr"/>
+            <a:endParaRPr lang="en-US"/>
+          </a:p>
+        </p:txBody>
+      </p:sp>
+      <p:sp>
+        <p:nvSpPr>
+          <p:cNvPr id="120" name="Rectangle 119">
+            <a:extLst>
+              <a:ext uri="{FF2B5EF4-FFF2-40B4-BE49-F238E27FC236}">
+                <a16:creationId xmlns:a16="http://schemas.microsoft.com/office/drawing/2014/main" id="{CF297EA5-D2D8-7BDB-D8E4-D6E651E76C21}"/>
+              </a:ext>
+            </a:extLst>
+          </p:cNvPr>
+          <p:cNvSpPr/>
+          <p:nvPr/>
+        </p:nvSpPr>
+        <p:spPr>
+          <a:xfrm>
+            <a:off x="6582777" y="3789333"/>
+            <a:ext cx="896323" cy="1536568"/>
+          </a:xfrm>
+          <a:prstGeom prst="rect">
+            <a:avLst/>
+          </a:prstGeom>
+          <a:solidFill>
+            <a:schemeClr val="tx1"/>
+          </a:solidFill>
+          <a:ln>
+            <a:solidFill>
+              <a:schemeClr val="tx1"/>
+            </a:solidFill>
+          </a:ln>
+        </p:spPr>
+        <p:style>
+          <a:lnRef idx="2">
+            <a:schemeClr val="accent1">
+              <a:shade val="15000"/>
+            </a:schemeClr>
+          </a:lnRef>
+          <a:fillRef idx="1">
+            <a:schemeClr val="accent1"/>
+          </a:fillRef>
+          <a:effectRef idx="0">
+            <a:schemeClr val="accent1"/>
+          </a:effectRef>
+          <a:fontRef idx="minor">
+            <a:schemeClr val="lt1"/>
+          </a:fontRef>
+        </p:style>
+        <p:txBody>
+          <a:bodyPr rtlCol="0" anchor="ctr"/>
+          <a:lstStyle/>
+          <a:p>
+            <a:pPr algn="ctr"/>
+            <a:endParaRPr lang="en-US"/>
+          </a:p>
+        </p:txBody>
+      </p:sp>
+      <p:sp>
+        <p:nvSpPr>
+          <p:cNvPr id="121" name="TextBox 120">
+            <a:extLst>
+              <a:ext uri="{FF2B5EF4-FFF2-40B4-BE49-F238E27FC236}">
+                <a16:creationId xmlns:a16="http://schemas.microsoft.com/office/drawing/2014/main" id="{0BA5648E-1323-4B66-CCAE-202083B59573}"/>
               </a:ext>
             </a:extLst>
           </p:cNvPr>
@@ -10638,8 +14291,8 @@
         </p:nvSpPr>
         <p:spPr>
           <a:xfrm>
-            <a:off x="4711512" y="2389698"/>
-            <a:ext cx="4753224" cy="784830"/>
+            <a:off x="3863595" y="2317935"/>
+            <a:ext cx="7290778" cy="1169551"/>
           </a:xfrm>
           <a:prstGeom prst="rect">
             <a:avLst/>
@@ -10653,7 +14306,7 @@
           <a:lstStyle/>
           <a:p>
             <a:r>
-              <a:rPr lang="en-US" sz="4500" b="1" dirty="0">
+              <a:rPr lang="en-US" sz="7000" b="1" dirty="0">
                 <a:latin typeface="Times New Roman" panose="02020603050405020304" pitchFamily="18" charset="0"/>
                 <a:cs typeface="Times New Roman" panose="02020603050405020304" pitchFamily="18" charset="0"/>
               </a:rPr>
@@ -10664,10 +14317,10 @@
       </p:sp>
       <p:sp>
         <p:nvSpPr>
-          <p:cNvPr id="4" name="TextBox 3">
-            <a:extLst>
-              <a:ext uri="{FF2B5EF4-FFF2-40B4-BE49-F238E27FC236}">
-                <a16:creationId xmlns:a16="http://schemas.microsoft.com/office/drawing/2014/main" id="{8EBE2850-A516-E691-8E98-993D35583F18}"/>
+          <p:cNvPr id="122" name="TextBox 121">
+            <a:extLst>
+              <a:ext uri="{FF2B5EF4-FFF2-40B4-BE49-F238E27FC236}">
+                <a16:creationId xmlns:a16="http://schemas.microsoft.com/office/drawing/2014/main" id="{FCE6B1A2-4EBD-51A8-1753-A8180CBC7326}"/>
               </a:ext>
             </a:extLst>
           </p:cNvPr>
@@ -10676,8 +14329,8 @@
         </p:nvSpPr>
         <p:spPr>
           <a:xfrm>
-            <a:off x="16896717" y="2389698"/>
-            <a:ext cx="2776658" cy="784830"/>
+            <a:off x="16046857" y="2295309"/>
+            <a:ext cx="4217180" cy="1169551"/>
           </a:xfrm>
           <a:prstGeom prst="rect">
             <a:avLst/>
@@ -10691,7 +14344,7 @@
           <a:lstStyle/>
           <a:p>
             <a:r>
-              <a:rPr lang="en-US" sz="4500" b="1" dirty="0">
+              <a:rPr lang="en-US" sz="7000" b="1" dirty="0">
                 <a:latin typeface="Times New Roman" panose="02020603050405020304" pitchFamily="18" charset="0"/>
                 <a:cs typeface="Times New Roman" panose="02020603050405020304" pitchFamily="18" charset="0"/>
               </a:rPr>
@@ -10702,10 +14355,10 @@
       </p:sp>
       <p:sp>
         <p:nvSpPr>
-          <p:cNvPr id="5" name="TextBox 4">
-            <a:extLst>
-              <a:ext uri="{FF2B5EF4-FFF2-40B4-BE49-F238E27FC236}">
-                <a16:creationId xmlns:a16="http://schemas.microsoft.com/office/drawing/2014/main" id="{0E19E686-2137-CB8E-A2BA-4054AF171413}"/>
+          <p:cNvPr id="132" name="TextBox 131">
+            <a:extLst>
+              <a:ext uri="{FF2B5EF4-FFF2-40B4-BE49-F238E27FC236}">
+                <a16:creationId xmlns:a16="http://schemas.microsoft.com/office/drawing/2014/main" id="{4510C690-7795-3352-49A6-EA7D54897965}"/>
               </a:ext>
             </a:extLst>
           </p:cNvPr>
@@ -10714,8 +14367,210 @@
         </p:nvSpPr>
         <p:spPr>
           <a:xfrm>
-            <a:off x="8253669" y="241338"/>
-            <a:ext cx="9462077" cy="1015663"/>
+            <a:off x="2230923" y="535253"/>
+            <a:ext cx="12780550" cy="1323439"/>
+          </a:xfrm>
+          <a:prstGeom prst="rect">
+            <a:avLst/>
+          </a:prstGeom>
+          <a:noFill/>
+        </p:spPr>
+        <p:txBody>
+          <a:bodyPr wrap="none" rtlCol="0">
+            <a:spAutoFit/>
+          </a:bodyPr>
+          <a:lstStyle/>
+          <a:p>
+            <a:r>
+              <a:rPr lang="en-US" sz="8000" b="1" dirty="0">
+                <a:latin typeface="Times New Roman" panose="02020603050405020304" pitchFamily="18" charset="0"/>
+                <a:cs typeface="Times New Roman" panose="02020603050405020304" pitchFamily="18" charset="0"/>
+              </a:rPr>
+              <a:t>A. Constrained Action Event</a:t>
+            </a:r>
+          </a:p>
+        </p:txBody>
+      </p:sp>
+      <p:cxnSp>
+        <p:nvCxnSpPr>
+          <p:cNvPr id="152" name="Straight Arrow Connector 151">
+            <a:extLst>
+              <a:ext uri="{FF2B5EF4-FFF2-40B4-BE49-F238E27FC236}">
+                <a16:creationId xmlns:a16="http://schemas.microsoft.com/office/drawing/2014/main" id="{9DE66050-50E9-FA57-B900-5E7757D5946F}"/>
+              </a:ext>
+            </a:extLst>
+          </p:cNvPr>
+          <p:cNvCxnSpPr/>
+          <p:nvPr/>
+        </p:nvCxnSpPr>
+        <p:spPr>
+          <a:xfrm>
+            <a:off x="862341" y="4871616"/>
+            <a:ext cx="0" cy="10428926"/>
+          </a:xfrm>
+          <a:prstGeom prst="straightConnector1">
+            <a:avLst/>
+          </a:prstGeom>
+          <a:ln w="57150">
+            <a:solidFill>
+              <a:schemeClr val="tx1"/>
+            </a:solidFill>
+            <a:tailEnd type="triangle"/>
+          </a:ln>
+        </p:spPr>
+        <p:style>
+          <a:lnRef idx="2">
+            <a:schemeClr val="dk1"/>
+          </a:lnRef>
+          <a:fillRef idx="0">
+            <a:schemeClr val="dk1"/>
+          </a:fillRef>
+          <a:effectRef idx="1">
+            <a:schemeClr val="dk1"/>
+          </a:effectRef>
+          <a:fontRef idx="minor">
+            <a:schemeClr val="tx1"/>
+          </a:fontRef>
+        </p:style>
+      </p:cxnSp>
+      <p:sp>
+        <p:nvSpPr>
+          <p:cNvPr id="153" name="TextBox 152">
+            <a:extLst>
+              <a:ext uri="{FF2B5EF4-FFF2-40B4-BE49-F238E27FC236}">
+                <a16:creationId xmlns:a16="http://schemas.microsoft.com/office/drawing/2014/main" id="{24B92D88-AD1B-7765-3955-822820186A79}"/>
+              </a:ext>
+            </a:extLst>
+          </p:cNvPr>
+          <p:cNvSpPr txBox="1"/>
+          <p:nvPr/>
+        </p:nvSpPr>
+        <p:spPr>
+          <a:xfrm rot="5400000">
+            <a:off x="387088" y="9205344"/>
+            <a:ext cx="2164182" cy="1169551"/>
+          </a:xfrm>
+          <a:prstGeom prst="rect">
+            <a:avLst/>
+          </a:prstGeom>
+          <a:noFill/>
+        </p:spPr>
+        <p:txBody>
+          <a:bodyPr wrap="none" rtlCol="0">
+            <a:spAutoFit/>
+          </a:bodyPr>
+          <a:lstStyle/>
+          <a:p>
+            <a:r>
+              <a:rPr lang="en-US" sz="7000" b="1" dirty="0">
+                <a:latin typeface="Times New Roman" panose="02020603050405020304" pitchFamily="18" charset="0"/>
+                <a:cs typeface="Times New Roman" panose="02020603050405020304" pitchFamily="18" charset="0"/>
+              </a:rPr>
+              <a:t>Time</a:t>
+            </a:r>
+          </a:p>
+        </p:txBody>
+      </p:sp>
+      <p:cxnSp>
+        <p:nvCxnSpPr>
+          <p:cNvPr id="159" name="Straight Connector 158">
+            <a:extLst>
+              <a:ext uri="{FF2B5EF4-FFF2-40B4-BE49-F238E27FC236}">
+                <a16:creationId xmlns:a16="http://schemas.microsoft.com/office/drawing/2014/main" id="{664E6D3C-3461-E7C7-1EBA-62C1CC36C2E0}"/>
+              </a:ext>
+            </a:extLst>
+          </p:cNvPr>
+          <p:cNvCxnSpPr/>
+          <p:nvPr/>
+        </p:nvCxnSpPr>
+        <p:spPr>
+          <a:xfrm>
+            <a:off x="12628628" y="2318656"/>
+            <a:ext cx="0" cy="15120255"/>
+          </a:xfrm>
+          <a:prstGeom prst="line">
+            <a:avLst/>
+          </a:prstGeom>
+          <a:ln w="57150">
+            <a:solidFill>
+              <a:schemeClr val="tx1"/>
+            </a:solidFill>
+            <a:prstDash val="dash"/>
+          </a:ln>
+        </p:spPr>
+        <p:style>
+          <a:lnRef idx="2">
+            <a:schemeClr val="accent1"/>
+          </a:lnRef>
+          <a:fillRef idx="0">
+            <a:schemeClr val="accent1"/>
+          </a:fillRef>
+          <a:effectRef idx="1">
+            <a:schemeClr val="accent1"/>
+          </a:effectRef>
+          <a:fontRef idx="minor">
+            <a:schemeClr val="tx1"/>
+          </a:fontRef>
+        </p:style>
+      </p:cxnSp>
+      <p:cxnSp>
+        <p:nvCxnSpPr>
+          <p:cNvPr id="162" name="Straight Connector 161">
+            <a:extLst>
+              <a:ext uri="{FF2B5EF4-FFF2-40B4-BE49-F238E27FC236}">
+                <a16:creationId xmlns:a16="http://schemas.microsoft.com/office/drawing/2014/main" id="{EB62206A-7DA5-C991-B405-1AB711B0BBFF}"/>
+              </a:ext>
+            </a:extLst>
+          </p:cNvPr>
+          <p:cNvCxnSpPr/>
+          <p:nvPr/>
+        </p:nvCxnSpPr>
+        <p:spPr>
+          <a:xfrm>
+            <a:off x="39185052" y="2318656"/>
+            <a:ext cx="0" cy="15120255"/>
+          </a:xfrm>
+          <a:prstGeom prst="line">
+            <a:avLst/>
+          </a:prstGeom>
+          <a:ln w="57150">
+            <a:solidFill>
+              <a:schemeClr val="tx1"/>
+            </a:solidFill>
+            <a:prstDash val="dash"/>
+          </a:ln>
+        </p:spPr>
+        <p:style>
+          <a:lnRef idx="2">
+            <a:schemeClr val="accent1"/>
+          </a:lnRef>
+          <a:fillRef idx="0">
+            <a:schemeClr val="accent1"/>
+          </a:fillRef>
+          <a:effectRef idx="1">
+            <a:schemeClr val="accent1"/>
+          </a:effectRef>
+          <a:fontRef idx="minor">
+            <a:schemeClr val="tx1"/>
+          </a:fontRef>
+        </p:style>
+      </p:cxnSp>
+      <p:sp>
+        <p:nvSpPr>
+          <p:cNvPr id="164" name="TextBox 163">
+            <a:extLst>
+              <a:ext uri="{FF2B5EF4-FFF2-40B4-BE49-F238E27FC236}">
+                <a16:creationId xmlns:a16="http://schemas.microsoft.com/office/drawing/2014/main" id="{98174294-9670-2F1C-A97B-6E906EDF5CA6}"/>
+              </a:ext>
+            </a:extLst>
+          </p:cNvPr>
+          <p:cNvSpPr txBox="1"/>
+          <p:nvPr/>
+        </p:nvSpPr>
+        <p:spPr>
+          <a:xfrm>
+            <a:off x="41920096" y="10070475"/>
+            <a:ext cx="6082947" cy="1015663"/>
           </a:xfrm>
           <a:prstGeom prst="rect">
             <a:avLst/>
@@ -10733,59 +14588,17 @@
                 <a:latin typeface="Times New Roman" panose="02020603050405020304" pitchFamily="18" charset="0"/>
                 <a:cs typeface="Times New Roman" panose="02020603050405020304" pitchFamily="18" charset="0"/>
               </a:rPr>
-              <a:t>Unconstrained Action Event</a:t>
+              <a:t>Inefficient Action </a:t>
             </a:r>
           </a:p>
         </p:txBody>
       </p:sp>
-      <p:cxnSp>
-        <p:nvCxnSpPr>
-          <p:cNvPr id="6" name="Straight Arrow Connector 5">
-            <a:extLst>
-              <a:ext uri="{FF2B5EF4-FFF2-40B4-BE49-F238E27FC236}">
-                <a16:creationId xmlns:a16="http://schemas.microsoft.com/office/drawing/2014/main" id="{75DC2CA3-2E6C-0556-F434-09B294FCC00C}"/>
-              </a:ext>
-            </a:extLst>
-          </p:cNvPr>
-          <p:cNvCxnSpPr/>
-          <p:nvPr/>
-        </p:nvCxnSpPr>
-        <p:spPr>
-          <a:xfrm>
-            <a:off x="802106" y="4577702"/>
-            <a:ext cx="0" cy="10428926"/>
-          </a:xfrm>
-          <a:prstGeom prst="straightConnector1">
-            <a:avLst/>
-          </a:prstGeom>
-          <a:ln w="57150">
-            <a:solidFill>
-              <a:schemeClr val="tx1"/>
-            </a:solidFill>
-            <a:tailEnd type="triangle"/>
-          </a:ln>
-        </p:spPr>
-        <p:style>
-          <a:lnRef idx="2">
-            <a:schemeClr val="dk1"/>
-          </a:lnRef>
-          <a:fillRef idx="0">
-            <a:schemeClr val="dk1"/>
-          </a:fillRef>
-          <a:effectRef idx="1">
-            <a:schemeClr val="dk1"/>
-          </a:effectRef>
-          <a:fontRef idx="minor">
-            <a:schemeClr val="tx1"/>
-          </a:fontRef>
-        </p:style>
-      </p:cxnSp>
-      <p:sp>
-        <p:nvSpPr>
-          <p:cNvPr id="7" name="TextBox 6">
-            <a:extLst>
-              <a:ext uri="{FF2B5EF4-FFF2-40B4-BE49-F238E27FC236}">
-                <a16:creationId xmlns:a16="http://schemas.microsoft.com/office/drawing/2014/main" id="{D97033BB-3D73-DCAE-948E-7C7E49C7FF0C}"/>
+      <p:sp>
+        <p:nvSpPr>
+          <p:cNvPr id="165" name="TextBox 164">
+            <a:extLst>
+              <a:ext uri="{FF2B5EF4-FFF2-40B4-BE49-F238E27FC236}">
+                <a16:creationId xmlns:a16="http://schemas.microsoft.com/office/drawing/2014/main" id="{A2C41A0E-C95D-2658-6605-7D6C9EF824F2}"/>
               </a:ext>
             </a:extLst>
           </p:cNvPr>
@@ -10793,9 +14606,9 @@
           <p:nvPr/>
         </p:nvSpPr>
         <p:spPr>
-          <a:xfrm rot="5400000">
-            <a:off x="751392" y="9142262"/>
-            <a:ext cx="1315104" cy="707886"/>
+          <a:xfrm>
+            <a:off x="42180739" y="5923693"/>
+            <a:ext cx="5526706" cy="1015663"/>
           </a:xfrm>
           <a:prstGeom prst="rect">
             <a:avLst/>
@@ -10809,7 +14622,121 @@
           <a:lstStyle/>
           <a:p>
             <a:r>
-              <a:rPr lang="en-US" sz="4000" b="1" dirty="0">
+              <a:rPr lang="en-US" sz="6000" b="1" dirty="0">
+                <a:latin typeface="Times New Roman" panose="02020603050405020304" pitchFamily="18" charset="0"/>
+                <a:cs typeface="Times New Roman" panose="02020603050405020304" pitchFamily="18" charset="0"/>
+              </a:rPr>
+              <a:t>Efficient Action </a:t>
+            </a:r>
+          </a:p>
+        </p:txBody>
+      </p:sp>
+      <p:sp>
+        <p:nvSpPr>
+          <p:cNvPr id="166" name="TextBox 165">
+            <a:extLst>
+              <a:ext uri="{FF2B5EF4-FFF2-40B4-BE49-F238E27FC236}">
+                <a16:creationId xmlns:a16="http://schemas.microsoft.com/office/drawing/2014/main" id="{16A41442-A5B2-784E-27EF-5C5FDA40A3A0}"/>
+              </a:ext>
+            </a:extLst>
+          </p:cNvPr>
+          <p:cNvSpPr txBox="1"/>
+          <p:nvPr/>
+        </p:nvSpPr>
+        <p:spPr>
+          <a:xfrm>
+            <a:off x="30402935" y="2339707"/>
+            <a:ext cx="7290778" cy="1169551"/>
+          </a:xfrm>
+          <a:prstGeom prst="rect">
+            <a:avLst/>
+          </a:prstGeom>
+          <a:noFill/>
+        </p:spPr>
+        <p:txBody>
+          <a:bodyPr wrap="none" rtlCol="0">
+            <a:spAutoFit/>
+          </a:bodyPr>
+          <a:lstStyle/>
+          <a:p>
+            <a:r>
+              <a:rPr lang="en-US" sz="7000" b="1" dirty="0">
+                <a:latin typeface="Times New Roman" panose="02020603050405020304" pitchFamily="18" charset="0"/>
+                <a:cs typeface="Times New Roman" panose="02020603050405020304" pitchFamily="18" charset="0"/>
+              </a:rPr>
+              <a:t>Habituation Phase</a:t>
+            </a:r>
+          </a:p>
+        </p:txBody>
+      </p:sp>
+      <p:sp>
+        <p:nvSpPr>
+          <p:cNvPr id="167" name="TextBox 166">
+            <a:extLst>
+              <a:ext uri="{FF2B5EF4-FFF2-40B4-BE49-F238E27FC236}">
+                <a16:creationId xmlns:a16="http://schemas.microsoft.com/office/drawing/2014/main" id="{0A66CF71-6275-9E8A-EB63-ED29705D4748}"/>
+              </a:ext>
+            </a:extLst>
+          </p:cNvPr>
+          <p:cNvSpPr txBox="1"/>
+          <p:nvPr/>
+        </p:nvSpPr>
+        <p:spPr>
+          <a:xfrm>
+            <a:off x="42586197" y="2317081"/>
+            <a:ext cx="4217180" cy="1169551"/>
+          </a:xfrm>
+          <a:prstGeom prst="rect">
+            <a:avLst/>
+          </a:prstGeom>
+          <a:noFill/>
+        </p:spPr>
+        <p:txBody>
+          <a:bodyPr wrap="none" rtlCol="0">
+            <a:spAutoFit/>
+          </a:bodyPr>
+          <a:lstStyle/>
+          <a:p>
+            <a:r>
+              <a:rPr lang="en-US" sz="7000" b="1" dirty="0">
+                <a:latin typeface="Times New Roman" panose="02020603050405020304" pitchFamily="18" charset="0"/>
+                <a:cs typeface="Times New Roman" panose="02020603050405020304" pitchFamily="18" charset="0"/>
+              </a:rPr>
+              <a:t>Test Phase</a:t>
+            </a:r>
+          </a:p>
+        </p:txBody>
+      </p:sp>
+      <p:sp>
+        <p:nvSpPr>
+          <p:cNvPr id="168" name="TextBox 167">
+            <a:extLst>
+              <a:ext uri="{FF2B5EF4-FFF2-40B4-BE49-F238E27FC236}">
+                <a16:creationId xmlns:a16="http://schemas.microsoft.com/office/drawing/2014/main" id="{836E28AD-550F-C73F-5342-B1DEDEC72E72}"/>
+              </a:ext>
+            </a:extLst>
+          </p:cNvPr>
+          <p:cNvSpPr txBox="1"/>
+          <p:nvPr/>
+        </p:nvSpPr>
+        <p:spPr>
+          <a:xfrm rot="5400000">
+            <a:off x="26926428" y="9227116"/>
+            <a:ext cx="2164182" cy="1169551"/>
+          </a:xfrm>
+          <a:prstGeom prst="rect">
+            <a:avLst/>
+          </a:prstGeom>
+          <a:noFill/>
+        </p:spPr>
+        <p:txBody>
+          <a:bodyPr wrap="none" rtlCol="0">
+            <a:spAutoFit/>
+          </a:bodyPr>
+          <a:lstStyle/>
+          <a:p>
+            <a:r>
+              <a:rPr lang="en-US" sz="7000" b="1" dirty="0">
                 <a:latin typeface="Times New Roman" panose="02020603050405020304" pitchFamily="18" charset="0"/>
                 <a:cs typeface="Times New Roman" panose="02020603050405020304" pitchFamily="18" charset="0"/>
               </a:rPr>

--- a/psychologicalReview/figures/actionParadigmFigures.pptx
+++ b/psychologicalReview/figures/actionParadigmFigures.pptx
@@ -198,7 +198,7 @@
           <a:p>
             <a:fld id="{E16BCF61-F42E-4834-BCD0-9EC4CEE09EFA}" type="datetimeFigureOut">
               <a:rPr lang="en-US" smtClean="0"/>
-              <a:t>6/11/2026</a:t>
+              <a:t>6/12/2026</a:t>
             </a:fld>
             <a:endParaRPr lang="en-US"/>
           </a:p>
@@ -798,7 +798,7 @@
           <a:p>
             <a:fld id="{95168CD7-63E8-421D-92A5-1A28A922945B}" type="datetimeFigureOut">
               <a:rPr lang="en-US" smtClean="0"/>
-              <a:t>6/11/2026</a:t>
+              <a:t>6/12/2026</a:t>
             </a:fld>
             <a:endParaRPr lang="en-US"/>
           </a:p>
@@ -968,7 +968,7 @@
           <a:p>
             <a:fld id="{95168CD7-63E8-421D-92A5-1A28A922945B}" type="datetimeFigureOut">
               <a:rPr lang="en-US" smtClean="0"/>
-              <a:t>6/11/2026</a:t>
+              <a:t>6/12/2026</a:t>
             </a:fld>
             <a:endParaRPr lang="en-US"/>
           </a:p>
@@ -1148,7 +1148,7 @@
           <a:p>
             <a:fld id="{95168CD7-63E8-421D-92A5-1A28A922945B}" type="datetimeFigureOut">
               <a:rPr lang="en-US" smtClean="0"/>
-              <a:t>6/11/2026</a:t>
+              <a:t>6/12/2026</a:t>
             </a:fld>
             <a:endParaRPr lang="en-US"/>
           </a:p>
@@ -1318,7 +1318,7 @@
           <a:p>
             <a:fld id="{95168CD7-63E8-421D-92A5-1A28A922945B}" type="datetimeFigureOut">
               <a:rPr lang="en-US" smtClean="0"/>
-              <a:t>6/11/2026</a:t>
+              <a:t>6/12/2026</a:t>
             </a:fld>
             <a:endParaRPr lang="en-US"/>
           </a:p>
@@ -1564,7 +1564,7 @@
           <a:p>
             <a:fld id="{95168CD7-63E8-421D-92A5-1A28A922945B}" type="datetimeFigureOut">
               <a:rPr lang="en-US" smtClean="0"/>
-              <a:t>6/11/2026</a:t>
+              <a:t>6/12/2026</a:t>
             </a:fld>
             <a:endParaRPr lang="en-US"/>
           </a:p>
@@ -1796,7 +1796,7 @@
           <a:p>
             <a:fld id="{95168CD7-63E8-421D-92A5-1A28A922945B}" type="datetimeFigureOut">
               <a:rPr lang="en-US" smtClean="0"/>
-              <a:t>6/11/2026</a:t>
+              <a:t>6/12/2026</a:t>
             </a:fld>
             <a:endParaRPr lang="en-US"/>
           </a:p>
@@ -2163,7 +2163,7 @@
           <a:p>
             <a:fld id="{95168CD7-63E8-421D-92A5-1A28A922945B}" type="datetimeFigureOut">
               <a:rPr lang="en-US" smtClean="0"/>
-              <a:t>6/11/2026</a:t>
+              <a:t>6/12/2026</a:t>
             </a:fld>
             <a:endParaRPr lang="en-US"/>
           </a:p>
@@ -2281,7 +2281,7 @@
           <a:p>
             <a:fld id="{95168CD7-63E8-421D-92A5-1A28A922945B}" type="datetimeFigureOut">
               <a:rPr lang="en-US" smtClean="0"/>
-              <a:t>6/11/2026</a:t>
+              <a:t>6/12/2026</a:t>
             </a:fld>
             <a:endParaRPr lang="en-US"/>
           </a:p>
@@ -2376,7 +2376,7 @@
           <a:p>
             <a:fld id="{95168CD7-63E8-421D-92A5-1A28A922945B}" type="datetimeFigureOut">
               <a:rPr lang="en-US" smtClean="0"/>
-              <a:t>6/11/2026</a:t>
+              <a:t>6/12/2026</a:t>
             </a:fld>
             <a:endParaRPr lang="en-US"/>
           </a:p>
@@ -2653,7 +2653,7 @@
           <a:p>
             <a:fld id="{95168CD7-63E8-421D-92A5-1A28A922945B}" type="datetimeFigureOut">
               <a:rPr lang="en-US" smtClean="0"/>
-              <a:t>6/11/2026</a:t>
+              <a:t>6/12/2026</a:t>
             </a:fld>
             <a:endParaRPr lang="en-US"/>
           </a:p>
@@ -2910,7 +2910,7 @@
           <a:p>
             <a:fld id="{95168CD7-63E8-421D-92A5-1A28A922945B}" type="datetimeFigureOut">
               <a:rPr lang="en-US" smtClean="0"/>
-              <a:t>6/11/2026</a:t>
+              <a:t>6/12/2026</a:t>
             </a:fld>
             <a:endParaRPr lang="en-US"/>
           </a:p>
@@ -3123,7 +3123,7 @@
           <a:p>
             <a:fld id="{95168CD7-63E8-421D-92A5-1A28A922945B}" type="datetimeFigureOut">
               <a:rPr lang="en-US" smtClean="0"/>
-              <a:t>6/11/2026</a:t>
+              <a:t>6/12/2026</a:t>
             </a:fld>
             <a:endParaRPr lang="en-US"/>
           </a:p>
@@ -7349,7 +7349,7 @@
           <a:lstStyle/>
           <a:p>
             <a:pPr algn="ctr"/>
-            <a:endParaRPr lang="en-US"/>
+            <a:endParaRPr lang="en-US" dirty="0"/>
           </a:p>
         </p:txBody>
       </p:sp>
@@ -10802,48 +10802,6 @@
           </a:p>
         </p:txBody>
       </p:sp>
-      <p:cxnSp>
-        <p:nvCxnSpPr>
-          <p:cNvPr id="6" name="Straight Arrow Connector 5">
-            <a:extLst>
-              <a:ext uri="{FF2B5EF4-FFF2-40B4-BE49-F238E27FC236}">
-                <a16:creationId xmlns:a16="http://schemas.microsoft.com/office/drawing/2014/main" id="{75DC2CA3-2E6C-0556-F434-09B294FCC00C}"/>
-              </a:ext>
-            </a:extLst>
-          </p:cNvPr>
-          <p:cNvCxnSpPr/>
-          <p:nvPr/>
-        </p:nvCxnSpPr>
-        <p:spPr>
-          <a:xfrm>
-            <a:off x="27379352" y="4871616"/>
-            <a:ext cx="0" cy="10428926"/>
-          </a:xfrm>
-          <a:prstGeom prst="straightConnector1">
-            <a:avLst/>
-          </a:prstGeom>
-          <a:ln w="57150">
-            <a:solidFill>
-              <a:schemeClr val="tx1"/>
-            </a:solidFill>
-            <a:tailEnd type="triangle"/>
-          </a:ln>
-        </p:spPr>
-        <p:style>
-          <a:lnRef idx="2">
-            <a:schemeClr val="dk1"/>
-          </a:lnRef>
-          <a:fillRef idx="0">
-            <a:schemeClr val="dk1"/>
-          </a:fillRef>
-          <a:effectRef idx="1">
-            <a:schemeClr val="dk1"/>
-          </a:effectRef>
-          <a:fontRef idx="minor">
-            <a:schemeClr val="tx1"/>
-          </a:fontRef>
-        </p:style>
-      </p:cxnSp>
       <p:grpSp>
         <p:nvGrpSpPr>
           <p:cNvPr id="8" name="Group 7">
@@ -14393,86 +14351,6 @@
       </p:sp>
       <p:cxnSp>
         <p:nvCxnSpPr>
-          <p:cNvPr id="152" name="Straight Arrow Connector 151">
-            <a:extLst>
-              <a:ext uri="{FF2B5EF4-FFF2-40B4-BE49-F238E27FC236}">
-                <a16:creationId xmlns:a16="http://schemas.microsoft.com/office/drawing/2014/main" id="{9DE66050-50E9-FA57-B900-5E7757D5946F}"/>
-              </a:ext>
-            </a:extLst>
-          </p:cNvPr>
-          <p:cNvCxnSpPr/>
-          <p:nvPr/>
-        </p:nvCxnSpPr>
-        <p:spPr>
-          <a:xfrm>
-            <a:off x="862341" y="4871616"/>
-            <a:ext cx="0" cy="10428926"/>
-          </a:xfrm>
-          <a:prstGeom prst="straightConnector1">
-            <a:avLst/>
-          </a:prstGeom>
-          <a:ln w="57150">
-            <a:solidFill>
-              <a:schemeClr val="tx1"/>
-            </a:solidFill>
-            <a:tailEnd type="triangle"/>
-          </a:ln>
-        </p:spPr>
-        <p:style>
-          <a:lnRef idx="2">
-            <a:schemeClr val="dk1"/>
-          </a:lnRef>
-          <a:fillRef idx="0">
-            <a:schemeClr val="dk1"/>
-          </a:fillRef>
-          <a:effectRef idx="1">
-            <a:schemeClr val="dk1"/>
-          </a:effectRef>
-          <a:fontRef idx="minor">
-            <a:schemeClr val="tx1"/>
-          </a:fontRef>
-        </p:style>
-      </p:cxnSp>
-      <p:sp>
-        <p:nvSpPr>
-          <p:cNvPr id="153" name="TextBox 152">
-            <a:extLst>
-              <a:ext uri="{FF2B5EF4-FFF2-40B4-BE49-F238E27FC236}">
-                <a16:creationId xmlns:a16="http://schemas.microsoft.com/office/drawing/2014/main" id="{24B92D88-AD1B-7765-3955-822820186A79}"/>
-              </a:ext>
-            </a:extLst>
-          </p:cNvPr>
-          <p:cNvSpPr txBox="1"/>
-          <p:nvPr/>
-        </p:nvSpPr>
-        <p:spPr>
-          <a:xfrm rot="5400000">
-            <a:off x="387088" y="9205344"/>
-            <a:ext cx="2164182" cy="1169551"/>
-          </a:xfrm>
-          <a:prstGeom prst="rect">
-            <a:avLst/>
-          </a:prstGeom>
-          <a:noFill/>
-        </p:spPr>
-        <p:txBody>
-          <a:bodyPr wrap="none" rtlCol="0">
-            <a:spAutoFit/>
-          </a:bodyPr>
-          <a:lstStyle/>
-          <a:p>
-            <a:r>
-              <a:rPr lang="en-US" sz="7000" b="1" dirty="0">
-                <a:latin typeface="Times New Roman" panose="02020603050405020304" pitchFamily="18" charset="0"/>
-                <a:cs typeface="Times New Roman" panose="02020603050405020304" pitchFamily="18" charset="0"/>
-              </a:rPr>
-              <a:t>Time</a:t>
-            </a:r>
-          </a:p>
-        </p:txBody>
-      </p:sp>
-      <p:cxnSp>
-        <p:nvCxnSpPr>
           <p:cNvPr id="159" name="Straight Connector 158">
             <a:extLst>
               <a:ext uri="{FF2B5EF4-FFF2-40B4-BE49-F238E27FC236}">
@@ -14703,44 +14581,6 @@
                 <a:cs typeface="Times New Roman" panose="02020603050405020304" pitchFamily="18" charset="0"/>
               </a:rPr>
               <a:t>Test Phase</a:t>
-            </a:r>
-          </a:p>
-        </p:txBody>
-      </p:sp>
-      <p:sp>
-        <p:nvSpPr>
-          <p:cNvPr id="168" name="TextBox 167">
-            <a:extLst>
-              <a:ext uri="{FF2B5EF4-FFF2-40B4-BE49-F238E27FC236}">
-                <a16:creationId xmlns:a16="http://schemas.microsoft.com/office/drawing/2014/main" id="{836E28AD-550F-C73F-5342-B1DEDEC72E72}"/>
-              </a:ext>
-            </a:extLst>
-          </p:cNvPr>
-          <p:cNvSpPr txBox="1"/>
-          <p:nvPr/>
-        </p:nvSpPr>
-        <p:spPr>
-          <a:xfrm rot="5400000">
-            <a:off x="26926428" y="9227116"/>
-            <a:ext cx="2164182" cy="1169551"/>
-          </a:xfrm>
-          <a:prstGeom prst="rect">
-            <a:avLst/>
-          </a:prstGeom>
-          <a:noFill/>
-        </p:spPr>
-        <p:txBody>
-          <a:bodyPr wrap="none" rtlCol="0">
-            <a:spAutoFit/>
-          </a:bodyPr>
-          <a:lstStyle/>
-          <a:p>
-            <a:r>
-              <a:rPr lang="en-US" sz="7000" b="1" dirty="0">
-                <a:latin typeface="Times New Roman" panose="02020603050405020304" pitchFamily="18" charset="0"/>
-                <a:cs typeface="Times New Roman" panose="02020603050405020304" pitchFamily="18" charset="0"/>
-              </a:rPr>
-              <a:t>Time</a:t>
             </a:r>
           </a:p>
         </p:txBody>
